--- a/deck/PDFSentry_Review3.pptx
+++ b/deck/PDFSentry_Review3.pptx
@@ -18,9 +18,10 @@
     <p:sldId id="266" r:id="rId12"/>
     <p:sldId id="267" r:id="rId13"/>
     <p:sldId id="268" r:id="rId14"/>
+    <p:sldId id="269" r:id="rId15"/>
   </p:sldIdLst>
   <p:notesMasterIdLst>
-    <p:notesMasterId r:id="rId15"/>
+    <p:notesMasterId r:id="rId16"/>
   </p:notesMasterIdLst>
   <p:sldSz cx="12192000" cy="6858000"/>
   <p:notesSz cx="6858000" cy="12192000"/>
@@ -1508,6 +1509,94 @@
             <a:fld id="{F7021451-1387-4CA6-816F-3879F97B5CBC}" type="slidenum">
               <a:rPr lang="en-US"/>
               <a:t>13</a:t>
+            </a:fld>
+            <a:endParaRPr lang="en-US"/>
+          </a:p>
+        </p:txBody>
+      </p:sp>
+    </p:spTree>
+    <p:extLst>
+      <p:ext uri="{BB962C8B-B14F-4D97-AF65-F5344CB8AC3E}">
+        <p14:creationId xmlns:p14="http://schemas.microsoft.com/office/powerpoint/2010/main" val="1024086991"/>
+      </p:ext>
+    </p:extLst>
+  </p:cSld>
+  <p:clrMapOvr>
+    <a:masterClrMapping/>
+  </p:clrMapOvr>
+</p:notes>
+</file>
+
+<file path=ppt/notesSlides/notesSlide14.xml><?xml version="1.0" encoding="utf-8"?>
+<p:notes xmlns:a="http://schemas.openxmlformats.org/drawingml/2006/main" xmlns:r="http://schemas.openxmlformats.org/officeDocument/2006/relationships" xmlns:p="http://schemas.openxmlformats.org/presentationml/2006/main">
+  <p:cSld>
+    <p:spTree>
+      <p:nvGrpSpPr>
+        <p:cNvPr id="1" name=""/>
+        <p:cNvGrpSpPr/>
+        <p:nvPr/>
+      </p:nvGrpSpPr>
+      <p:grpSpPr>
+        <a:xfrm>
+          <a:off x="0" y="0"/>
+          <a:ext cx="0" cy="0"/>
+          <a:chOff x="0" y="0"/>
+          <a:chExt cx="0" cy="0"/>
+        </a:xfrm>
+      </p:grpSpPr>
+      <p:sp>
+        <p:nvSpPr>
+          <p:cNvPr id="2" name="Slide Image Placeholder 1"/>
+          <p:cNvSpPr>
+            <a:spLocks noGrp="1" noRot="1" noChangeAspect="1"/>
+          </p:cNvSpPr>
+          <p:nvPr>
+            <p:ph type="sldImg"/>
+          </p:nvPr>
+        </p:nvSpPr>
+        <p:spPr/>
+      </p:sp>
+      <p:sp>
+        <p:nvSpPr>
+          <p:cNvPr id="3" name="Notes Placeholder 2"/>
+          <p:cNvSpPr>
+            <a:spLocks noGrp="1"/>
+          </p:cNvSpPr>
+          <p:nvPr>
+            <p:ph type="body" idx="1"/>
+          </p:nvPr>
+        </p:nvSpPr>
+        <p:spPr/>
+        <p:txBody>
+          <a:bodyPr/>
+          <a:lstStyle/>
+          <a:p>
+            <a:r>
+              <a:rPr lang="en-US" dirty="0"/>
+              <a:t/>
+            </a:r>
+            <a:endParaRPr lang="en-US" dirty="0"/>
+          </a:p>
+        </p:txBody>
+      </p:sp>
+      <p:sp>
+        <p:nvSpPr>
+          <p:cNvPr id="4" name="Slide Number Placeholder 3"/>
+          <p:cNvSpPr>
+            <a:spLocks noGrp="1"/>
+          </p:cNvSpPr>
+          <p:nvPr>
+            <p:ph type="sldNum" sz="quarter" idx="10"/>
+          </p:nvPr>
+        </p:nvSpPr>
+        <p:spPr/>
+        <p:txBody>
+          <a:bodyPr/>
+          <a:lstStyle/>
+          <a:p>
+            <a:fld id="{F7021451-1387-4CA6-816F-3879F97B5CBC}" type="slidenum">
+              <a:rPr lang="en-US"/>
+              <a:t>14</a:t>
             </a:fld>
             <a:endParaRPr lang="en-US"/>
           </a:p>
@@ -2664,7 +2753,7 @@
         </p:blipFill>
         <p:spPr>
           <a:xfrm>
-            <a:off x="7955280" y="1371600"/>
+            <a:off x="7955280" y="1325880"/>
             <a:ext cx="3657600" cy="3657600"/>
           </a:xfrm>
           <a:prstGeom prst="rect">
@@ -2672,15 +2761,41 @@
           </a:prstGeom>
         </p:spPr>
       </p:pic>
-      <p:sp>
-        <p:nvSpPr>
-          <p:cNvPr id="5" name="Text 2"/>
-          <p:cNvSpPr txBox="1"/>
-          <p:nvPr/>
-        </p:nvSpPr>
-        <p:spPr>
-          <a:xfrm>
-            <a:off x="548640" y="1828800"/>
+      <p:pic>
+        <p:nvPicPr>
+          <p:cNvPr id="5" name="Image 1" descr="/home/claude/PDFSentry/deck/assets/orn_arcs.png">    </p:cNvPr>
+          <p:cNvPicPr>
+            <a:picLocks noChangeAspect="1"/>
+          </p:cNvPicPr>
+          <p:nvPr/>
+        </p:nvPicPr>
+        <p:blipFill>
+          <a:blip r:embed="rId3">
+            <a:alphaModFix amt="55000"/>
+          </a:blip>
+          <a:stretch>
+            <a:fillRect/>
+          </a:stretch>
+        </p:blipFill>
+        <p:spPr>
+          <a:xfrm>
+            <a:off x="10241280" y="4572000"/>
+            <a:ext cx="1371600" cy="1371600"/>
+          </a:xfrm>
+          <a:prstGeom prst="rect">
+            <a:avLst/>
+          </a:prstGeom>
+        </p:spPr>
+      </p:pic>
+      <p:sp>
+        <p:nvSpPr>
+          <p:cNvPr id="6" name="Text 2"/>
+          <p:cNvSpPr txBox="1"/>
+          <p:nvPr/>
+        </p:nvSpPr>
+        <p:spPr>
+          <a:xfrm>
+            <a:off x="548640" y="1783080"/>
             <a:ext cx="7315200" cy="365760"/>
           </a:xfrm>
           <a:prstGeom prst="rect">
@@ -2713,13 +2828,13 @@
       </p:sp>
       <p:sp>
         <p:nvSpPr>
-          <p:cNvPr id="6" name="Text 3"/>
-          <p:cNvSpPr txBox="1"/>
-          <p:nvPr/>
-        </p:nvSpPr>
-        <p:spPr>
-          <a:xfrm>
-            <a:off x="475488" y="2212848"/>
+          <p:cNvPr id="7" name="Text 3"/>
+          <p:cNvSpPr txBox="1"/>
+          <p:nvPr/>
+        </p:nvSpPr>
+        <p:spPr>
+          <a:xfrm>
+            <a:off x="475488" y="2167128"/>
             <a:ext cx="8229600" cy="1371600"/>
           </a:xfrm>
           <a:prstGeom prst="rect">
@@ -2752,14 +2867,14 @@
       </p:sp>
       <p:sp>
         <p:nvSpPr>
-          <p:cNvPr id="7" name="Text 4"/>
-          <p:cNvSpPr txBox="1"/>
-          <p:nvPr/>
-        </p:nvSpPr>
-        <p:spPr>
-          <a:xfrm>
-            <a:off x="548640" y="3657600"/>
-            <a:ext cx="6949440" cy="822960"/>
+          <p:cNvPr id="8" name="Text 4"/>
+          <p:cNvSpPr txBox="1"/>
+          <p:nvPr/>
+        </p:nvSpPr>
+        <p:spPr>
+          <a:xfrm>
+            <a:off x="548640" y="3611880"/>
+            <a:ext cx="7040880" cy="822960"/>
           </a:xfrm>
           <a:prstGeom prst="rect">
             <a:avLst/>
@@ -2794,14 +2909,56 @@
       </p:sp>
       <p:sp>
         <p:nvSpPr>
-          <p:cNvPr id="8" name="Text 5"/>
-          <p:cNvSpPr txBox="1"/>
-          <p:nvPr/>
-        </p:nvSpPr>
-        <p:spPr>
-          <a:xfrm>
-            <a:off x="548640" y="5349240"/>
-            <a:ext cx="6766560" cy="1051560"/>
+          <p:cNvPr id="9" name="Text 5"/>
+          <p:cNvSpPr txBox="1"/>
+          <p:nvPr/>
+        </p:nvSpPr>
+        <p:spPr>
+          <a:xfrm>
+            <a:off x="548640" y="4480560"/>
+            <a:ext cx="7040880" cy="457200"/>
+          </a:xfrm>
+          <a:prstGeom prst="rect">
+            <a:avLst/>
+          </a:prstGeom>
+          <a:noFill/>
+          <a:ln/>
+        </p:spPr>
+        <p:txBody>
+          <a:bodyPr wrap="square" lIns="0" tIns="0" rIns="0" bIns="0" rtlCol="0" anchor="ctr"/>
+          <a:lstStyle/>
+          <a:p>
+            <a:pPr indent="0" marL="0">
+              <a:lnSpc>
+                <a:spcPct val="105000"/>
+              </a:lnSpc>
+              <a:buNone/>
+            </a:pPr>
+            <a:r>
+              <a:rPr lang="en-US" sz="1300" i="1" dirty="0">
+                <a:solidFill>
+                  <a:srgbClr val="6B7178"/>
+                </a:solidFill>
+                <a:latin typeface="Calibri" pitchFamily="34" charset="0"/>
+                <a:ea typeface="Calibri" pitchFamily="34" charset="-122"/>
+                <a:cs typeface="Calibri" pitchFamily="34" charset="-120"/>
+              </a:rPr>
+              <a:t>Reachability over recognition — reading what a PDF will do, not just what it contains.</a:t>
+            </a:r>
+            <a:endParaRPr lang="en-US" sz="1300" dirty="0"/>
+          </a:p>
+        </p:txBody>
+      </p:sp>
+      <p:sp>
+        <p:nvSpPr>
+          <p:cNvPr id="10" name="Text 6"/>
+          <p:cNvSpPr txBox="1"/>
+          <p:nvPr/>
+        </p:nvSpPr>
+        <p:spPr>
+          <a:xfrm>
+            <a:off x="548640" y="5440680"/>
+            <a:ext cx="6766560" cy="1005840"/>
           </a:xfrm>
           <a:prstGeom prst="rect">
             <a:avLst/>
@@ -2876,14 +3033,14 @@
       </p:sp>
       <p:sp>
         <p:nvSpPr>
-          <p:cNvPr id="9" name="Text 6"/>
-          <p:cNvSpPr txBox="1"/>
-          <p:nvPr/>
-        </p:nvSpPr>
-        <p:spPr>
-          <a:xfrm>
-            <a:off x="548640" y="6400800"/>
-            <a:ext cx="6400800" cy="274320"/>
+          <p:cNvPr id="11" name="Text 7"/>
+          <p:cNvSpPr txBox="1"/>
+          <p:nvPr/>
+        </p:nvSpPr>
+        <p:spPr>
+          <a:xfrm>
+            <a:off x="548640" y="6419088"/>
+            <a:ext cx="7315200" cy="274320"/>
           </a:xfrm>
           <a:prstGeom prst="rect">
             <a:avLst/>
@@ -3038,7 +3195,46 @@
         </p:nvSpPr>
         <p:spPr>
           <a:xfrm>
-            <a:off x="502920" y="822960"/>
+            <a:off x="512064" y="786384"/>
+            <a:ext cx="10058400" cy="256032"/>
+          </a:xfrm>
+          <a:prstGeom prst="rect">
+            <a:avLst/>
+          </a:prstGeom>
+          <a:noFill/>
+          <a:ln/>
+        </p:spPr>
+        <p:txBody>
+          <a:bodyPr wrap="square" lIns="0" tIns="0" rIns="0" bIns="0" rtlCol="0" anchor="ctr"/>
+          <a:lstStyle/>
+          <a:p>
+            <a:pPr indent="0" marL="0">
+              <a:buNone/>
+            </a:pPr>
+            <a:r>
+              <a:rPr lang="en-US" sz="1100" b="1" spc="400" kern="0" dirty="0">
+                <a:solidFill>
+                  <a:srgbClr val="2F8F82"/>
+                </a:solidFill>
+                <a:latin typeface="Calibri" pitchFamily="34" charset="0"/>
+                <a:ea typeface="Calibri" pitchFamily="34" charset="-122"/>
+                <a:cs typeface="Calibri" pitchFamily="34" charset="-120"/>
+              </a:rPr>
+              <a:t>IOCs</a:t>
+            </a:r>
+            <a:endParaRPr lang="en-US" sz="1100" dirty="0"/>
+          </a:p>
+        </p:txBody>
+      </p:sp>
+      <p:sp>
+        <p:nvSpPr>
+          <p:cNvPr id="5" name="Text 3"/>
+          <p:cNvSpPr txBox="1"/>
+          <p:nvPr/>
+        </p:nvSpPr>
+        <p:spPr>
+          <a:xfrm>
+            <a:off x="502920" y="1078992"/>
             <a:ext cx="11155680" cy="731520"/>
           </a:xfrm>
           <a:prstGeom prst="rect">
@@ -3063,15 +3259,622 @@
                 <a:ea typeface="Arial Black" pitchFamily="34" charset="-122"/>
                 <a:cs typeface="Arial Black" pitchFamily="34" charset="-120"/>
               </a:rPr>
+              <a:t>Indicators of Compromise (IoCs)</a:t>
+            </a:r>
+            <a:endParaRPr lang="en-US" sz="3200" dirty="0"/>
+          </a:p>
+        </p:txBody>
+      </p:sp>
+      <p:sp>
+        <p:nvSpPr>
+          <p:cNvPr id="6" name="Text 4"/>
+          <p:cNvSpPr txBox="1"/>
+          <p:nvPr/>
+        </p:nvSpPr>
+        <p:spPr>
+          <a:xfrm>
+            <a:off x="548640" y="1783080"/>
+            <a:ext cx="10881360" cy="548640"/>
+          </a:xfrm>
+          <a:prstGeom prst="rect">
+            <a:avLst/>
+          </a:prstGeom>
+          <a:noFill/>
+          <a:ln/>
+        </p:spPr>
+        <p:txBody>
+          <a:bodyPr wrap="square" lIns="0" tIns="0" rIns="0" bIns="0" rtlCol="0" anchor="ctr"/>
+          <a:lstStyle/>
+          <a:p>
+            <a:pPr indent="0" marL="0">
+              <a:lnSpc>
+                <a:spcPct val="105000"/>
+              </a:lnSpc>
+              <a:buNone/>
+            </a:pPr>
+            <a:r>
+              <a:rPr lang="en-US" sz="1550" dirty="0">
+                <a:solidFill>
+                  <a:srgbClr val="3A3F46"/>
+                </a:solidFill>
+                <a:latin typeface="Calibri" pitchFamily="34" charset="0"/>
+                <a:ea typeface="Calibri" pitchFamily="34" charset="-122"/>
+                <a:cs typeface="Calibri" pitchFamily="34" charset="-120"/>
+              </a:rPr>
+              <a:t>Structural, checkable indicators — each maps to a reachability feature, not a fragile byte signature.</a:t>
+            </a:r>
+            <a:endParaRPr lang="en-US" sz="1550" dirty="0"/>
+          </a:p>
+        </p:txBody>
+      </p:sp>
+      <p:sp>
+        <p:nvSpPr>
+          <p:cNvPr id="7" name="Text 5"/>
+          <p:cNvSpPr txBox="1"/>
+          <p:nvPr/>
+        </p:nvSpPr>
+        <p:spPr>
+          <a:xfrm>
+            <a:off x="566928" y="2423160"/>
+            <a:ext cx="10881360" cy="4206240"/>
+          </a:xfrm>
+          <a:prstGeom prst="rect">
+            <a:avLst/>
+          </a:prstGeom>
+          <a:noFill/>
+          <a:ln/>
+        </p:spPr>
+        <p:txBody>
+          <a:bodyPr wrap="square" lIns="0" tIns="0" rIns="0" bIns="0" rtlCol="0" anchor="t"/>
+          <a:lstStyle/>
+          <a:p>
+            <a:pPr marL="342900" indent="-342900">
+              <a:lnSpc>
+                <a:spcPct val="118000"/>
+              </a:lnSpc>
+              <a:buSzPct val="100000"/>
+              <a:buChar char="•"/>
+            </a:pPr>
+            <a:r>
+              <a:rPr lang="en-US" sz="1600" b="1" dirty="0">
+                <a:solidFill>
+                  <a:srgbClr val="1B1E22"/>
+                </a:solidFill>
+                <a:latin typeface="Calibri" pitchFamily="34" charset="0"/>
+                <a:ea typeface="Calibri" pitchFamily="34" charset="-122"/>
+                <a:cs typeface="Calibri" pitchFamily="34" charset="-120"/>
+              </a:rPr>
+              <a:t>Reachable auto-trigger  </a:t>
+            </a:r>
+            <a:pPr indent="0" marL="0">
+              <a:lnSpc>
+                <a:spcPct val="118000"/>
+              </a:lnSpc>
+              <a:spcAft>
+                <a:spcPts val="1300"/>
+              </a:spcAft>
+              <a:buNone/>
+            </a:pPr>
+            <a:r>
+              <a:rPr lang="en-US" sz="1600" dirty="0">
+                <a:solidFill>
+                  <a:srgbClr val="3A3F46"/>
+                </a:solidFill>
+                <a:latin typeface="Calibri" pitchFamily="34" charset="0"/>
+                <a:ea typeface="Calibri" pitchFamily="34" charset="-122"/>
+                <a:cs typeface="Calibri" pitchFamily="34" charset="-120"/>
+              </a:rPr>
+              <a:t>/OpenAction | /AA | /Names/JavaScript with a path to /JS, /Launch or /EmbeddedFile → ACTIVE_ONOPEN.</a:t>
+            </a:r>
+            <a:endParaRPr lang="en-US" sz="1600" dirty="0"/>
+          </a:p>
+          <a:p>
+            <a:pPr marL="342900" indent="-342900">
+              <a:lnSpc>
+                <a:spcPct val="118000"/>
+              </a:lnSpc>
+              <a:buSzPct val="100000"/>
+              <a:buChar char="•"/>
+            </a:pPr>
+            <a:r>
+              <a:rPr lang="en-US" sz="1600" b="1" dirty="0">
+                <a:solidFill>
+                  <a:srgbClr val="1B1E22"/>
+                </a:solidFill>
+                <a:latin typeface="Calibri" pitchFamily="34" charset="0"/>
+                <a:ea typeface="Calibri" pitchFamily="34" charset="-122"/>
+                <a:cs typeface="Calibri" pitchFamily="34" charset="-120"/>
+              </a:rPr>
+              <a:t>Hidden-gap signature  </a:t>
+            </a:r>
+            <a:pPr indent="0" marL="0">
+              <a:lnSpc>
+                <a:spcPct val="118000"/>
+              </a:lnSpc>
+              <a:spcAft>
+                <a:spcPts val="1300"/>
+              </a:spcAft>
+              <a:buNone/>
+            </a:pPr>
+            <a:r>
+              <a:rPr lang="en-US" sz="1600" dirty="0">
+                <a:solidFill>
+                  <a:srgbClr val="3A3F46"/>
+                </a:solidFill>
+                <a:latin typeface="Calibri" pitchFamily="34" charset="0"/>
+                <a:ea typeface="Calibri" pitchFamily="34" charset="-122"/>
+                <a:cs typeface="Calibri" pitchFamily="34" charset="-120"/>
+              </a:rPr>
+              <a:t>An ACTIVE capability whose naive token count is 0 — a contradiction only concealment produces.</a:t>
+            </a:r>
+            <a:endParaRPr lang="en-US" sz="1600" dirty="0"/>
+          </a:p>
+          <a:p>
+            <a:pPr marL="342900" indent="-342900">
+              <a:lnSpc>
+                <a:spcPct val="118000"/>
+              </a:lnSpc>
+              <a:buSzPct val="100000"/>
+              <a:buChar char="•"/>
+            </a:pPr>
+            <a:r>
+              <a:rPr lang="en-US" sz="1600" b="1" dirty="0">
+                <a:solidFill>
+                  <a:srgbClr val="1B1E22"/>
+                </a:solidFill>
+                <a:latin typeface="Calibri" pitchFamily="34" charset="0"/>
+                <a:ea typeface="Calibri" pitchFamily="34" charset="-122"/>
+                <a:cs typeface="Calibri" pitchFamily="34" charset="-120"/>
+              </a:rPr>
+              <a:t>Object-stream hiding  </a:t>
+            </a:r>
+            <a:pPr indent="0" marL="0">
+              <a:lnSpc>
+                <a:spcPct val="118000"/>
+              </a:lnSpc>
+              <a:spcAft>
+                <a:spcPts val="1300"/>
+              </a:spcAft>
+              <a:buNone/>
+            </a:pPr>
+            <a:r>
+              <a:rPr lang="en-US" sz="1600" dirty="0">
+                <a:solidFill>
+                  <a:srgbClr val="3A3F46"/>
+                </a:solidFill>
+                <a:latin typeface="Calibri" pitchFamily="34" charset="0"/>
+                <a:ea typeface="Calibri" pitchFamily="34" charset="-122"/>
+                <a:cs typeface="Calibri" pitchFamily="34" charset="-120"/>
+              </a:rPr>
+              <a:t>JavaScript wrapped in an ObjStm; /FlateDecode count far above the benign median (≈ 12 vs 7).</a:t>
+            </a:r>
+            <a:endParaRPr lang="en-US" sz="1600" dirty="0"/>
+          </a:p>
+          <a:p>
+            <a:pPr marL="342900" indent="-342900">
+              <a:lnSpc>
+                <a:spcPct val="118000"/>
+              </a:lnSpc>
+              <a:buSzPct val="100000"/>
+              <a:buChar char="•"/>
+            </a:pPr>
+            <a:r>
+              <a:rPr lang="en-US" sz="1600" b="1" dirty="0">
+                <a:solidFill>
+                  <a:srgbClr val="1B1E22"/>
+                </a:solidFill>
+                <a:latin typeface="Calibri" pitchFamily="34" charset="0"/>
+                <a:ea typeface="Calibri" pitchFamily="34" charset="-122"/>
+                <a:cs typeface="Calibri" pitchFamily="34" charset="-120"/>
+              </a:rPr>
+              <a:t>Statistical tells  </a:t>
+            </a:r>
+            <a:pPr indent="0" marL="0">
+              <a:lnSpc>
+                <a:spcPct val="118000"/>
+              </a:lnSpc>
+              <a:spcAft>
+                <a:spcPts val="1300"/>
+              </a:spcAft>
+              <a:buNone/>
+            </a:pPr>
+            <a:r>
+              <a:rPr lang="en-US" sz="1600" dirty="0">
+                <a:solidFill>
+                  <a:srgbClr val="3A3F46"/>
+                </a:solidFill>
+                <a:latin typeface="Calibri" pitchFamily="34" charset="0"/>
+                <a:ea typeface="Calibri" pitchFamily="34" charset="-122"/>
+                <a:cs typeface="Calibri" pitchFamily="34" charset="-120"/>
+              </a:rPr>
+              <a:t>Byte entropy &gt; 7.9 and file size well above benign, with a JS token count of 0.</a:t>
+            </a:r>
+            <a:endParaRPr lang="en-US" sz="1600" dirty="0"/>
+          </a:p>
+          <a:p>
+            <a:pPr marL="342900" indent="-342900">
+              <a:lnSpc>
+                <a:spcPct val="118000"/>
+              </a:lnSpc>
+              <a:buSzPct val="100000"/>
+              <a:buChar char="•"/>
+            </a:pPr>
+            <a:r>
+              <a:rPr lang="en-US" sz="1600" b="1" dirty="0">
+                <a:solidFill>
+                  <a:srgbClr val="1B1E22"/>
+                </a:solidFill>
+                <a:latin typeface="Calibri" pitchFamily="34" charset="0"/>
+                <a:ea typeface="Calibri" pitchFamily="34" charset="-122"/>
+                <a:cs typeface="Calibri" pitchFamily="34" charset="-120"/>
+              </a:rPr>
+              <a:t>Deep action chains  </a:t>
+            </a:r>
+            <a:pPr indent="0" marL="0">
+              <a:lnSpc>
+                <a:spcPct val="118000"/>
+              </a:lnSpc>
+              <a:spcAft>
+                <a:spcPts val="1300"/>
+              </a:spcAft>
+              <a:buNone/>
+            </a:pPr>
+            <a:r>
+              <a:rPr lang="en-US" sz="1600" dirty="0">
+                <a:solidFill>
+                  <a:srgbClr val="3A3F46"/>
+                </a:solidFill>
+                <a:latin typeface="Calibri" pitchFamily="34" charset="0"/>
+                <a:ea typeface="Calibri" pitchFamily="34" charset="-122"/>
+                <a:cs typeface="Calibri" pitchFamily="34" charset="-120"/>
+              </a:rPr>
+              <a:t>GoTo → Next sequences terminating at a dangerous node.</a:t>
+            </a:r>
+            <a:endParaRPr lang="en-US" sz="1600" dirty="0"/>
+          </a:p>
+        </p:txBody>
+      </p:sp>
+      <p:pic>
+        <p:nvPicPr>
+          <p:cNvPr id="8" name="Image 0" descr="/home/claude/PDFSentry/deck/assets/orn_ring.png">    </p:cNvPr>
+          <p:cNvPicPr>
+            <a:picLocks noChangeAspect="1"/>
+          </p:cNvPicPr>
+          <p:nvPr/>
+        </p:nvPicPr>
+        <p:blipFill>
+          <a:blip r:embed="rId2">
+            <a:alphaModFix amt="45000"/>
+          </a:blip>
+          <a:stretch>
+            <a:fillRect/>
+          </a:stretch>
+        </p:blipFill>
+        <p:spPr>
+          <a:xfrm>
+            <a:off x="10561320" y="5120640"/>
+            <a:ext cx="1097280" cy="1097280"/>
+          </a:xfrm>
+          <a:prstGeom prst="rect">
+            <a:avLst/>
+          </a:prstGeom>
+        </p:spPr>
+      </p:pic>
+      <p:sp>
+        <p:nvSpPr>
+          <p:cNvPr id="9" name="Text 6"/>
+          <p:cNvSpPr txBox="1"/>
+          <p:nvPr/>
+        </p:nvSpPr>
+        <p:spPr>
+          <a:xfrm>
+            <a:off x="502920" y="6528816"/>
+            <a:ext cx="6400800" cy="237744"/>
+          </a:xfrm>
+          <a:prstGeom prst="rect">
+            <a:avLst/>
+          </a:prstGeom>
+          <a:noFill/>
+          <a:ln/>
+        </p:spPr>
+        <p:txBody>
+          <a:bodyPr wrap="square" lIns="0" tIns="0" rIns="0" bIns="0" rtlCol="0" anchor="ctr"/>
+          <a:lstStyle/>
+          <a:p>
+            <a:pPr indent="0" marL="0">
+              <a:buNone/>
+            </a:pPr>
+            <a:r>
+              <a:rPr lang="en-US" sz="850" spc="150" kern="0" dirty="0">
+                <a:solidFill>
+                  <a:srgbClr val="9AA0A8"/>
+                </a:solidFill>
+                <a:latin typeface="Calibri" pitchFamily="34" charset="0"/>
+                <a:ea typeface="Calibri" pitchFamily="34" charset="-122"/>
+                <a:cs typeface="Calibri" pitchFamily="34" charset="-120"/>
+              </a:rPr>
+              <a:t>PDFSentry · Reachability over Recognition</a:t>
+            </a:r>
+            <a:endParaRPr lang="en-US" sz="850" dirty="0"/>
+          </a:p>
+        </p:txBody>
+      </p:sp>
+      <p:sp>
+        <p:nvSpPr>
+          <p:cNvPr id="10" name="Text 7"/>
+          <p:cNvSpPr txBox="1"/>
+          <p:nvPr/>
+        </p:nvSpPr>
+        <p:spPr>
+          <a:xfrm>
+            <a:off x="11323015" y="6510528"/>
+            <a:ext cx="457200" cy="256032"/>
+          </a:xfrm>
+          <a:prstGeom prst="rect">
+            <a:avLst/>
+          </a:prstGeom>
+          <a:noFill/>
+          <a:ln/>
+        </p:spPr>
+        <p:txBody>
+          <a:bodyPr wrap="square" lIns="0" tIns="0" rIns="0" bIns="0" rtlCol="0" anchor="ctr"/>
+          <a:lstStyle/>
+          <a:p>
+            <a:pPr algn="r" indent="0" marL="0">
+              <a:buNone/>
+            </a:pPr>
+            <a:r>
+              <a:rPr lang="en-US" sz="950" b="1" dirty="0">
+                <a:solidFill>
+                  <a:srgbClr val="6B7178"/>
+                </a:solidFill>
+                <a:latin typeface="Calibri" pitchFamily="34" charset="0"/>
+                <a:ea typeface="Calibri" pitchFamily="34" charset="-122"/>
+                <a:cs typeface="Calibri" pitchFamily="34" charset="-120"/>
+              </a:rPr>
+              <a:t>10</a:t>
+            </a:r>
+            <a:endParaRPr lang="en-US" sz="950" dirty="0"/>
+          </a:p>
+        </p:txBody>
+      </p:sp>
+    </p:spTree>
+  </p:cSld>
+  <p:clrMapOvr>
+    <a:masterClrMapping/>
+  </p:clrMapOvr>
+</p:sld>
+</file>
+
+<file path=ppt/slides/slide11.xml><?xml version="1.0" encoding="utf-8"?>
+<p:sld xmlns:a="http://schemas.openxmlformats.org/drawingml/2006/main" xmlns:r="http://schemas.openxmlformats.org/officeDocument/2006/relationships" xmlns:p="http://schemas.openxmlformats.org/presentationml/2006/main">
+  <p:cSld name="Slide 11">
+    <p:bg>
+      <p:bgPr>
+        <a:blipFill dpi="0" rotWithShape="1">
+          <a:blip r:embed="rId1">
+            <a:lum/>
+          </a:blip>
+          <a:srcRect/>
+          <a:stretch>
+            <a:fillRect/>
+          </a:stretch>
+        </a:blipFill>
+        <a:effectLst/>
+      </p:bgPr>
+    </p:bg>
+    <p:spTree>
+      <p:nvGrpSpPr>
+        <p:cNvPr id="1" name=""/>
+        <p:cNvGrpSpPr/>
+        <p:nvPr/>
+      </p:nvGrpSpPr>
+      <p:grpSpPr>
+        <a:xfrm>
+          <a:off x="0" y="0"/>
+          <a:ext cx="0" cy="0"/>
+          <a:chOff x="0" y="0"/>
+          <a:chExt cx="0" cy="0"/>
+        </a:xfrm>
+      </p:grpSpPr>
+      <p:sp>
+        <p:nvSpPr>
+          <p:cNvPr id="2" name="Text 0"/>
+          <p:cNvSpPr txBox="1"/>
+          <p:nvPr/>
+        </p:nvSpPr>
+        <p:spPr>
+          <a:xfrm>
+            <a:off x="502920" y="292608"/>
+            <a:ext cx="4572000" cy="274320"/>
+          </a:xfrm>
+          <a:prstGeom prst="rect">
+            <a:avLst/>
+          </a:prstGeom>
+          <a:noFill/>
+          <a:ln/>
+        </p:spPr>
+        <p:txBody>
+          <a:bodyPr wrap="square" lIns="0" tIns="0" rIns="0" bIns="0" rtlCol="0" anchor="ctr"/>
+          <a:lstStyle/>
+          <a:p>
+            <a:pPr indent="0" marL="0">
+              <a:buNone/>
+            </a:pPr>
+            <a:r>
+              <a:rPr lang="en-US" sz="1100" b="1" spc="400" kern="0" dirty="0">
+                <a:solidFill>
+                  <a:srgbClr val="6B7178"/>
+                </a:solidFill>
+                <a:latin typeface="Calibri" pitchFamily="34" charset="0"/>
+                <a:ea typeface="Calibri" pitchFamily="34" charset="-122"/>
+                <a:cs typeface="Calibri" pitchFamily="34" charset="-120"/>
+              </a:rPr>
+              <a:t>PDFSENTRY</a:t>
+            </a:r>
+            <a:endParaRPr lang="en-US" sz="1100" dirty="0"/>
+          </a:p>
+        </p:txBody>
+      </p:sp>
+      <p:sp>
+        <p:nvSpPr>
+          <p:cNvPr id="3" name="Text 1"/>
+          <p:cNvSpPr txBox="1"/>
+          <p:nvPr/>
+        </p:nvSpPr>
+        <p:spPr>
+          <a:xfrm>
+            <a:off x="6659575" y="292608"/>
+            <a:ext cx="5029200" cy="274320"/>
+          </a:xfrm>
+          <a:prstGeom prst="rect">
+            <a:avLst/>
+          </a:prstGeom>
+          <a:noFill/>
+          <a:ln/>
+        </p:spPr>
+        <p:txBody>
+          <a:bodyPr wrap="square" lIns="0" tIns="0" rIns="0" bIns="0" rtlCol="0" anchor="ctr"/>
+          <a:lstStyle/>
+          <a:p>
+            <a:pPr algn="r" indent="0" marL="0">
+              <a:buNone/>
+            </a:pPr>
+            <a:r>
+              <a:rPr lang="en-US" sz="1100" spc="300" kern="0" dirty="0">
+                <a:solidFill>
+                  <a:srgbClr val="6B7178"/>
+                </a:solidFill>
+                <a:latin typeface="Calibri" pitchFamily="34" charset="0"/>
+                <a:ea typeface="Calibri" pitchFamily="34" charset="-122"/>
+                <a:cs typeface="Calibri" pitchFamily="34" charset="-120"/>
+              </a:rPr>
+              <a:t>REVIEW 3 · FINAL</a:t>
+            </a:r>
+            <a:endParaRPr lang="en-US" sz="1100" dirty="0"/>
+          </a:p>
+        </p:txBody>
+      </p:sp>
+      <p:sp>
+        <p:nvSpPr>
+          <p:cNvPr id="4" name="Text 2"/>
+          <p:cNvSpPr txBox="1"/>
+          <p:nvPr/>
+        </p:nvSpPr>
+        <p:spPr>
+          <a:xfrm>
+            <a:off x="512064" y="786384"/>
+            <a:ext cx="10058400" cy="256032"/>
+          </a:xfrm>
+          <a:prstGeom prst="rect">
+            <a:avLst/>
+          </a:prstGeom>
+          <a:noFill/>
+          <a:ln/>
+        </p:spPr>
+        <p:txBody>
+          <a:bodyPr wrap="square" lIns="0" tIns="0" rIns="0" bIns="0" rtlCol="0" anchor="ctr"/>
+          <a:lstStyle/>
+          <a:p>
+            <a:pPr indent="0" marL="0">
+              <a:buNone/>
+            </a:pPr>
+            <a:r>
+              <a:rPr lang="en-US" sz="1100" b="1" spc="400" kern="0" dirty="0">
+                <a:solidFill>
+                  <a:srgbClr val="2F8F82"/>
+                </a:solidFill>
+                <a:latin typeface="Calibri" pitchFamily="34" charset="0"/>
+                <a:ea typeface="Calibri" pitchFamily="34" charset="-122"/>
+                <a:cs typeface="Calibri" pitchFamily="34" charset="-120"/>
+              </a:rPr>
+              <a:t>COMPARISON</a:t>
+            </a:r>
+            <a:endParaRPr lang="en-US" sz="1100" dirty="0"/>
+          </a:p>
+        </p:txBody>
+      </p:sp>
+      <p:sp>
+        <p:nvSpPr>
+          <p:cNvPr id="5" name="Text 3"/>
+          <p:cNvSpPr txBox="1"/>
+          <p:nvPr/>
+        </p:nvSpPr>
+        <p:spPr>
+          <a:xfrm>
+            <a:off x="502920" y="1078992"/>
+            <a:ext cx="11155680" cy="731520"/>
+          </a:xfrm>
+          <a:prstGeom prst="rect">
+            <a:avLst/>
+          </a:prstGeom>
+          <a:noFill/>
+          <a:ln/>
+        </p:spPr>
+        <p:txBody>
+          <a:bodyPr wrap="square" lIns="0" tIns="0" rIns="0" bIns="0" rtlCol="0" anchor="ctr"/>
+          <a:lstStyle/>
+          <a:p>
+            <a:pPr indent="0" marL="0">
+              <a:buNone/>
+            </a:pPr>
+            <a:r>
+              <a:rPr lang="en-US" sz="3200" dirty="0">
+                <a:solidFill>
+                  <a:srgbClr val="1B1E22"/>
+                </a:solidFill>
+                <a:latin typeface="Arial Black" pitchFamily="34" charset="0"/>
+                <a:ea typeface="Arial Black" pitchFamily="34" charset="-122"/>
+                <a:cs typeface="Arial Black" pitchFamily="34" charset="-120"/>
+              </a:rPr>
               <a:t>Comparison / results</a:t>
             </a:r>
             <a:endParaRPr lang="en-US" sz="3200" dirty="0"/>
+          </a:p>
+        </p:txBody>
+      </p:sp>
+      <p:sp>
+        <p:nvSpPr>
+          <p:cNvPr id="6" name="Text 4"/>
+          <p:cNvSpPr txBox="1"/>
+          <p:nvPr/>
+        </p:nvSpPr>
+        <p:spPr>
+          <a:xfrm>
+            <a:off x="548640" y="1783080"/>
+            <a:ext cx="10881360" cy="457200"/>
+          </a:xfrm>
+          <a:prstGeom prst="rect">
+            <a:avLst/>
+          </a:prstGeom>
+          <a:noFill/>
+          <a:ln/>
+        </p:spPr>
+        <p:txBody>
+          <a:bodyPr wrap="square" lIns="0" tIns="0" rIns="0" bIns="0" rtlCol="0" anchor="ctr"/>
+          <a:lstStyle/>
+          <a:p>
+            <a:pPr indent="0" marL="0">
+              <a:buNone/>
+            </a:pPr>
+            <a:r>
+              <a:rPr lang="en-US" sz="1500" dirty="0">
+                <a:solidFill>
+                  <a:srgbClr val="3A3F46"/>
+                </a:solidFill>
+                <a:latin typeface="Calibri" pitchFamily="34" charset="0"/>
+                <a:ea typeface="Calibri" pitchFamily="34" charset="-122"/>
+                <a:cs typeface="Calibri" pitchFamily="34" charset="-120"/>
+              </a:rPr>
+              <a:t>PDFSentry against the byte-ML baseline and a classic structural-path detector.</a:t>
+            </a:r>
+            <a:endParaRPr lang="en-US" sz="1500" dirty="0"/>
           </a:p>
         </p:txBody>
       </p:sp>
       <p:graphicFrame>
         <p:nvGraphicFramePr>
-          <p:cNvPr id="11" name="Table 0"/>
+          <p:cNvPr id="12" name="Table 0"/>
           <p:cNvGraphicFramePr>
             <a:graphicFrameLocks noGrp="1"/>
           </p:cNvGraphicFramePr>
@@ -3084,7 +3887,7 @@
           </p:nvPr>
         </p:nvGraphicFramePr>
         <p:xfrm>
-          <a:off x="548640" y="1920240"/>
+          <a:off x="548640" y="2514600"/>
           <a:ext cx="10881360" cy="914400"/>
         </p:xfrm>
         <a:graphic>
@@ -3097,7 +3900,7 @@
                 <a:gridCol w="2529840"/>
                 <a:gridCol w="2529840"/>
               </a:tblGrid>
-              <a:tr h="475488">
+              <a:tr h="512064">
                 <a:tc>
                   <a:txBody>
                     <a:bodyPr/>
@@ -3371,7 +4174,7 @@
                   </a:tcPr>
                 </a:tc>
               </a:tr>
-              <a:tr h="475488">
+              <a:tr h="512064">
                 <a:tc>
                   <a:txBody>
                     <a:bodyPr/>
@@ -3645,7 +4448,7 @@
                   </a:tcPr>
                 </a:tc>
               </a:tr>
-              <a:tr h="475488">
+              <a:tr h="512064">
                 <a:tc>
                   <a:txBody>
                     <a:bodyPr/>
@@ -3919,7 +4722,7 @@
                   </a:tcPr>
                 </a:tc>
               </a:tr>
-              <a:tr h="475488">
+              <a:tr h="512064">
                 <a:tc>
                   <a:txBody>
                     <a:bodyPr/>
@@ -4193,7 +4996,7 @@
                   </a:tcPr>
                 </a:tc>
               </a:tr>
-              <a:tr h="475488">
+              <a:tr h="512064">
                 <a:tc>
                   <a:txBody>
                     <a:bodyPr/>
@@ -4467,7 +5270,7 @@
                   </a:tcPr>
                 </a:tc>
               </a:tr>
-              <a:tr h="475488">
+              <a:tr h="512064">
                 <a:tc>
                   <a:txBody>
                     <a:bodyPr/>
@@ -4747,13 +5550,13 @@
       </p:graphicFrame>
       <p:sp>
         <p:nvSpPr>
-          <p:cNvPr id="6" name="Text 3"/>
-          <p:cNvSpPr txBox="1"/>
-          <p:nvPr/>
-        </p:nvSpPr>
-        <p:spPr>
-          <a:xfrm>
-            <a:off x="548640" y="6126480"/>
+          <p:cNvPr id="8" name="Text 5"/>
+          <p:cNvSpPr txBox="1"/>
+          <p:nvPr/>
+        </p:nvSpPr>
+        <p:spPr>
+          <a:xfrm>
+            <a:off x="548640" y="6108192"/>
             <a:ext cx="10972800" cy="457200"/>
           </a:xfrm>
           <a:prstGeom prst="rect">
@@ -4784,55 +5587,16 @@
           </a:p>
         </p:txBody>
       </p:sp>
-    </p:spTree>
-  </p:cSld>
-  <p:clrMapOvr>
-    <a:masterClrMapping/>
-  </p:clrMapOvr>
-</p:sld>
-</file>
-
-<file path=ppt/slides/slide11.xml><?xml version="1.0" encoding="utf-8"?>
-<p:sld xmlns:a="http://schemas.openxmlformats.org/drawingml/2006/main" xmlns:r="http://schemas.openxmlformats.org/officeDocument/2006/relationships" xmlns:p="http://schemas.openxmlformats.org/presentationml/2006/main">
-  <p:cSld name="Slide 11">
-    <p:bg>
-      <p:bgPr>
-        <a:blipFill dpi="0" rotWithShape="1">
-          <a:blip r:embed="rId1">
-            <a:lum/>
-          </a:blip>
-          <a:srcRect/>
-          <a:stretch>
-            <a:fillRect/>
-          </a:stretch>
-        </a:blipFill>
-        <a:effectLst/>
-      </p:bgPr>
-    </p:bg>
-    <p:spTree>
-      <p:nvGrpSpPr>
-        <p:cNvPr id="1" name=""/>
-        <p:cNvGrpSpPr/>
-        <p:nvPr/>
-      </p:nvGrpSpPr>
-      <p:grpSpPr>
-        <a:xfrm>
-          <a:off x="0" y="0"/>
-          <a:ext cx="0" cy="0"/>
-          <a:chOff x="0" y="0"/>
-          <a:chExt cx="0" cy="0"/>
-        </a:xfrm>
-      </p:grpSpPr>
-      <p:sp>
-        <p:nvSpPr>
-          <p:cNvPr id="2" name="Text 0"/>
-          <p:cNvSpPr txBox="1"/>
-          <p:nvPr/>
-        </p:nvSpPr>
-        <p:spPr>
-          <a:xfrm>
-            <a:off x="502920" y="292608"/>
-            <a:ext cx="4572000" cy="274320"/>
+      <p:sp>
+        <p:nvSpPr>
+          <p:cNvPr id="9" name="Text 6"/>
+          <p:cNvSpPr txBox="1"/>
+          <p:nvPr/>
+        </p:nvSpPr>
+        <p:spPr>
+          <a:xfrm>
+            <a:off x="502920" y="6528816"/>
+            <a:ext cx="6400800" cy="237744"/>
           </a:xfrm>
           <a:prstGeom prst="rect">
             <a:avLst/>
@@ -4848,7 +5612,46 @@
               <a:buNone/>
             </a:pPr>
             <a:r>
-              <a:rPr lang="en-US" sz="1100" b="1" spc="400" kern="0" dirty="0">
+              <a:rPr lang="en-US" sz="850" spc="150" kern="0" dirty="0">
+                <a:solidFill>
+                  <a:srgbClr val="9AA0A8"/>
+                </a:solidFill>
+                <a:latin typeface="Calibri" pitchFamily="34" charset="0"/>
+                <a:ea typeface="Calibri" pitchFamily="34" charset="-122"/>
+                <a:cs typeface="Calibri" pitchFamily="34" charset="-120"/>
+              </a:rPr>
+              <a:t>PDFSentry · Reachability over Recognition</a:t>
+            </a:r>
+            <a:endParaRPr lang="en-US" sz="850" dirty="0"/>
+          </a:p>
+        </p:txBody>
+      </p:sp>
+      <p:sp>
+        <p:nvSpPr>
+          <p:cNvPr id="10" name="Text 7"/>
+          <p:cNvSpPr txBox="1"/>
+          <p:nvPr/>
+        </p:nvSpPr>
+        <p:spPr>
+          <a:xfrm>
+            <a:off x="11323015" y="6510528"/>
+            <a:ext cx="457200" cy="256032"/>
+          </a:xfrm>
+          <a:prstGeom prst="rect">
+            <a:avLst/>
+          </a:prstGeom>
+          <a:noFill/>
+          <a:ln/>
+        </p:spPr>
+        <p:txBody>
+          <a:bodyPr wrap="square" lIns="0" tIns="0" rIns="0" bIns="0" rtlCol="0" anchor="ctr"/>
+          <a:lstStyle/>
+          <a:p>
+            <a:pPr algn="r" indent="0" marL="0">
+              <a:buNone/>
+            </a:pPr>
+            <a:r>
+              <a:rPr lang="en-US" sz="950" b="1" dirty="0">
                 <a:solidFill>
                   <a:srgbClr val="6B7178"/>
                 </a:solidFill>
@@ -4856,344 +5659,12 @@
                 <a:ea typeface="Calibri" pitchFamily="34" charset="-122"/>
                 <a:cs typeface="Calibri" pitchFamily="34" charset="-120"/>
               </a:rPr>
-              <a:t>PDFSENTRY</a:t>
-            </a:r>
-            <a:endParaRPr lang="en-US" sz="1100" dirty="0"/>
-          </a:p>
-        </p:txBody>
-      </p:sp>
-      <p:sp>
-        <p:nvSpPr>
-          <p:cNvPr id="3" name="Text 1"/>
-          <p:cNvSpPr txBox="1"/>
-          <p:nvPr/>
-        </p:nvSpPr>
-        <p:spPr>
-          <a:xfrm>
-            <a:off x="6659575" y="292608"/>
-            <a:ext cx="5029200" cy="274320"/>
-          </a:xfrm>
-          <a:prstGeom prst="rect">
-            <a:avLst/>
-          </a:prstGeom>
-          <a:noFill/>
-          <a:ln/>
-        </p:spPr>
-        <p:txBody>
-          <a:bodyPr wrap="square" lIns="0" tIns="0" rIns="0" bIns="0" rtlCol="0" anchor="ctr"/>
-          <a:lstStyle/>
-          <a:p>
-            <a:pPr algn="r" indent="0" marL="0">
-              <a:buNone/>
-            </a:pPr>
-            <a:r>
-              <a:rPr lang="en-US" sz="1100" spc="300" kern="0" dirty="0">
-                <a:solidFill>
-                  <a:srgbClr val="6B7178"/>
-                </a:solidFill>
-                <a:latin typeface="Calibri" pitchFamily="34" charset="0"/>
-                <a:ea typeface="Calibri" pitchFamily="34" charset="-122"/>
-                <a:cs typeface="Calibri" pitchFamily="34" charset="-120"/>
-              </a:rPr>
-              <a:t>REVIEW 3 · FINAL</a:t>
-            </a:r>
-            <a:endParaRPr lang="en-US" sz="1100" dirty="0"/>
-          </a:p>
-        </p:txBody>
-      </p:sp>
-      <p:sp>
-        <p:nvSpPr>
-          <p:cNvPr id="4" name="Text 2"/>
-          <p:cNvSpPr txBox="1"/>
-          <p:nvPr/>
-        </p:nvSpPr>
-        <p:spPr>
-          <a:xfrm>
-            <a:off x="502920" y="822960"/>
-            <a:ext cx="11155680" cy="731520"/>
-          </a:xfrm>
-          <a:prstGeom prst="rect">
-            <a:avLst/>
-          </a:prstGeom>
-          <a:noFill/>
-          <a:ln/>
-        </p:spPr>
-        <p:txBody>
-          <a:bodyPr wrap="square" lIns="0" tIns="0" rIns="0" bIns="0" rtlCol="0" anchor="ctr"/>
-          <a:lstStyle/>
-          <a:p>
-            <a:pPr indent="0" marL="0">
-              <a:buNone/>
-            </a:pPr>
-            <a:r>
-              <a:rPr lang="en-US" sz="3200" dirty="0">
-                <a:solidFill>
-                  <a:srgbClr val="1B1E22"/>
-                </a:solidFill>
-                <a:latin typeface="Arial Black" pitchFamily="34" charset="0"/>
-                <a:ea typeface="Arial Black" pitchFamily="34" charset="-122"/>
-                <a:cs typeface="Arial Black" pitchFamily="34" charset="-120"/>
-              </a:rPr>
-              <a:t>Honest scope &amp; limitations</a:t>
-            </a:r>
-            <a:endParaRPr lang="en-US" sz="3200" dirty="0"/>
-          </a:p>
-        </p:txBody>
-      </p:sp>
-      <p:sp>
-        <p:nvSpPr>
-          <p:cNvPr id="5" name="Text 3"/>
-          <p:cNvSpPr txBox="1"/>
-          <p:nvPr/>
-        </p:nvSpPr>
-        <p:spPr>
-          <a:xfrm>
-            <a:off x="548640" y="1536192"/>
-            <a:ext cx="10881360" cy="548640"/>
-          </a:xfrm>
-          <a:prstGeom prst="rect">
-            <a:avLst/>
-          </a:prstGeom>
-          <a:noFill/>
-          <a:ln/>
-        </p:spPr>
-        <p:txBody>
-          <a:bodyPr wrap="square" lIns="0" tIns="0" rIns="0" bIns="0" rtlCol="0" anchor="ctr"/>
-          <a:lstStyle/>
-          <a:p>
-            <a:pPr indent="0" marL="0">
-              <a:lnSpc>
-                <a:spcPct val="105000"/>
-              </a:lnSpc>
-              <a:buNone/>
-            </a:pPr>
-            <a:r>
-              <a:rPr lang="en-US" sz="1500" dirty="0">
-                <a:solidFill>
-                  <a:srgbClr val="3A3F46"/>
-                </a:solidFill>
-                <a:latin typeface="Calibri" pitchFamily="34" charset="0"/>
-                <a:ea typeface="Calibri" pitchFamily="34" charset="-122"/>
-                <a:cs typeface="Calibri" pitchFamily="34" charset="-120"/>
-              </a:rPr>
-              <a:t>Stated plainly so the contribution is credible: what is proven, and what is projected.</a:t>
-            </a:r>
-            <a:endParaRPr lang="en-US" sz="1500" dirty="0"/>
-          </a:p>
-        </p:txBody>
-      </p:sp>
-      <p:sp>
-        <p:nvSpPr>
-          <p:cNvPr id="6" name="Text 4"/>
-          <p:cNvSpPr txBox="1"/>
-          <p:nvPr/>
-        </p:nvSpPr>
-        <p:spPr>
-          <a:xfrm>
-            <a:off x="566928" y="2194560"/>
-            <a:ext cx="10881360" cy="4297680"/>
-          </a:xfrm>
-          <a:prstGeom prst="rect">
-            <a:avLst/>
-          </a:prstGeom>
-          <a:noFill/>
-          <a:ln/>
-        </p:spPr>
-        <p:txBody>
-          <a:bodyPr wrap="square" lIns="0" tIns="0" rIns="0" bIns="0" rtlCol="0" anchor="t"/>
-          <a:lstStyle/>
-          <a:p>
-            <a:pPr marL="342900" indent="-342900">
-              <a:lnSpc>
-                <a:spcPct val="112000"/>
-              </a:lnSpc>
-              <a:buSzPct val="100000"/>
-              <a:buChar char="•"/>
-            </a:pPr>
-            <a:r>
-              <a:rPr lang="en-US" sz="1500" b="1" dirty="0">
-                <a:solidFill>
-                  <a:srgbClr val="1B1E22"/>
-                </a:solidFill>
-                <a:latin typeface="Calibri" pitchFamily="34" charset="0"/>
-                <a:ea typeface="Calibri" pitchFamily="34" charset="-122"/>
-                <a:cs typeface="Calibri" pitchFamily="34" charset="-120"/>
-              </a:rPr>
-              <a:t>Benchmark not beaten  </a:t>
-            </a:r>
-            <a:pPr indent="0" marL="0">
-              <a:lnSpc>
-                <a:spcPct val="112000"/>
-              </a:lnSpc>
-              <a:spcAft>
-                <a:spcPts val="1000"/>
-              </a:spcAft>
-              <a:buNone/>
-            </a:pPr>
-            <a:r>
-              <a:rPr lang="en-US" sz="1500" dirty="0">
-                <a:solidFill>
-                  <a:srgbClr val="3A3F46"/>
-                </a:solidFill>
-                <a:latin typeface="Calibri" pitchFamily="34" charset="0"/>
-                <a:ea typeface="Calibri" pitchFamily="34" charset="-122"/>
-                <a:cs typeface="Calibri" pitchFamily="34" charset="-120"/>
-              </a:rPr>
-              <a:t>We did NOT raise EMBER’s 0.78 evasive score — retraining needs raw evasive PDFs we could not obtain.</a:t>
-            </a:r>
-            <a:endParaRPr lang="en-US" sz="1500" dirty="0"/>
-          </a:p>
-          <a:p>
-            <a:pPr marL="342900" indent="-342900">
-              <a:lnSpc>
-                <a:spcPct val="112000"/>
-              </a:lnSpc>
-              <a:buSzPct val="100000"/>
-              <a:buChar char="•"/>
-            </a:pPr>
-            <a:r>
-              <a:rPr lang="en-US" sz="1500" b="1" dirty="0">
-                <a:solidFill>
-                  <a:srgbClr val="1B1E22"/>
-                </a:solidFill>
-                <a:latin typeface="Calibri" pitchFamily="34" charset="0"/>
-                <a:ea typeface="Calibri" pitchFamily="34" charset="-122"/>
-                <a:cs typeface="Calibri" pitchFamily="34" charset="-120"/>
-              </a:rPr>
-              <a:t>Controlled mechanism  </a:t>
-            </a:r>
-            <a:pPr indent="0" marL="0">
-              <a:lnSpc>
-                <a:spcPct val="112000"/>
-              </a:lnSpc>
-              <a:spcAft>
-                <a:spcPts val="1000"/>
-              </a:spcAft>
-              <a:buNone/>
-            </a:pPr>
-            <a:r>
-              <a:rPr lang="en-US" sz="1500" dirty="0">
-                <a:solidFill>
-                  <a:srgbClr val="3A3F46"/>
-                </a:solidFill>
-                <a:latin typeface="Calibri" pitchFamily="34" charset="0"/>
-                <a:ea typeface="Calibri" pitchFamily="34" charset="-122"/>
-                <a:cs typeface="Calibri" pitchFamily="34" charset="-120"/>
-              </a:rPr>
-              <a:t>The 0.998 fusion is on controlled weaponized twins; it isolates the signal, it is not a benchmark claim.</a:t>
-            </a:r>
-            <a:endParaRPr lang="en-US" sz="1500" dirty="0"/>
-          </a:p>
-          <a:p>
-            <a:pPr marL="342900" indent="-342900">
-              <a:lnSpc>
-                <a:spcPct val="112000"/>
-              </a:lnSpc>
-              <a:buSzPct val="100000"/>
-              <a:buChar char="•"/>
-            </a:pPr>
-            <a:r>
-              <a:rPr lang="en-US" sz="1500" b="1" dirty="0">
-                <a:solidFill>
-                  <a:srgbClr val="1B1E22"/>
-                </a:solidFill>
-                <a:latin typeface="Calibri" pitchFamily="34" charset="0"/>
-                <a:ea typeface="Calibri" pitchFamily="34" charset="-122"/>
-                <a:cs typeface="Calibri" pitchFamily="34" charset="-120"/>
-              </a:rPr>
-              <a:t>Capability ≠ intent  </a:t>
-            </a:r>
-            <a:pPr indent="0" marL="0">
-              <a:lnSpc>
-                <a:spcPct val="112000"/>
-              </a:lnSpc>
-              <a:spcAft>
-                <a:spcPts val="1000"/>
-              </a:spcAft>
-              <a:buNone/>
-            </a:pPr>
-            <a:r>
-              <a:rPr lang="en-US" sz="1500" dirty="0">
-                <a:solidFill>
-                  <a:srgbClr val="3A3F46"/>
-                </a:solidFill>
-                <a:latin typeface="Calibri" pitchFamily="34" charset="0"/>
-                <a:ea typeface="Calibri" pitchFamily="34" charset="-122"/>
-                <a:cs typeface="Calibri" pitchFamily="34" charset="-120"/>
-              </a:rPr>
-              <a:t>Reachability flags a reachable dangerous capability; a benign PDF that genuinely auto-runs JS would be flagged too.</a:t>
-            </a:r>
-            <a:endParaRPr lang="en-US" sz="1500" dirty="0"/>
-          </a:p>
-          <a:p>
-            <a:pPr marL="342900" indent="-342900">
-              <a:lnSpc>
-                <a:spcPct val="112000"/>
-              </a:lnSpc>
-              <a:buSzPct val="100000"/>
-              <a:buChar char="•"/>
-            </a:pPr>
-            <a:r>
-              <a:rPr lang="en-US" sz="1500" b="1" dirty="0">
-                <a:solidFill>
-                  <a:srgbClr val="1B1E22"/>
-                </a:solidFill>
-                <a:latin typeface="Calibri" pitchFamily="34" charset="0"/>
-                <a:ea typeface="Calibri" pitchFamily="34" charset="-122"/>
-                <a:cs typeface="Calibri" pitchFamily="34" charset="-120"/>
-              </a:rPr>
-              <a:t>Static only  </a:t>
-            </a:r>
-            <a:pPr indent="0" marL="0">
-              <a:lnSpc>
-                <a:spcPct val="112000"/>
-              </a:lnSpc>
-              <a:spcAft>
-                <a:spcPts val="1000"/>
-              </a:spcAft>
-              <a:buNone/>
-            </a:pPr>
-            <a:r>
-              <a:rPr lang="en-US" sz="1500" dirty="0">
-                <a:solidFill>
-                  <a:srgbClr val="3A3F46"/>
-                </a:solidFill>
-                <a:latin typeface="Calibri" pitchFamily="34" charset="0"/>
-                <a:ea typeface="Calibri" pitchFamily="34" charset="-122"/>
-                <a:cs typeface="Calibri" pitchFamily="34" charset="-120"/>
-              </a:rPr>
-              <a:t>No dynamic cross-validation — by design, for safety and reproducibility.</a:t>
-            </a:r>
-            <a:endParaRPr lang="en-US" sz="1500" dirty="0"/>
-          </a:p>
-        </p:txBody>
-      </p:sp>
-      <p:pic>
-        <p:nvPicPr>
-          <p:cNvPr id="7" name="Image 0" descr="/home/claude/PDFSentry/deck/assets/orn_ring.png">    </p:cNvPr>
-          <p:cNvPicPr>
-            <a:picLocks noChangeAspect="1"/>
-          </p:cNvPicPr>
-          <p:nvPr/>
-        </p:nvPicPr>
-        <p:blipFill>
-          <a:blip r:embed="rId2">
-            <a:alphaModFix amt="45000"/>
-          </a:blip>
-          <a:stretch>
-            <a:fillRect/>
-          </a:stretch>
-        </p:blipFill>
-        <p:spPr>
-          <a:xfrm>
-            <a:off x="10561320" y="5257800"/>
-            <a:ext cx="1143000" cy="1143000"/>
-          </a:xfrm>
-          <a:prstGeom prst="rect">
-            <a:avLst/>
-          </a:prstGeom>
-        </p:spPr>
-      </p:pic>
+              <a:t>11</a:t>
+            </a:r>
+            <a:endParaRPr lang="en-US" sz="950" dirty="0"/>
+          </a:p>
+        </p:txBody>
+      </p:sp>
     </p:spTree>
   </p:cSld>
   <p:clrMapOvr>
@@ -5319,7 +5790,46 @@
         </p:nvSpPr>
         <p:spPr>
           <a:xfrm>
-            <a:off x="502920" y="822960"/>
+            <a:off x="512064" y="786384"/>
+            <a:ext cx="10058400" cy="256032"/>
+          </a:xfrm>
+          <a:prstGeom prst="rect">
+            <a:avLst/>
+          </a:prstGeom>
+          <a:noFill/>
+          <a:ln/>
+        </p:spPr>
+        <p:txBody>
+          <a:bodyPr wrap="square" lIns="0" tIns="0" rIns="0" bIns="0" rtlCol="0" anchor="ctr"/>
+          <a:lstStyle/>
+          <a:p>
+            <a:pPr indent="0" marL="0">
+              <a:buNone/>
+            </a:pPr>
+            <a:r>
+              <a:rPr lang="en-US" sz="1100" b="1" spc="400" kern="0" dirty="0">
+                <a:solidFill>
+                  <a:srgbClr val="2F8F82"/>
+                </a:solidFill>
+                <a:latin typeface="Calibri" pitchFamily="34" charset="0"/>
+                <a:ea typeface="Calibri" pitchFamily="34" charset="-122"/>
+                <a:cs typeface="Calibri" pitchFamily="34" charset="-120"/>
+              </a:rPr>
+              <a:t>LIMITATIONS</a:t>
+            </a:r>
+            <a:endParaRPr lang="en-US" sz="1100" dirty="0"/>
+          </a:p>
+        </p:txBody>
+      </p:sp>
+      <p:sp>
+        <p:nvSpPr>
+          <p:cNvPr id="5" name="Text 3"/>
+          <p:cNvSpPr txBox="1"/>
+          <p:nvPr/>
+        </p:nvSpPr>
+        <p:spPr>
+          <a:xfrm>
+            <a:off x="502920" y="1078992"/>
             <a:ext cx="11155680" cy="731520"/>
           </a:xfrm>
           <a:prstGeom prst="rect">
@@ -5344,7 +5854,7 @@
                 <a:ea typeface="Arial Black" pitchFamily="34" charset="-122"/>
                 <a:cs typeface="Arial Black" pitchFamily="34" charset="-120"/>
               </a:rPr>
-              <a:t>Conclusion &amp; future work</a:t>
+              <a:t>Honest scope &amp; limitations</a:t>
             </a:r>
             <a:endParaRPr lang="en-US" sz="3200" dirty="0"/>
           </a:p>
@@ -5352,14 +5862,56 @@
       </p:sp>
       <p:sp>
         <p:nvSpPr>
-          <p:cNvPr id="5" name="Text 3"/>
-          <p:cNvSpPr txBox="1"/>
-          <p:nvPr/>
-        </p:nvSpPr>
-        <p:spPr>
-          <a:xfrm>
-            <a:off x="566928" y="1783080"/>
-            <a:ext cx="10881360" cy="4297680"/>
+          <p:cNvPr id="6" name="Text 4"/>
+          <p:cNvSpPr txBox="1"/>
+          <p:nvPr/>
+        </p:nvSpPr>
+        <p:spPr>
+          <a:xfrm>
+            <a:off x="548640" y="1783080"/>
+            <a:ext cx="10881360" cy="548640"/>
+          </a:xfrm>
+          <a:prstGeom prst="rect">
+            <a:avLst/>
+          </a:prstGeom>
+          <a:noFill/>
+          <a:ln/>
+        </p:spPr>
+        <p:txBody>
+          <a:bodyPr wrap="square" lIns="0" tIns="0" rIns="0" bIns="0" rtlCol="0" anchor="ctr"/>
+          <a:lstStyle/>
+          <a:p>
+            <a:pPr indent="0" marL="0">
+              <a:lnSpc>
+                <a:spcPct val="105000"/>
+              </a:lnSpc>
+              <a:buNone/>
+            </a:pPr>
+            <a:r>
+              <a:rPr lang="en-US" sz="1550" dirty="0">
+                <a:solidFill>
+                  <a:srgbClr val="3A3F46"/>
+                </a:solidFill>
+                <a:latin typeface="Calibri" pitchFamily="34" charset="0"/>
+                <a:ea typeface="Calibri" pitchFamily="34" charset="-122"/>
+                <a:cs typeface="Calibri" pitchFamily="34" charset="-120"/>
+              </a:rPr>
+              <a:t>Stated plainly so the contribution is credible: what is proven, and what is projected.</a:t>
+            </a:r>
+            <a:endParaRPr lang="en-US" sz="1550" dirty="0"/>
+          </a:p>
+        </p:txBody>
+      </p:sp>
+      <p:sp>
+        <p:nvSpPr>
+          <p:cNvPr id="7" name="Text 5"/>
+          <p:cNvSpPr txBox="1"/>
+          <p:nvPr/>
+        </p:nvSpPr>
+        <p:spPr>
+          <a:xfrm>
+            <a:off x="566928" y="2423160"/>
+            <a:ext cx="10881360" cy="4206240"/>
           </a:xfrm>
           <a:prstGeom prst="rect">
             <a:avLst/>
@@ -5373,13 +5925,13 @@
           <a:p>
             <a:pPr marL="342900" indent="-342900">
               <a:lnSpc>
-                <a:spcPct val="112000"/>
+                <a:spcPct val="118000"/>
               </a:lnSpc>
               <a:buSzPct val="100000"/>
               <a:buChar char="•"/>
             </a:pPr>
             <a:r>
-              <a:rPr lang="en-US" sz="1500" b="1" dirty="0">
+              <a:rPr lang="en-US" sz="1600" b="1" dirty="0">
                 <a:solidFill>
                   <a:srgbClr val="1B1E22"/>
                 </a:solidFill>
@@ -5387,19 +5939,19 @@
                 <a:ea typeface="Calibri" pitchFamily="34" charset="-122"/>
                 <a:cs typeface="Calibri" pitchFamily="34" charset="-120"/>
               </a:rPr>
-              <a:t>New idea, built  </a:t>
+              <a:t>Benchmark not beaten  </a:t>
             </a:r>
             <a:pPr indent="0" marL="0">
               <a:lnSpc>
-                <a:spcPct val="112000"/>
+                <a:spcPct val="118000"/>
               </a:lnSpc>
               <a:spcAft>
-                <a:spcPts val="1000"/>
+                <a:spcPts val="1300"/>
               </a:spcAft>
               <a:buNone/>
             </a:pPr>
             <a:r>
-              <a:rPr lang="en-US" sz="1500" dirty="0">
+              <a:rPr lang="en-US" sz="1600" dirty="0">
                 <a:solidFill>
                   <a:srgbClr val="3A3F46"/>
                 </a:solidFill>
@@ -5407,20 +5959,20 @@
                 <a:ea typeface="Calibri" pitchFamily="34" charset="-122"/>
                 <a:cs typeface="Calibri" pitchFamily="34" charset="-120"/>
               </a:rPr>
-              <a:t>Reachability over recognition — a static detector that reads what a PDF will do, not just what it contains.</a:t>
-            </a:r>
-            <a:endParaRPr lang="en-US" sz="1500" dirty="0"/>
+              <a:t>We did NOT raise EMBER’s 0.78 evasive score — retraining needs raw evasive PDFs we could not obtain.</a:t>
+            </a:r>
+            <a:endParaRPr lang="en-US" sz="1600" dirty="0"/>
           </a:p>
           <a:p>
             <a:pPr marL="342900" indent="-342900">
               <a:lnSpc>
-                <a:spcPct val="112000"/>
+                <a:spcPct val="118000"/>
               </a:lnSpc>
               <a:buSzPct val="100000"/>
               <a:buChar char="•"/>
             </a:pPr>
             <a:r>
-              <a:rPr lang="en-US" sz="1500" b="1" dirty="0">
+              <a:rPr lang="en-US" sz="1600" b="1" dirty="0">
                 <a:solidFill>
                   <a:srgbClr val="1B1E22"/>
                 </a:solidFill>
@@ -5428,19 +5980,19 @@
                 <a:ea typeface="Calibri" pitchFamily="34" charset="-122"/>
                 <a:cs typeface="Calibri" pitchFamily="34" charset="-120"/>
               </a:rPr>
-              <a:t>Three results  </a:t>
+              <a:t>Controlled mechanism  </a:t>
             </a:r>
             <a:pPr indent="0" marL="0">
               <a:lnSpc>
-                <a:spcPct val="112000"/>
+                <a:spcPct val="118000"/>
               </a:lnSpc>
               <a:spcAft>
-                <a:spcPts val="1000"/>
+                <a:spcPts val="1300"/>
               </a:spcAft>
               <a:buNone/>
             </a:pPr>
             <a:r>
-              <a:rPr lang="en-US" sz="1500" dirty="0">
+              <a:rPr lang="en-US" sz="1600" dirty="0">
                 <a:solidFill>
                   <a:srgbClr val="3A3F46"/>
                 </a:solidFill>
@@ -5448,20 +6000,20 @@
                 <a:ea typeface="Calibri" pitchFamily="34" charset="-122"/>
                 <a:cs typeface="Calibri" pitchFamily="34" charset="-120"/>
               </a:rPr>
-              <a:t>Detection (0.649→0.998 controlled), Robustness (SSI 1.000 vs 0.216), Assurance (0/285 FP, verifiable).</a:t>
-            </a:r>
-            <a:endParaRPr lang="en-US" sz="1500" dirty="0"/>
+              <a:t>The 0.998 fusion is on controlled weaponized twins; it isolates the signal, it is not a benchmark claim.</a:t>
+            </a:r>
+            <a:endParaRPr lang="en-US" sz="1600" dirty="0"/>
           </a:p>
           <a:p>
             <a:pPr marL="342900" indent="-342900">
               <a:lnSpc>
-                <a:spcPct val="112000"/>
+                <a:spcPct val="118000"/>
               </a:lnSpc>
               <a:buSzPct val="100000"/>
               <a:buChar char="•"/>
             </a:pPr>
             <a:r>
-              <a:rPr lang="en-US" sz="1500" b="1" dirty="0">
+              <a:rPr lang="en-US" sz="1600" b="1" dirty="0">
                 <a:solidFill>
                   <a:srgbClr val="1B1E22"/>
                 </a:solidFill>
@@ -5469,19 +6021,19 @@
                 <a:ea typeface="Calibri" pitchFamily="34" charset="-122"/>
                 <a:cs typeface="Calibri" pitchFamily="34" charset="-120"/>
               </a:rPr>
-              <a:t>Next · raw evasive  </a:t>
+              <a:t>Capability ≠ intent  </a:t>
             </a:r>
             <a:pPr indent="0" marL="0">
               <a:lnSpc>
-                <a:spcPct val="112000"/>
+                <a:spcPct val="118000"/>
               </a:lnSpc>
               <a:spcAft>
-                <a:spcPts val="1000"/>
+                <a:spcPts val="1300"/>
               </a:spcAft>
               <a:buNone/>
             </a:pPr>
             <a:r>
-              <a:rPr lang="en-US" sz="1500" dirty="0">
+              <a:rPr lang="en-US" sz="1600" dirty="0">
                 <a:solidFill>
                   <a:srgbClr val="3A3F46"/>
                 </a:solidFill>
@@ -5489,20 +6041,20 @@
                 <a:ea typeface="Calibri" pitchFamily="34" charset="-122"/>
                 <a:cs typeface="Calibri" pitchFamily="34" charset="-120"/>
               </a:rPr>
-              <a:t>Retrain a reachability-augmented model on raw evasive PDFs to test the 0.78 directly.</a:t>
-            </a:r>
-            <a:endParaRPr lang="en-US" sz="1500" dirty="0"/>
+              <a:t>Reachability flags a reachable dangerous capability; a benign PDF that genuinely auto-runs JS would be flagged too.</a:t>
+            </a:r>
+            <a:endParaRPr lang="en-US" sz="1600" dirty="0"/>
           </a:p>
           <a:p>
             <a:pPr marL="342900" indent="-342900">
               <a:lnSpc>
-                <a:spcPct val="112000"/>
+                <a:spcPct val="118000"/>
               </a:lnSpc>
               <a:buSzPct val="100000"/>
               <a:buChar char="•"/>
             </a:pPr>
             <a:r>
-              <a:rPr lang="en-US" sz="1500" b="1" dirty="0">
+              <a:rPr lang="en-US" sz="1600" b="1" dirty="0">
                 <a:solidFill>
                   <a:srgbClr val="1B1E22"/>
                 </a:solidFill>
@@ -5510,19 +6062,19 @@
                 <a:ea typeface="Calibri" pitchFamily="34" charset="-122"/>
                 <a:cs typeface="Calibri" pitchFamily="34" charset="-120"/>
               </a:rPr>
-              <a:t>Next · deploy  </a:t>
+              <a:t>Static only  </a:t>
             </a:r>
             <a:pPr indent="0" marL="0">
               <a:lnSpc>
-                <a:spcPct val="112000"/>
+                <a:spcPct val="118000"/>
               </a:lnSpc>
               <a:spcAft>
-                <a:spcPts val="1000"/>
+                <a:spcPts val="1300"/>
               </a:spcAft>
               <a:buNone/>
             </a:pPr>
             <a:r>
-              <a:rPr lang="en-US" sz="1500" dirty="0">
+              <a:rPr lang="en-US" sz="1600" dirty="0">
                 <a:solidFill>
                   <a:srgbClr val="3A3F46"/>
                 </a:solidFill>
@@ -5530,15 +6082,15 @@
                 <a:ea typeface="Calibri" pitchFamily="34" charset="-122"/>
                 <a:cs typeface="Calibri" pitchFamily="34" charset="-120"/>
               </a:rPr>
-              <a:t>~1.2 ms/file makes an email / browser gateway pre-filter realistic; extend to Office OOXML.</a:t>
-            </a:r>
-            <a:endParaRPr lang="en-US" sz="1500" dirty="0"/>
+              <a:t>No dynamic cross-validation — by design, for safety and reproducibility.</a:t>
+            </a:r>
+            <a:endParaRPr lang="en-US" sz="1600" dirty="0"/>
           </a:p>
         </p:txBody>
       </p:sp>
       <p:pic>
         <p:nvPicPr>
-          <p:cNvPr id="6" name="Image 0" descr="/home/claude/PDFSentry/deck/assets/orn_ring.png">    </p:cNvPr>
+          <p:cNvPr id="8" name="Image 0" descr="/home/claude/PDFSentry/deck/assets/orn_ring.png">    </p:cNvPr>
           <p:cNvPicPr>
             <a:picLocks noChangeAspect="1"/>
           </p:cNvPicPr>
@@ -5554,14 +6106,92 @@
         </p:blipFill>
         <p:spPr>
           <a:xfrm>
-            <a:off x="10561320" y="5257800"/>
-            <a:ext cx="1143000" cy="1143000"/>
+            <a:off x="10561320" y="5120640"/>
+            <a:ext cx="1097280" cy="1097280"/>
           </a:xfrm>
           <a:prstGeom prst="rect">
             <a:avLst/>
           </a:prstGeom>
         </p:spPr>
       </p:pic>
+      <p:sp>
+        <p:nvSpPr>
+          <p:cNvPr id="9" name="Text 6"/>
+          <p:cNvSpPr txBox="1"/>
+          <p:nvPr/>
+        </p:nvSpPr>
+        <p:spPr>
+          <a:xfrm>
+            <a:off x="502920" y="6528816"/>
+            <a:ext cx="6400800" cy="237744"/>
+          </a:xfrm>
+          <a:prstGeom prst="rect">
+            <a:avLst/>
+          </a:prstGeom>
+          <a:noFill/>
+          <a:ln/>
+        </p:spPr>
+        <p:txBody>
+          <a:bodyPr wrap="square" lIns="0" tIns="0" rIns="0" bIns="0" rtlCol="0" anchor="ctr"/>
+          <a:lstStyle/>
+          <a:p>
+            <a:pPr indent="0" marL="0">
+              <a:buNone/>
+            </a:pPr>
+            <a:r>
+              <a:rPr lang="en-US" sz="850" spc="150" kern="0" dirty="0">
+                <a:solidFill>
+                  <a:srgbClr val="9AA0A8"/>
+                </a:solidFill>
+                <a:latin typeface="Calibri" pitchFamily="34" charset="0"/>
+                <a:ea typeface="Calibri" pitchFamily="34" charset="-122"/>
+                <a:cs typeface="Calibri" pitchFamily="34" charset="-120"/>
+              </a:rPr>
+              <a:t>PDFSentry · Reachability over Recognition</a:t>
+            </a:r>
+            <a:endParaRPr lang="en-US" sz="850" dirty="0"/>
+          </a:p>
+        </p:txBody>
+      </p:sp>
+      <p:sp>
+        <p:nvSpPr>
+          <p:cNvPr id="10" name="Text 7"/>
+          <p:cNvSpPr txBox="1"/>
+          <p:nvPr/>
+        </p:nvSpPr>
+        <p:spPr>
+          <a:xfrm>
+            <a:off x="11323015" y="6510528"/>
+            <a:ext cx="457200" cy="256032"/>
+          </a:xfrm>
+          <a:prstGeom prst="rect">
+            <a:avLst/>
+          </a:prstGeom>
+          <a:noFill/>
+          <a:ln/>
+        </p:spPr>
+        <p:txBody>
+          <a:bodyPr wrap="square" lIns="0" tIns="0" rIns="0" bIns="0" rtlCol="0" anchor="ctr"/>
+          <a:lstStyle/>
+          <a:p>
+            <a:pPr algn="r" indent="0" marL="0">
+              <a:buNone/>
+            </a:pPr>
+            <a:r>
+              <a:rPr lang="en-US" sz="950" b="1" dirty="0">
+                <a:solidFill>
+                  <a:srgbClr val="6B7178"/>
+                </a:solidFill>
+                <a:latin typeface="Calibri" pitchFamily="34" charset="0"/>
+                <a:ea typeface="Calibri" pitchFamily="34" charset="-122"/>
+                <a:cs typeface="Calibri" pitchFamily="34" charset="-120"/>
+              </a:rPr>
+              <a:t>12</a:t>
+            </a:r>
+            <a:endParaRPr lang="en-US" sz="950" dirty="0"/>
+          </a:p>
+        </p:txBody>
+      </p:sp>
     </p:spTree>
   </p:cSld>
   <p:clrMapOvr>
@@ -5679,6 +6309,810 @@
           </a:p>
         </p:txBody>
       </p:sp>
+      <p:sp>
+        <p:nvSpPr>
+          <p:cNvPr id="4" name="Text 2"/>
+          <p:cNvSpPr txBox="1"/>
+          <p:nvPr/>
+        </p:nvSpPr>
+        <p:spPr>
+          <a:xfrm>
+            <a:off x="512064" y="786384"/>
+            <a:ext cx="10058400" cy="256032"/>
+          </a:xfrm>
+          <a:prstGeom prst="rect">
+            <a:avLst/>
+          </a:prstGeom>
+          <a:noFill/>
+          <a:ln/>
+        </p:spPr>
+        <p:txBody>
+          <a:bodyPr wrap="square" lIns="0" tIns="0" rIns="0" bIns="0" rtlCol="0" anchor="ctr"/>
+          <a:lstStyle/>
+          <a:p>
+            <a:pPr indent="0" marL="0">
+              <a:buNone/>
+            </a:pPr>
+            <a:r>
+              <a:rPr lang="en-US" sz="1100" b="1" spc="400" kern="0" dirty="0">
+                <a:solidFill>
+                  <a:srgbClr val="2F8F82"/>
+                </a:solidFill>
+                <a:latin typeface="Calibri" pitchFamily="34" charset="0"/>
+                <a:ea typeface="Calibri" pitchFamily="34" charset="-122"/>
+                <a:cs typeface="Calibri" pitchFamily="34" charset="-120"/>
+              </a:rPr>
+              <a:t>CONCLUSION</a:t>
+            </a:r>
+            <a:endParaRPr lang="en-US" sz="1100" dirty="0"/>
+          </a:p>
+        </p:txBody>
+      </p:sp>
+      <p:sp>
+        <p:nvSpPr>
+          <p:cNvPr id="5" name="Text 3"/>
+          <p:cNvSpPr txBox="1"/>
+          <p:nvPr/>
+        </p:nvSpPr>
+        <p:spPr>
+          <a:xfrm>
+            <a:off x="502920" y="1078992"/>
+            <a:ext cx="11155680" cy="731520"/>
+          </a:xfrm>
+          <a:prstGeom prst="rect">
+            <a:avLst/>
+          </a:prstGeom>
+          <a:noFill/>
+          <a:ln/>
+        </p:spPr>
+        <p:txBody>
+          <a:bodyPr wrap="square" lIns="0" tIns="0" rIns="0" bIns="0" rtlCol="0" anchor="ctr"/>
+          <a:lstStyle/>
+          <a:p>
+            <a:pPr indent="0" marL="0">
+              <a:buNone/>
+            </a:pPr>
+            <a:r>
+              <a:rPr lang="en-US" sz="3200" dirty="0">
+                <a:solidFill>
+                  <a:srgbClr val="1B1E22"/>
+                </a:solidFill>
+                <a:latin typeface="Arial Black" pitchFamily="34" charset="0"/>
+                <a:ea typeface="Arial Black" pitchFamily="34" charset="-122"/>
+                <a:cs typeface="Arial Black" pitchFamily="34" charset="-120"/>
+              </a:rPr>
+              <a:t>Conclusion &amp; future work</a:t>
+            </a:r>
+            <a:endParaRPr lang="en-US" sz="3200" dirty="0"/>
+          </a:p>
+        </p:txBody>
+      </p:sp>
+      <p:sp>
+        <p:nvSpPr>
+          <p:cNvPr id="6" name="Text 4"/>
+          <p:cNvSpPr txBox="1"/>
+          <p:nvPr/>
+        </p:nvSpPr>
+        <p:spPr>
+          <a:xfrm>
+            <a:off x="566928" y="1965960"/>
+            <a:ext cx="10881360" cy="2788920"/>
+          </a:xfrm>
+          <a:prstGeom prst="rect">
+            <a:avLst/>
+          </a:prstGeom>
+          <a:noFill/>
+          <a:ln/>
+        </p:spPr>
+        <p:txBody>
+          <a:bodyPr wrap="square" lIns="0" tIns="0" rIns="0" bIns="0" rtlCol="0" anchor="t"/>
+          <a:lstStyle/>
+          <a:p>
+            <a:pPr marL="342900" indent="-342900">
+              <a:lnSpc>
+                <a:spcPct val="118000"/>
+              </a:lnSpc>
+              <a:buSzPct val="100000"/>
+              <a:buChar char="•"/>
+            </a:pPr>
+            <a:r>
+              <a:rPr lang="en-US" sz="1600" b="1" dirty="0">
+                <a:solidFill>
+                  <a:srgbClr val="1B1E22"/>
+                </a:solidFill>
+                <a:latin typeface="Calibri" pitchFamily="34" charset="0"/>
+                <a:ea typeface="Calibri" pitchFamily="34" charset="-122"/>
+                <a:cs typeface="Calibri" pitchFamily="34" charset="-120"/>
+              </a:rPr>
+              <a:t>New idea, built  </a:t>
+            </a:r>
+            <a:pPr indent="0" marL="0">
+              <a:lnSpc>
+                <a:spcPct val="118000"/>
+              </a:lnSpc>
+              <a:spcAft>
+                <a:spcPts val="1300"/>
+              </a:spcAft>
+              <a:buNone/>
+            </a:pPr>
+            <a:r>
+              <a:rPr lang="en-US" sz="1600" dirty="0">
+                <a:solidFill>
+                  <a:srgbClr val="3A3F46"/>
+                </a:solidFill>
+                <a:latin typeface="Calibri" pitchFamily="34" charset="0"/>
+                <a:ea typeface="Calibri" pitchFamily="34" charset="-122"/>
+                <a:cs typeface="Calibri" pitchFamily="34" charset="-120"/>
+              </a:rPr>
+              <a:t>Reachability over recognition — a static detector that reads what a PDF will do, not just what it contains.</a:t>
+            </a:r>
+            <a:endParaRPr lang="en-US" sz="1600" dirty="0"/>
+          </a:p>
+          <a:p>
+            <a:pPr marL="342900" indent="-342900">
+              <a:lnSpc>
+                <a:spcPct val="118000"/>
+              </a:lnSpc>
+              <a:buSzPct val="100000"/>
+              <a:buChar char="•"/>
+            </a:pPr>
+            <a:r>
+              <a:rPr lang="en-US" sz="1600" b="1" dirty="0">
+                <a:solidFill>
+                  <a:srgbClr val="1B1E22"/>
+                </a:solidFill>
+                <a:latin typeface="Calibri" pitchFamily="34" charset="0"/>
+                <a:ea typeface="Calibri" pitchFamily="34" charset="-122"/>
+                <a:cs typeface="Calibri" pitchFamily="34" charset="-120"/>
+              </a:rPr>
+              <a:t>Three results  </a:t>
+            </a:r>
+            <a:pPr indent="0" marL="0">
+              <a:lnSpc>
+                <a:spcPct val="118000"/>
+              </a:lnSpc>
+              <a:spcAft>
+                <a:spcPts val="1300"/>
+              </a:spcAft>
+              <a:buNone/>
+            </a:pPr>
+            <a:r>
+              <a:rPr lang="en-US" sz="1600" dirty="0">
+                <a:solidFill>
+                  <a:srgbClr val="3A3F46"/>
+                </a:solidFill>
+                <a:latin typeface="Calibri" pitchFamily="34" charset="0"/>
+                <a:ea typeface="Calibri" pitchFamily="34" charset="-122"/>
+                <a:cs typeface="Calibri" pitchFamily="34" charset="-120"/>
+              </a:rPr>
+              <a:t>Detection (0.649→0.998 controlled), Robustness (SSI 1.000 vs 0.216), Assurance (0/285 FP, verifiable).</a:t>
+            </a:r>
+            <a:endParaRPr lang="en-US" sz="1600" dirty="0"/>
+          </a:p>
+          <a:p>
+            <a:pPr marL="342900" indent="-342900">
+              <a:lnSpc>
+                <a:spcPct val="118000"/>
+              </a:lnSpc>
+              <a:buSzPct val="100000"/>
+              <a:buChar char="•"/>
+            </a:pPr>
+            <a:r>
+              <a:rPr lang="en-US" sz="1600" b="1" dirty="0">
+                <a:solidFill>
+                  <a:srgbClr val="1B1E22"/>
+                </a:solidFill>
+                <a:latin typeface="Calibri" pitchFamily="34" charset="0"/>
+                <a:ea typeface="Calibri" pitchFamily="34" charset="-122"/>
+                <a:cs typeface="Calibri" pitchFamily="34" charset="-120"/>
+              </a:rPr>
+              <a:t>Next · raw evasive  </a:t>
+            </a:r>
+            <a:pPr indent="0" marL="0">
+              <a:lnSpc>
+                <a:spcPct val="118000"/>
+              </a:lnSpc>
+              <a:spcAft>
+                <a:spcPts val="1300"/>
+              </a:spcAft>
+              <a:buNone/>
+            </a:pPr>
+            <a:r>
+              <a:rPr lang="en-US" sz="1600" dirty="0">
+                <a:solidFill>
+                  <a:srgbClr val="3A3F46"/>
+                </a:solidFill>
+                <a:latin typeface="Calibri" pitchFamily="34" charset="0"/>
+                <a:ea typeface="Calibri" pitchFamily="34" charset="-122"/>
+                <a:cs typeface="Calibri" pitchFamily="34" charset="-120"/>
+              </a:rPr>
+              <a:t>Retrain a reachability-augmented model on raw evasive PDFs to test the 0.78 benchmark directly.</a:t>
+            </a:r>
+            <a:endParaRPr lang="en-US" sz="1600" dirty="0"/>
+          </a:p>
+          <a:p>
+            <a:pPr marL="342900" indent="-342900">
+              <a:lnSpc>
+                <a:spcPct val="118000"/>
+              </a:lnSpc>
+              <a:buSzPct val="100000"/>
+              <a:buChar char="•"/>
+            </a:pPr>
+            <a:r>
+              <a:rPr lang="en-US" sz="1600" b="1" dirty="0">
+                <a:solidFill>
+                  <a:srgbClr val="1B1E22"/>
+                </a:solidFill>
+                <a:latin typeface="Calibri" pitchFamily="34" charset="0"/>
+                <a:ea typeface="Calibri" pitchFamily="34" charset="-122"/>
+                <a:cs typeface="Calibri" pitchFamily="34" charset="-120"/>
+              </a:rPr>
+              <a:t>Next · deploy  </a:t>
+            </a:r>
+            <a:pPr indent="0" marL="0">
+              <a:lnSpc>
+                <a:spcPct val="118000"/>
+              </a:lnSpc>
+              <a:spcAft>
+                <a:spcPts val="1300"/>
+              </a:spcAft>
+              <a:buNone/>
+            </a:pPr>
+            <a:r>
+              <a:rPr lang="en-US" sz="1600" dirty="0">
+                <a:solidFill>
+                  <a:srgbClr val="3A3F46"/>
+                </a:solidFill>
+                <a:latin typeface="Calibri" pitchFamily="34" charset="0"/>
+                <a:ea typeface="Calibri" pitchFamily="34" charset="-122"/>
+                <a:cs typeface="Calibri" pitchFamily="34" charset="-120"/>
+              </a:rPr>
+              <a:t>~1.2 ms/file makes an email / browser gateway pre-filter realistic; extend to Office OOXML.</a:t>
+            </a:r>
+            <a:endParaRPr lang="en-US" sz="1600" dirty="0"/>
+          </a:p>
+        </p:txBody>
+      </p:sp>
+      <p:sp>
+        <p:nvSpPr>
+          <p:cNvPr id="7" name="Shape 5"/>
+          <p:cNvSpPr/>
+          <p:nvPr/>
+        </p:nvSpPr>
+        <p:spPr>
+          <a:xfrm>
+            <a:off x="548640" y="5074920"/>
+            <a:ext cx="3383280" cy="1097280"/>
+          </a:xfrm>
+          <a:prstGeom prst="roundRect">
+            <a:avLst>
+              <a:gd name="adj" fmla="val 5833"/>
+            </a:avLst>
+          </a:prstGeom>
+          <a:solidFill>
+            <a:srgbClr val="EEF0F2"/>
+          </a:solidFill>
+          <a:ln w="9525">
+            <a:solidFill>
+              <a:srgbClr val="CED2D8"/>
+            </a:solidFill>
+            <a:prstDash val="solid"/>
+          </a:ln>
+          <a:effectLst>
+            <a:outerShdw sx="100000" sy="100000" kx="0" ky="0" algn="bl" rotWithShape="0" blurRad="101600" dist="38100" dir="5400000">
+              <a:srgbClr val="9aa0a8">
+                <a:alpha val="30000"/>
+              </a:srgbClr>
+            </a:outerShdw>
+          </a:effectLst>
+        </p:spPr>
+      </p:sp>
+      <p:sp>
+        <p:nvSpPr>
+          <p:cNvPr id="8" name="Text 6"/>
+          <p:cNvSpPr txBox="1"/>
+          <p:nvPr/>
+        </p:nvSpPr>
+        <p:spPr>
+          <a:xfrm>
+            <a:off x="804672" y="5230368"/>
+            <a:ext cx="2871216" cy="548640"/>
+          </a:xfrm>
+          <a:prstGeom prst="rect">
+            <a:avLst/>
+          </a:prstGeom>
+          <a:noFill/>
+          <a:ln/>
+        </p:spPr>
+        <p:txBody>
+          <a:bodyPr wrap="square" lIns="0" tIns="0" rIns="0" bIns="0" rtlCol="0" anchor="ctr"/>
+          <a:lstStyle/>
+          <a:p>
+            <a:pPr indent="0" marL="0">
+              <a:buNone/>
+            </a:pPr>
+            <a:r>
+              <a:rPr lang="en-US" sz="2700" dirty="0">
+                <a:solidFill>
+                  <a:srgbClr val="2F8F82"/>
+                </a:solidFill>
+                <a:latin typeface="Arial Black" pitchFamily="34" charset="0"/>
+                <a:ea typeface="Arial Black" pitchFamily="34" charset="-122"/>
+                <a:cs typeface="Arial Black" pitchFamily="34" charset="-120"/>
+              </a:rPr>
+              <a:t>0.998</a:t>
+            </a:r>
+            <a:endParaRPr lang="en-US" sz="2700" dirty="0"/>
+          </a:p>
+        </p:txBody>
+      </p:sp>
+      <p:sp>
+        <p:nvSpPr>
+          <p:cNvPr id="9" name="Text 7"/>
+          <p:cNvSpPr txBox="1"/>
+          <p:nvPr/>
+        </p:nvSpPr>
+        <p:spPr>
+          <a:xfrm>
+            <a:off x="804672" y="5769864"/>
+            <a:ext cx="2871216" cy="365760"/>
+          </a:xfrm>
+          <a:prstGeom prst="rect">
+            <a:avLst/>
+          </a:prstGeom>
+          <a:noFill/>
+          <a:ln/>
+        </p:spPr>
+        <p:txBody>
+          <a:bodyPr wrap="square" lIns="0" tIns="0" rIns="0" bIns="0" rtlCol="0" anchor="ctr"/>
+          <a:lstStyle/>
+          <a:p>
+            <a:pPr indent="0" marL="0">
+              <a:lnSpc>
+                <a:spcPct val="100000"/>
+              </a:lnSpc>
+              <a:buNone/>
+            </a:pPr>
+            <a:r>
+              <a:rPr lang="en-US" sz="1050" dirty="0">
+                <a:solidFill>
+                  <a:srgbClr val="6B7178"/>
+                </a:solidFill>
+                <a:latin typeface="Calibri" pitchFamily="34" charset="0"/>
+                <a:ea typeface="Calibri" pitchFamily="34" charset="-122"/>
+                <a:cs typeface="Calibri" pitchFamily="34" charset="-120"/>
+              </a:rPr>
+              <a:t>detection (controlled ROC-AUC)</a:t>
+            </a:r>
+            <a:endParaRPr lang="en-US" sz="1050" dirty="0"/>
+          </a:p>
+        </p:txBody>
+      </p:sp>
+      <p:sp>
+        <p:nvSpPr>
+          <p:cNvPr id="10" name="Shape 8"/>
+          <p:cNvSpPr/>
+          <p:nvPr/>
+        </p:nvSpPr>
+        <p:spPr>
+          <a:xfrm>
+            <a:off x="4297680" y="5074920"/>
+            <a:ext cx="3383280" cy="1097280"/>
+          </a:xfrm>
+          <a:prstGeom prst="roundRect">
+            <a:avLst>
+              <a:gd name="adj" fmla="val 5833"/>
+            </a:avLst>
+          </a:prstGeom>
+          <a:solidFill>
+            <a:srgbClr val="EEF0F2"/>
+          </a:solidFill>
+          <a:ln w="9525">
+            <a:solidFill>
+              <a:srgbClr val="CED2D8"/>
+            </a:solidFill>
+            <a:prstDash val="solid"/>
+          </a:ln>
+          <a:effectLst>
+            <a:outerShdw sx="100000" sy="100000" kx="0" ky="0" algn="bl" rotWithShape="0" blurRad="101600" dist="38100" dir="5400000">
+              <a:srgbClr val="9aa0a8">
+                <a:alpha val="30000"/>
+              </a:srgbClr>
+            </a:outerShdw>
+          </a:effectLst>
+        </p:spPr>
+      </p:sp>
+      <p:sp>
+        <p:nvSpPr>
+          <p:cNvPr id="11" name="Text 9"/>
+          <p:cNvSpPr txBox="1"/>
+          <p:nvPr/>
+        </p:nvSpPr>
+        <p:spPr>
+          <a:xfrm>
+            <a:off x="4553712" y="5230368"/>
+            <a:ext cx="2871216" cy="548640"/>
+          </a:xfrm>
+          <a:prstGeom prst="rect">
+            <a:avLst/>
+          </a:prstGeom>
+          <a:noFill/>
+          <a:ln/>
+        </p:spPr>
+        <p:txBody>
+          <a:bodyPr wrap="square" lIns="0" tIns="0" rIns="0" bIns="0" rtlCol="0" anchor="ctr"/>
+          <a:lstStyle/>
+          <a:p>
+            <a:pPr indent="0" marL="0">
+              <a:buNone/>
+            </a:pPr>
+            <a:r>
+              <a:rPr lang="en-US" sz="2700" dirty="0">
+                <a:solidFill>
+                  <a:srgbClr val="2F8F82"/>
+                </a:solidFill>
+                <a:latin typeface="Arial Black" pitchFamily="34" charset="0"/>
+                <a:ea typeface="Arial Black" pitchFamily="34" charset="-122"/>
+                <a:cs typeface="Arial Black" pitchFamily="34" charset="-120"/>
+              </a:rPr>
+              <a:t>1.000</a:t>
+            </a:r>
+            <a:endParaRPr lang="en-US" sz="2700" dirty="0"/>
+          </a:p>
+        </p:txBody>
+      </p:sp>
+      <p:sp>
+        <p:nvSpPr>
+          <p:cNvPr id="12" name="Text 10"/>
+          <p:cNvSpPr txBox="1"/>
+          <p:nvPr/>
+        </p:nvSpPr>
+        <p:spPr>
+          <a:xfrm>
+            <a:off x="4553712" y="5769864"/>
+            <a:ext cx="2871216" cy="365760"/>
+          </a:xfrm>
+          <a:prstGeom prst="rect">
+            <a:avLst/>
+          </a:prstGeom>
+          <a:noFill/>
+          <a:ln/>
+        </p:spPr>
+        <p:txBody>
+          <a:bodyPr wrap="square" lIns="0" tIns="0" rIns="0" bIns="0" rtlCol="0" anchor="ctr"/>
+          <a:lstStyle/>
+          <a:p>
+            <a:pPr indent="0" marL="0">
+              <a:lnSpc>
+                <a:spcPct val="100000"/>
+              </a:lnSpc>
+              <a:buNone/>
+            </a:pPr>
+            <a:r>
+              <a:rPr lang="en-US" sz="1050" dirty="0">
+                <a:solidFill>
+                  <a:srgbClr val="6B7178"/>
+                </a:solidFill>
+                <a:latin typeface="Calibri" pitchFamily="34" charset="0"/>
+                <a:ea typeface="Calibri" pitchFamily="34" charset="-122"/>
+                <a:cs typeface="Calibri" pitchFamily="34" charset="-120"/>
+              </a:rPr>
+              <a:t>robustness (stability index)</a:t>
+            </a:r>
+            <a:endParaRPr lang="en-US" sz="1050" dirty="0"/>
+          </a:p>
+        </p:txBody>
+      </p:sp>
+      <p:sp>
+        <p:nvSpPr>
+          <p:cNvPr id="13" name="Shape 11"/>
+          <p:cNvSpPr/>
+          <p:nvPr/>
+        </p:nvSpPr>
+        <p:spPr>
+          <a:xfrm>
+            <a:off x="8046720" y="5074920"/>
+            <a:ext cx="3383280" cy="1097280"/>
+          </a:xfrm>
+          <a:prstGeom prst="roundRect">
+            <a:avLst>
+              <a:gd name="adj" fmla="val 5833"/>
+            </a:avLst>
+          </a:prstGeom>
+          <a:solidFill>
+            <a:srgbClr val="EEF0F2"/>
+          </a:solidFill>
+          <a:ln w="9525">
+            <a:solidFill>
+              <a:srgbClr val="CED2D8"/>
+            </a:solidFill>
+            <a:prstDash val="solid"/>
+          </a:ln>
+          <a:effectLst>
+            <a:outerShdw sx="100000" sy="100000" kx="0" ky="0" algn="bl" rotWithShape="0" blurRad="101600" dist="38100" dir="5400000">
+              <a:srgbClr val="9aa0a8">
+                <a:alpha val="30000"/>
+              </a:srgbClr>
+            </a:outerShdw>
+          </a:effectLst>
+        </p:spPr>
+      </p:sp>
+      <p:sp>
+        <p:nvSpPr>
+          <p:cNvPr id="14" name="Text 12"/>
+          <p:cNvSpPr txBox="1"/>
+          <p:nvPr/>
+        </p:nvSpPr>
+        <p:spPr>
+          <a:xfrm>
+            <a:off x="8302752" y="5230368"/>
+            <a:ext cx="2871216" cy="548640"/>
+          </a:xfrm>
+          <a:prstGeom prst="rect">
+            <a:avLst/>
+          </a:prstGeom>
+          <a:noFill/>
+          <a:ln/>
+        </p:spPr>
+        <p:txBody>
+          <a:bodyPr wrap="square" lIns="0" tIns="0" rIns="0" bIns="0" rtlCol="0" anchor="ctr"/>
+          <a:lstStyle/>
+          <a:p>
+            <a:pPr indent="0" marL="0">
+              <a:buNone/>
+            </a:pPr>
+            <a:r>
+              <a:rPr lang="en-US" sz="2700" dirty="0">
+                <a:solidFill>
+                  <a:srgbClr val="2F8F82"/>
+                </a:solidFill>
+                <a:latin typeface="Arial Black" pitchFamily="34" charset="0"/>
+                <a:ea typeface="Arial Black" pitchFamily="34" charset="-122"/>
+                <a:cs typeface="Arial Black" pitchFamily="34" charset="-120"/>
+              </a:rPr>
+              <a:t>0 / 285</a:t>
+            </a:r>
+            <a:endParaRPr lang="en-US" sz="2700" dirty="0"/>
+          </a:p>
+        </p:txBody>
+      </p:sp>
+      <p:sp>
+        <p:nvSpPr>
+          <p:cNvPr id="15" name="Text 13"/>
+          <p:cNvSpPr txBox="1"/>
+          <p:nvPr/>
+        </p:nvSpPr>
+        <p:spPr>
+          <a:xfrm>
+            <a:off x="8302752" y="5769864"/>
+            <a:ext cx="2871216" cy="365760"/>
+          </a:xfrm>
+          <a:prstGeom prst="rect">
+            <a:avLst/>
+          </a:prstGeom>
+          <a:noFill/>
+          <a:ln/>
+        </p:spPr>
+        <p:txBody>
+          <a:bodyPr wrap="square" lIns="0" tIns="0" rIns="0" bIns="0" rtlCol="0" anchor="ctr"/>
+          <a:lstStyle/>
+          <a:p>
+            <a:pPr indent="0" marL="0">
+              <a:lnSpc>
+                <a:spcPct val="100000"/>
+              </a:lnSpc>
+              <a:buNone/>
+            </a:pPr>
+            <a:r>
+              <a:rPr lang="en-US" sz="1050" dirty="0">
+                <a:solidFill>
+                  <a:srgbClr val="6B7178"/>
+                </a:solidFill>
+                <a:latin typeface="Calibri" pitchFamily="34" charset="0"/>
+                <a:ea typeface="Calibri" pitchFamily="34" charset="-122"/>
+                <a:cs typeface="Calibri" pitchFamily="34" charset="-120"/>
+              </a:rPr>
+              <a:t>assurance (false positives)</a:t>
+            </a:r>
+            <a:endParaRPr lang="en-US" sz="1050" dirty="0"/>
+          </a:p>
+        </p:txBody>
+      </p:sp>
+      <p:sp>
+        <p:nvSpPr>
+          <p:cNvPr id="16" name="Text 14"/>
+          <p:cNvSpPr txBox="1"/>
+          <p:nvPr/>
+        </p:nvSpPr>
+        <p:spPr>
+          <a:xfrm>
+            <a:off x="502920" y="6528816"/>
+            <a:ext cx="6400800" cy="237744"/>
+          </a:xfrm>
+          <a:prstGeom prst="rect">
+            <a:avLst/>
+          </a:prstGeom>
+          <a:noFill/>
+          <a:ln/>
+        </p:spPr>
+        <p:txBody>
+          <a:bodyPr wrap="square" lIns="0" tIns="0" rIns="0" bIns="0" rtlCol="0" anchor="ctr"/>
+          <a:lstStyle/>
+          <a:p>
+            <a:pPr indent="0" marL="0">
+              <a:buNone/>
+            </a:pPr>
+            <a:r>
+              <a:rPr lang="en-US" sz="850" spc="150" kern="0" dirty="0">
+                <a:solidFill>
+                  <a:srgbClr val="9AA0A8"/>
+                </a:solidFill>
+                <a:latin typeface="Calibri" pitchFamily="34" charset="0"/>
+                <a:ea typeface="Calibri" pitchFamily="34" charset="-122"/>
+                <a:cs typeface="Calibri" pitchFamily="34" charset="-120"/>
+              </a:rPr>
+              <a:t>PDFSentry · Reachability over Recognition</a:t>
+            </a:r>
+            <a:endParaRPr lang="en-US" sz="850" dirty="0"/>
+          </a:p>
+        </p:txBody>
+      </p:sp>
+      <p:sp>
+        <p:nvSpPr>
+          <p:cNvPr id="17" name="Text 15"/>
+          <p:cNvSpPr txBox="1"/>
+          <p:nvPr/>
+        </p:nvSpPr>
+        <p:spPr>
+          <a:xfrm>
+            <a:off x="11323015" y="6510528"/>
+            <a:ext cx="457200" cy="256032"/>
+          </a:xfrm>
+          <a:prstGeom prst="rect">
+            <a:avLst/>
+          </a:prstGeom>
+          <a:noFill/>
+          <a:ln/>
+        </p:spPr>
+        <p:txBody>
+          <a:bodyPr wrap="square" lIns="0" tIns="0" rIns="0" bIns="0" rtlCol="0" anchor="ctr"/>
+          <a:lstStyle/>
+          <a:p>
+            <a:pPr algn="r" indent="0" marL="0">
+              <a:buNone/>
+            </a:pPr>
+            <a:r>
+              <a:rPr lang="en-US" sz="950" b="1" dirty="0">
+                <a:solidFill>
+                  <a:srgbClr val="6B7178"/>
+                </a:solidFill>
+                <a:latin typeface="Calibri" pitchFamily="34" charset="0"/>
+                <a:ea typeface="Calibri" pitchFamily="34" charset="-122"/>
+                <a:cs typeface="Calibri" pitchFamily="34" charset="-120"/>
+              </a:rPr>
+              <a:t>13</a:t>
+            </a:r>
+            <a:endParaRPr lang="en-US" sz="950" dirty="0"/>
+          </a:p>
+        </p:txBody>
+      </p:sp>
+    </p:spTree>
+  </p:cSld>
+  <p:clrMapOvr>
+    <a:masterClrMapping/>
+  </p:clrMapOvr>
+</p:sld>
+</file>
+
+<file path=ppt/slides/slide14.xml><?xml version="1.0" encoding="utf-8"?>
+<p:sld xmlns:a="http://schemas.openxmlformats.org/drawingml/2006/main" xmlns:r="http://schemas.openxmlformats.org/officeDocument/2006/relationships" xmlns:p="http://schemas.openxmlformats.org/presentationml/2006/main">
+  <p:cSld name="Slide 14">
+    <p:bg>
+      <p:bgPr>
+        <a:blipFill dpi="0" rotWithShape="1">
+          <a:blip r:embed="rId1">
+            <a:lum/>
+          </a:blip>
+          <a:srcRect/>
+          <a:stretch>
+            <a:fillRect/>
+          </a:stretch>
+        </a:blipFill>
+        <a:effectLst/>
+      </p:bgPr>
+    </p:bg>
+    <p:spTree>
+      <p:nvGrpSpPr>
+        <p:cNvPr id="1" name=""/>
+        <p:cNvGrpSpPr/>
+        <p:nvPr/>
+      </p:nvGrpSpPr>
+      <p:grpSpPr>
+        <a:xfrm>
+          <a:off x="0" y="0"/>
+          <a:ext cx="0" cy="0"/>
+          <a:chOff x="0" y="0"/>
+          <a:chExt cx="0" cy="0"/>
+        </a:xfrm>
+      </p:grpSpPr>
+      <p:sp>
+        <p:nvSpPr>
+          <p:cNvPr id="2" name="Text 0"/>
+          <p:cNvSpPr txBox="1"/>
+          <p:nvPr/>
+        </p:nvSpPr>
+        <p:spPr>
+          <a:xfrm>
+            <a:off x="502920" y="292608"/>
+            <a:ext cx="4572000" cy="274320"/>
+          </a:xfrm>
+          <a:prstGeom prst="rect">
+            <a:avLst/>
+          </a:prstGeom>
+          <a:noFill/>
+          <a:ln/>
+        </p:spPr>
+        <p:txBody>
+          <a:bodyPr wrap="square" lIns="0" tIns="0" rIns="0" bIns="0" rtlCol="0" anchor="ctr"/>
+          <a:lstStyle/>
+          <a:p>
+            <a:pPr indent="0" marL="0">
+              <a:buNone/>
+            </a:pPr>
+            <a:r>
+              <a:rPr lang="en-US" sz="1100" b="1" spc="400" kern="0" dirty="0">
+                <a:solidFill>
+                  <a:srgbClr val="6B7178"/>
+                </a:solidFill>
+                <a:latin typeface="Calibri" pitchFamily="34" charset="0"/>
+                <a:ea typeface="Calibri" pitchFamily="34" charset="-122"/>
+                <a:cs typeface="Calibri" pitchFamily="34" charset="-120"/>
+              </a:rPr>
+              <a:t>PDFSENTRY</a:t>
+            </a:r>
+            <a:endParaRPr lang="en-US" sz="1100" dirty="0"/>
+          </a:p>
+        </p:txBody>
+      </p:sp>
+      <p:sp>
+        <p:nvSpPr>
+          <p:cNvPr id="3" name="Text 1"/>
+          <p:cNvSpPr txBox="1"/>
+          <p:nvPr/>
+        </p:nvSpPr>
+        <p:spPr>
+          <a:xfrm>
+            <a:off x="6659575" y="292608"/>
+            <a:ext cx="5029200" cy="274320"/>
+          </a:xfrm>
+          <a:prstGeom prst="rect">
+            <a:avLst/>
+          </a:prstGeom>
+          <a:noFill/>
+          <a:ln/>
+        </p:spPr>
+        <p:txBody>
+          <a:bodyPr wrap="square" lIns="0" tIns="0" rIns="0" bIns="0" rtlCol="0" anchor="ctr"/>
+          <a:lstStyle/>
+          <a:p>
+            <a:pPr algn="r" indent="0" marL="0">
+              <a:buNone/>
+            </a:pPr>
+            <a:r>
+              <a:rPr lang="en-US" sz="1100" spc="300" kern="0" dirty="0">
+                <a:solidFill>
+                  <a:srgbClr val="6B7178"/>
+                </a:solidFill>
+                <a:latin typeface="Calibri" pitchFamily="34" charset="0"/>
+                <a:ea typeface="Calibri" pitchFamily="34" charset="-122"/>
+                <a:cs typeface="Calibri" pitchFamily="34" charset="-120"/>
+              </a:rPr>
+              <a:t>REVIEW 3 · FINAL</a:t>
+            </a:r>
+            <a:endParaRPr lang="en-US" sz="1100" dirty="0"/>
+          </a:p>
+        </p:txBody>
+      </p:sp>
       <p:pic>
         <p:nvPicPr>
           <p:cNvPr id="4" name="Image 0" descr="/home/claude/PDFSentry/deck/assets/orn_globe.png">    </p:cNvPr>
@@ -5794,7 +7228,7 @@
         </p:nvSpPr>
         <p:spPr>
           <a:xfrm>
-            <a:off x="566928" y="3566160"/>
+            <a:off x="566928" y="3520440"/>
             <a:ext cx="7223760" cy="1828800"/>
           </a:xfrm>
           <a:prstGeom prst="rect">
@@ -5804,15 +7238,15 @@
           <a:ln/>
         </p:spPr>
         <p:txBody>
-          <a:bodyPr wrap="square" lIns="0" tIns="0" rIns="0" bIns="0" rtlCol="0" anchor="ctr"/>
+          <a:bodyPr wrap="square" lIns="0" tIns="0" rIns="0" bIns="0" rtlCol="0" anchor="t"/>
           <a:lstStyle/>
           <a:p>
             <a:pPr marL="342900" indent="-342900">
               <a:lnSpc>
-                <a:spcPct val="110000"/>
+                <a:spcPct val="112000"/>
               </a:lnSpc>
               <a:spcAft>
-                <a:spcPts val="800"/>
+                <a:spcPts val="900"/>
               </a:spcAft>
               <a:buSzPct val="100000"/>
               <a:buChar char="•"/>
@@ -5833,10 +7267,10 @@
           <a:p>
             <a:pPr marL="342900" indent="-342900">
               <a:lnSpc>
-                <a:spcPct val="110000"/>
+                <a:spcPct val="112000"/>
               </a:lnSpc>
               <a:spcAft>
-                <a:spcPts val="800"/>
+                <a:spcPts val="900"/>
               </a:spcAft>
               <a:buSzPct val="100000"/>
               <a:buChar char="•"/>
@@ -5857,10 +7291,10 @@
           <a:p>
             <a:pPr marL="342900" indent="-342900">
               <a:lnSpc>
-                <a:spcPct val="110000"/>
+                <a:spcPct val="112000"/>
               </a:lnSpc>
               <a:spcAft>
-                <a:spcPts val="800"/>
+                <a:spcPts val="900"/>
               </a:spcAft>
               <a:buSzPct val="100000"/>
               <a:buChar char="•"/>
@@ -5888,7 +7322,7 @@
         </p:nvSpPr>
         <p:spPr>
           <a:xfrm>
-            <a:off x="548640" y="5669280"/>
+            <a:off x="548640" y="5715000"/>
             <a:ext cx="10972800" cy="320040"/>
           </a:xfrm>
           <a:prstGeom prst="rect">
@@ -5941,7 +7375,7 @@
         </p:nvSpPr>
         <p:spPr>
           <a:xfrm>
-            <a:off x="548640" y="6053328"/>
+            <a:off x="548640" y="6099048"/>
             <a:ext cx="10972800" cy="320040"/>
           </a:xfrm>
           <a:prstGeom prst="rect">
@@ -6111,7 +7545,46 @@
         </p:nvSpPr>
         <p:spPr>
           <a:xfrm>
-            <a:off x="502920" y="822960"/>
+            <a:off x="512064" y="786384"/>
+            <a:ext cx="10058400" cy="256032"/>
+          </a:xfrm>
+          <a:prstGeom prst="rect">
+            <a:avLst/>
+          </a:prstGeom>
+          <a:noFill/>
+          <a:ln/>
+        </p:spPr>
+        <p:txBody>
+          <a:bodyPr wrap="square" lIns="0" tIns="0" rIns="0" bIns="0" rtlCol="0" anchor="ctr"/>
+          <a:lstStyle/>
+          <a:p>
+            <a:pPr indent="0" marL="0">
+              <a:buNone/>
+            </a:pPr>
+            <a:r>
+              <a:rPr lang="en-US" sz="1100" b="1" spc="400" kern="0" dirty="0">
+                <a:solidFill>
+                  <a:srgbClr val="2F8F82"/>
+                </a:solidFill>
+                <a:latin typeface="Calibri" pitchFamily="34" charset="0"/>
+                <a:ea typeface="Calibri" pitchFamily="34" charset="-122"/>
+                <a:cs typeface="Calibri" pitchFamily="34" charset="-120"/>
+              </a:rPr>
+              <a:t>MOTIVATION</a:t>
+            </a:r>
+            <a:endParaRPr lang="en-US" sz="1100" dirty="0"/>
+          </a:p>
+        </p:txBody>
+      </p:sp>
+      <p:sp>
+        <p:nvSpPr>
+          <p:cNvPr id="5" name="Text 3"/>
+          <p:cNvSpPr txBox="1"/>
+          <p:nvPr/>
+        </p:nvSpPr>
+        <p:spPr>
+          <a:xfrm>
+            <a:off x="502920" y="1078992"/>
             <a:ext cx="11155680" cy="731520"/>
           </a:xfrm>
           <a:prstGeom prst="rect">
@@ -6144,13 +7617,13 @@
       </p:sp>
       <p:sp>
         <p:nvSpPr>
-          <p:cNvPr id="5" name="Text 3"/>
-          <p:cNvSpPr txBox="1"/>
-          <p:nvPr/>
-        </p:nvSpPr>
-        <p:spPr>
-          <a:xfrm>
-            <a:off x="548640" y="1536192"/>
+          <p:cNvPr id="6" name="Text 4"/>
+          <p:cNvSpPr txBox="1"/>
+          <p:nvPr/>
+        </p:nvSpPr>
+        <p:spPr>
+          <a:xfrm>
+            <a:off x="548640" y="1783080"/>
             <a:ext cx="6309360" cy="548640"/>
           </a:xfrm>
           <a:prstGeom prst="rect">
@@ -6170,7 +7643,7 @@
               <a:buNone/>
             </a:pPr>
             <a:r>
-              <a:rPr lang="en-US" sz="1500" dirty="0">
+              <a:rPr lang="en-US" sz="1550" dirty="0">
                 <a:solidFill>
                   <a:srgbClr val="3A3F46"/>
                 </a:solidFill>
@@ -6180,20 +7653,20 @@
               </a:rPr>
               <a:t>Great benchmark numbers hide a blind spot on the malware that matters most.</a:t>
             </a:r>
-            <a:endParaRPr lang="en-US" sz="1500" dirty="0"/>
-          </a:p>
-        </p:txBody>
-      </p:sp>
-      <p:sp>
-        <p:nvSpPr>
-          <p:cNvPr id="6" name="Text 4"/>
-          <p:cNvSpPr txBox="1"/>
-          <p:nvPr/>
-        </p:nvSpPr>
-        <p:spPr>
-          <a:xfrm>
-            <a:off x="566928" y="2194560"/>
-            <a:ext cx="6309360" cy="4297680"/>
+            <a:endParaRPr lang="en-US" sz="1550" dirty="0"/>
+          </a:p>
+        </p:txBody>
+      </p:sp>
+      <p:sp>
+        <p:nvSpPr>
+          <p:cNvPr id="7" name="Text 5"/>
+          <p:cNvSpPr txBox="1"/>
+          <p:nvPr/>
+        </p:nvSpPr>
+        <p:spPr>
+          <a:xfrm>
+            <a:off x="566928" y="2423160"/>
+            <a:ext cx="6309360" cy="4206240"/>
           </a:xfrm>
           <a:prstGeom prst="rect">
             <a:avLst/>
@@ -6207,13 +7680,13 @@
           <a:p>
             <a:pPr marL="342900" indent="-342900">
               <a:lnSpc>
-                <a:spcPct val="112000"/>
+                <a:spcPct val="118000"/>
               </a:lnSpc>
               <a:buSzPct val="100000"/>
               <a:buChar char="•"/>
             </a:pPr>
             <a:r>
-              <a:rPr lang="en-US" sz="1500" b="1" dirty="0">
+              <a:rPr lang="en-US" sz="1600" b="1" dirty="0">
                 <a:solidFill>
                   <a:srgbClr val="1B1E22"/>
                 </a:solidFill>
@@ -6225,15 +7698,15 @@
             </a:r>
             <a:pPr indent="0" marL="0">
               <a:lnSpc>
-                <a:spcPct val="112000"/>
+                <a:spcPct val="118000"/>
               </a:lnSpc>
               <a:spcAft>
-                <a:spcPts val="1000"/>
+                <a:spcPts val="1300"/>
               </a:spcAft>
               <a:buNone/>
             </a:pPr>
             <a:r>
-              <a:rPr lang="en-US" sz="1500" dirty="0">
+              <a:rPr lang="en-US" sz="1600" dirty="0">
                 <a:solidFill>
                   <a:srgbClr val="3A3F46"/>
                 </a:solidFill>
@@ -6243,18 +7716,18 @@
               </a:rPr>
               <a:t>EMBER2024, a state-of-the-art PDF detector, drops from PR-AUC 0.9933 (ordinary) to 0.7864 (evasive) on its own challenge set.</a:t>
             </a:r>
-            <a:endParaRPr lang="en-US" sz="1500" dirty="0"/>
+            <a:endParaRPr lang="en-US" sz="1600" dirty="0"/>
           </a:p>
           <a:p>
             <a:pPr marL="342900" indent="-342900">
               <a:lnSpc>
-                <a:spcPct val="112000"/>
+                <a:spcPct val="118000"/>
               </a:lnSpc>
               <a:buSzPct val="100000"/>
               <a:buChar char="•"/>
             </a:pPr>
             <a:r>
-              <a:rPr lang="en-US" sz="1500" b="1" dirty="0">
+              <a:rPr lang="en-US" sz="1600" b="1" dirty="0">
                 <a:solidFill>
                   <a:srgbClr val="1B1E22"/>
                 </a:solidFill>
@@ -6266,15 +7739,15 @@
             </a:r>
             <a:pPr indent="0" marL="0">
               <a:lnSpc>
-                <a:spcPct val="112000"/>
+                <a:spcPct val="118000"/>
               </a:lnSpc>
               <a:spcAft>
-                <a:spcPts val="1000"/>
+                <a:spcPts val="1300"/>
               </a:spcAft>
               <a:buNone/>
             </a:pPr>
             <a:r>
-              <a:rPr lang="en-US" sz="1500" dirty="0">
+              <a:rPr lang="en-US" sz="1600" dirty="0">
                 <a:solidFill>
                   <a:srgbClr val="3A3F46"/>
                 </a:solidFill>
@@ -6282,20 +7755,20 @@
                 <a:ea typeface="Calibri" pitchFamily="34" charset="-122"/>
                 <a:cs typeface="Calibri" pitchFamily="34" charset="-120"/>
               </a:rPr>
-              <a:t>It reads byte and string statistics — it is blind to structure and auto-execution.</a:t>
-            </a:r>
-            <a:endParaRPr lang="en-US" sz="1500" dirty="0"/>
+              <a:t>It reads byte and string statistics — it is structurally blind to auto-execution.</a:t>
+            </a:r>
+            <a:endParaRPr lang="en-US" sz="1600" dirty="0"/>
           </a:p>
           <a:p>
             <a:pPr marL="342900" indent="-342900">
               <a:lnSpc>
-                <a:spcPct val="112000"/>
+                <a:spcPct val="118000"/>
               </a:lnSpc>
               <a:buSzPct val="100000"/>
               <a:buChar char="•"/>
             </a:pPr>
             <a:r>
-              <a:rPr lang="en-US" sz="1500" b="1" dirty="0">
+              <a:rPr lang="en-US" sz="1600" b="1" dirty="0">
                 <a:solidFill>
                   <a:srgbClr val="1B1E22"/>
                 </a:solidFill>
@@ -6307,15 +7780,15 @@
             </a:r>
             <a:pPr indent="0" marL="0">
               <a:lnSpc>
-                <a:spcPct val="112000"/>
+                <a:spcPct val="118000"/>
               </a:lnSpc>
               <a:spcAft>
-                <a:spcPts val="1000"/>
+                <a:spcPts val="1300"/>
               </a:spcAft>
               <a:buNone/>
             </a:pPr>
             <a:r>
-              <a:rPr lang="en-US" sz="1500" dirty="0">
+              <a:rPr lang="en-US" sz="1600" dirty="0">
                 <a:solidFill>
                   <a:srgbClr val="3A3F46"/>
                 </a:solidFill>
@@ -6325,18 +7798,18 @@
               </a:rPr>
               <a:t>355 of 805 real evasive PDFs slip through — exactly the malware that already beat antivirus.</a:t>
             </a:r>
-            <a:endParaRPr lang="en-US" sz="1500" dirty="0"/>
+            <a:endParaRPr lang="en-US" sz="1600" dirty="0"/>
           </a:p>
           <a:p>
             <a:pPr marL="342900" indent="-342900">
               <a:lnSpc>
-                <a:spcPct val="112000"/>
+                <a:spcPct val="118000"/>
               </a:lnSpc>
               <a:buSzPct val="100000"/>
               <a:buChar char="•"/>
             </a:pPr>
             <a:r>
-              <a:rPr lang="en-US" sz="1500" b="1" dirty="0">
+              <a:rPr lang="en-US" sz="1600" b="1" dirty="0">
                 <a:solidFill>
                   <a:srgbClr val="1B1E22"/>
                 </a:solidFill>
@@ -6348,15 +7821,15 @@
             </a:r>
             <a:pPr indent="0" marL="0">
               <a:lnSpc>
-                <a:spcPct val="112000"/>
+                <a:spcPct val="118000"/>
               </a:lnSpc>
               <a:spcAft>
-                <a:spcPts val="1000"/>
+                <a:spcPts val="1300"/>
               </a:spcAft>
               <a:buNone/>
             </a:pPr>
             <a:r>
-              <a:rPr lang="en-US" sz="1500" dirty="0">
+              <a:rPr lang="en-US" sz="1600" dirty="0">
                 <a:solidFill>
                   <a:srgbClr val="3A3F46"/>
                 </a:solidFill>
@@ -6366,13 +7839,13 @@
               </a:rPr>
               <a:t>Recognition asks “does this look like malware?”  Reachability asks “can an auto-trigger reach a dangerous action?”</a:t>
             </a:r>
-            <a:endParaRPr lang="en-US" sz="1500" dirty="0"/>
-          </a:p>
-        </p:txBody>
-      </p:sp>
-      <p:sp>
-        <p:nvSpPr>
-          <p:cNvPr id="7" name="Shape 5"/>
+            <a:endParaRPr lang="en-US" sz="1600" dirty="0"/>
+          </a:p>
+        </p:txBody>
+      </p:sp>
+      <p:sp>
+        <p:nvSpPr>
+          <p:cNvPr id="8" name="Shape 6"/>
           <p:cNvSpPr/>
           <p:nvPr/>
         </p:nvSpPr>
@@ -6406,7 +7879,7 @@
       </p:sp>
       <p:pic>
         <p:nvPicPr>
-          <p:cNvPr id="8" name="Image 0" descr="/home/claude/PDFSentry/deck/assets/dash_overview.jpg">    </p:cNvPr>
+          <p:cNvPr id="9" name="Image 0" descr="/home/claude/PDFSentry/deck/assets/dash_overview.jpg">    </p:cNvPr>
           <p:cNvPicPr>
             <a:picLocks noChangeAspect="1"/>
           </p:cNvPicPr>
@@ -6430,7 +7903,7 @@
       </p:pic>
       <p:sp>
         <p:nvSpPr>
-          <p:cNvPr id="9" name="Text 6"/>
+          <p:cNvPr id="10" name="Text 7"/>
           <p:cNvSpPr txBox="1"/>
           <p:nvPr/>
         </p:nvSpPr>
@@ -6464,6 +7937,84 @@
               <a:t>Reproduced in the live dashboard</a:t>
             </a:r>
             <a:endParaRPr lang="en-US" sz="1100" dirty="0"/>
+          </a:p>
+        </p:txBody>
+      </p:sp>
+      <p:sp>
+        <p:nvSpPr>
+          <p:cNvPr id="11" name="Text 8"/>
+          <p:cNvSpPr txBox="1"/>
+          <p:nvPr/>
+        </p:nvSpPr>
+        <p:spPr>
+          <a:xfrm>
+            <a:off x="502920" y="6528816"/>
+            <a:ext cx="6400800" cy="237744"/>
+          </a:xfrm>
+          <a:prstGeom prst="rect">
+            <a:avLst/>
+          </a:prstGeom>
+          <a:noFill/>
+          <a:ln/>
+        </p:spPr>
+        <p:txBody>
+          <a:bodyPr wrap="square" lIns="0" tIns="0" rIns="0" bIns="0" rtlCol="0" anchor="ctr"/>
+          <a:lstStyle/>
+          <a:p>
+            <a:pPr indent="0" marL="0">
+              <a:buNone/>
+            </a:pPr>
+            <a:r>
+              <a:rPr lang="en-US" sz="850" spc="150" kern="0" dirty="0">
+                <a:solidFill>
+                  <a:srgbClr val="9AA0A8"/>
+                </a:solidFill>
+                <a:latin typeface="Calibri" pitchFamily="34" charset="0"/>
+                <a:ea typeface="Calibri" pitchFamily="34" charset="-122"/>
+                <a:cs typeface="Calibri" pitchFamily="34" charset="-120"/>
+              </a:rPr>
+              <a:t>PDFSentry · Reachability over Recognition</a:t>
+            </a:r>
+            <a:endParaRPr lang="en-US" sz="850" dirty="0"/>
+          </a:p>
+        </p:txBody>
+      </p:sp>
+      <p:sp>
+        <p:nvSpPr>
+          <p:cNvPr id="12" name="Text 9"/>
+          <p:cNvSpPr txBox="1"/>
+          <p:nvPr/>
+        </p:nvSpPr>
+        <p:spPr>
+          <a:xfrm>
+            <a:off x="11323015" y="6510528"/>
+            <a:ext cx="457200" cy="256032"/>
+          </a:xfrm>
+          <a:prstGeom prst="rect">
+            <a:avLst/>
+          </a:prstGeom>
+          <a:noFill/>
+          <a:ln/>
+        </p:spPr>
+        <p:txBody>
+          <a:bodyPr wrap="square" lIns="0" tIns="0" rIns="0" bIns="0" rtlCol="0" anchor="ctr"/>
+          <a:lstStyle/>
+          <a:p>
+            <a:pPr algn="r" indent="0" marL="0">
+              <a:buNone/>
+            </a:pPr>
+            <a:r>
+              <a:rPr lang="en-US" sz="950" b="1" dirty="0">
+                <a:solidFill>
+                  <a:srgbClr val="6B7178"/>
+                </a:solidFill>
+                <a:latin typeface="Calibri" pitchFamily="34" charset="0"/>
+                <a:ea typeface="Calibri" pitchFamily="34" charset="-122"/>
+                <a:cs typeface="Calibri" pitchFamily="34" charset="-120"/>
+              </a:rPr>
+              <a:t>02</a:t>
+            </a:r>
+            <a:endParaRPr lang="en-US" sz="950" dirty="0"/>
           </a:p>
         </p:txBody>
       </p:sp>
@@ -6592,7 +8143,46 @@
         </p:nvSpPr>
         <p:spPr>
           <a:xfrm>
-            <a:off x="502920" y="822960"/>
+            <a:off x="512064" y="786384"/>
+            <a:ext cx="10058400" cy="256032"/>
+          </a:xfrm>
+          <a:prstGeom prst="rect">
+            <a:avLst/>
+          </a:prstGeom>
+          <a:noFill/>
+          <a:ln/>
+        </p:spPr>
+        <p:txBody>
+          <a:bodyPr wrap="square" lIns="0" tIns="0" rIns="0" bIns="0" rtlCol="0" anchor="ctr"/>
+          <a:lstStyle/>
+          <a:p>
+            <a:pPr indent="0" marL="0">
+              <a:buNone/>
+            </a:pPr>
+            <a:r>
+              <a:rPr lang="en-US" sz="1100" b="1" spc="400" kern="0" dirty="0">
+                <a:solidFill>
+                  <a:srgbClr val="2F8F82"/>
+                </a:solidFill>
+                <a:latin typeface="Calibri" pitchFamily="34" charset="0"/>
+                <a:ea typeface="Calibri" pitchFamily="34" charset="-122"/>
+                <a:cs typeface="Calibri" pitchFamily="34" charset="-120"/>
+              </a:rPr>
+              <a:t>METHODOLOGY</a:t>
+            </a:r>
+            <a:endParaRPr lang="en-US" sz="1100" dirty="0"/>
+          </a:p>
+        </p:txBody>
+      </p:sp>
+      <p:sp>
+        <p:nvSpPr>
+          <p:cNvPr id="5" name="Text 3"/>
+          <p:cNvSpPr txBox="1"/>
+          <p:nvPr/>
+        </p:nvSpPr>
+        <p:spPr>
+          <a:xfrm>
+            <a:off x="502920" y="1078992"/>
             <a:ext cx="11155680" cy="731520"/>
           </a:xfrm>
           <a:prstGeom prst="rect">
@@ -6625,13 +8215,13 @@
       </p:sp>
       <p:sp>
         <p:nvSpPr>
-          <p:cNvPr id="5" name="Shape 3"/>
+          <p:cNvPr id="6" name="Shape 4"/>
           <p:cNvSpPr/>
           <p:nvPr/>
         </p:nvSpPr>
         <p:spPr>
           <a:xfrm>
-            <a:off x="457200" y="1874520"/>
+            <a:off x="457200" y="2103120"/>
             <a:ext cx="10789920" cy="3545312"/>
           </a:xfrm>
           <a:prstGeom prst="roundRect">
@@ -6659,7 +8249,7 @@
       </p:sp>
       <p:pic>
         <p:nvPicPr>
-          <p:cNvPr id="6" name="Image 0" descr="/home/claude/PDFSentry/deck/assets/arch.png">    </p:cNvPr>
+          <p:cNvPr id="7" name="Image 0" descr="/home/claude/PDFSentry/deck/assets/arch.png">    </p:cNvPr>
           <p:cNvPicPr>
             <a:picLocks noChangeAspect="1"/>
           </p:cNvPicPr>
@@ -6673,7 +8263,7 @@
         </p:blipFill>
         <p:spPr>
           <a:xfrm>
-            <a:off x="548640" y="1965960"/>
+            <a:off x="548640" y="2194560"/>
             <a:ext cx="10607040" cy="3362432"/>
           </a:xfrm>
           <a:prstGeom prst="rect">
@@ -6683,13 +8273,13 @@
       </p:pic>
       <p:sp>
         <p:nvSpPr>
-          <p:cNvPr id="7" name="Text 4"/>
-          <p:cNvSpPr txBox="1"/>
-          <p:nvPr/>
-        </p:nvSpPr>
-        <p:spPr>
-          <a:xfrm>
-            <a:off x="548640" y="5456408"/>
+          <p:cNvPr id="8" name="Text 5"/>
+          <p:cNvSpPr txBox="1"/>
+          <p:nvPr/>
+        </p:nvSpPr>
+        <p:spPr>
+          <a:xfrm>
+            <a:off x="548640" y="5685008"/>
             <a:ext cx="10607040" cy="365760"/>
           </a:xfrm>
           <a:prstGeom prst="rect">
@@ -6714,9 +8304,87 @@
                 <a:ea typeface="Calibri" pitchFamily="34" charset="-122"/>
                 <a:cs typeface="Calibri" pitchFamily="34" charset="-120"/>
               </a:rPr>
-              <a:t>The PDFSentry pipeline — static throughout; the fusion node combines structural reachability with the EMBER score.</a:t>
+              <a:t>The PDFSentry pipeline — static throughout; the fusion node combines structural reachability with the EMBER score into a typed, witnessed verdict.</a:t>
             </a:r>
             <a:endParaRPr lang="en-US" sz="1150" dirty="0"/>
+          </a:p>
+        </p:txBody>
+      </p:sp>
+      <p:sp>
+        <p:nvSpPr>
+          <p:cNvPr id="9" name="Text 6"/>
+          <p:cNvSpPr txBox="1"/>
+          <p:nvPr/>
+        </p:nvSpPr>
+        <p:spPr>
+          <a:xfrm>
+            <a:off x="502920" y="6528816"/>
+            <a:ext cx="6400800" cy="237744"/>
+          </a:xfrm>
+          <a:prstGeom prst="rect">
+            <a:avLst/>
+          </a:prstGeom>
+          <a:noFill/>
+          <a:ln/>
+        </p:spPr>
+        <p:txBody>
+          <a:bodyPr wrap="square" lIns="0" tIns="0" rIns="0" bIns="0" rtlCol="0" anchor="ctr"/>
+          <a:lstStyle/>
+          <a:p>
+            <a:pPr indent="0" marL="0">
+              <a:buNone/>
+            </a:pPr>
+            <a:r>
+              <a:rPr lang="en-US" sz="850" spc="150" kern="0" dirty="0">
+                <a:solidFill>
+                  <a:srgbClr val="9AA0A8"/>
+                </a:solidFill>
+                <a:latin typeface="Calibri" pitchFamily="34" charset="0"/>
+                <a:ea typeface="Calibri" pitchFamily="34" charset="-122"/>
+                <a:cs typeface="Calibri" pitchFamily="34" charset="-120"/>
+              </a:rPr>
+              <a:t>PDFSentry · Reachability over Recognition</a:t>
+            </a:r>
+            <a:endParaRPr lang="en-US" sz="850" dirty="0"/>
+          </a:p>
+        </p:txBody>
+      </p:sp>
+      <p:sp>
+        <p:nvSpPr>
+          <p:cNvPr id="10" name="Text 7"/>
+          <p:cNvSpPr txBox="1"/>
+          <p:nvPr/>
+        </p:nvSpPr>
+        <p:spPr>
+          <a:xfrm>
+            <a:off x="11323015" y="6510528"/>
+            <a:ext cx="457200" cy="256032"/>
+          </a:xfrm>
+          <a:prstGeom prst="rect">
+            <a:avLst/>
+          </a:prstGeom>
+          <a:noFill/>
+          <a:ln/>
+        </p:spPr>
+        <p:txBody>
+          <a:bodyPr wrap="square" lIns="0" tIns="0" rIns="0" bIns="0" rtlCol="0" anchor="ctr"/>
+          <a:lstStyle/>
+          <a:p>
+            <a:pPr algn="r" indent="0" marL="0">
+              <a:buNone/>
+            </a:pPr>
+            <a:r>
+              <a:rPr lang="en-US" sz="950" b="1" dirty="0">
+                <a:solidFill>
+                  <a:srgbClr val="6B7178"/>
+                </a:solidFill>
+                <a:latin typeface="Calibri" pitchFamily="34" charset="0"/>
+                <a:ea typeface="Calibri" pitchFamily="34" charset="-122"/>
+                <a:cs typeface="Calibri" pitchFamily="34" charset="-120"/>
+              </a:rPr>
+              <a:t>03</a:t>
+            </a:r>
+            <a:endParaRPr lang="en-US" sz="950" dirty="0"/>
           </a:p>
         </p:txBody>
       </p:sp>
@@ -6845,7 +8513,46 @@
         </p:nvSpPr>
         <p:spPr>
           <a:xfrm>
-            <a:off x="502920" y="822960"/>
+            <a:off x="512064" y="786384"/>
+            <a:ext cx="10058400" cy="256032"/>
+          </a:xfrm>
+          <a:prstGeom prst="rect">
+            <a:avLst/>
+          </a:prstGeom>
+          <a:noFill/>
+          <a:ln/>
+        </p:spPr>
+        <p:txBody>
+          <a:bodyPr wrap="square" lIns="0" tIns="0" rIns="0" bIns="0" rtlCol="0" anchor="ctr"/>
+          <a:lstStyle/>
+          <a:p>
+            <a:pPr indent="0" marL="0">
+              <a:buNone/>
+            </a:pPr>
+            <a:r>
+              <a:rPr lang="en-US" sz="1100" b="1" spc="400" kern="0" dirty="0">
+                <a:solidFill>
+                  <a:srgbClr val="2F8F82"/>
+                </a:solidFill>
+                <a:latin typeface="Calibri" pitchFamily="34" charset="0"/>
+                <a:ea typeface="Calibri" pitchFamily="34" charset="-122"/>
+                <a:cs typeface="Calibri" pitchFamily="34" charset="-120"/>
+              </a:rPr>
+              <a:t>TAXONOMY</a:t>
+            </a:r>
+            <a:endParaRPr lang="en-US" sz="1100" dirty="0"/>
+          </a:p>
+        </p:txBody>
+      </p:sp>
+      <p:sp>
+        <p:nvSpPr>
+          <p:cNvPr id="5" name="Text 3"/>
+          <p:cNvSpPr txBox="1"/>
+          <p:nvPr/>
+        </p:nvSpPr>
+        <p:spPr>
+          <a:xfrm>
+            <a:off x="502920" y="1078992"/>
             <a:ext cx="11155680" cy="731520"/>
           </a:xfrm>
           <a:prstGeom prst="rect">
@@ -6870,7 +8577,7 @@
                 <a:ea typeface="Arial Black" pitchFamily="34" charset="-122"/>
                 <a:cs typeface="Arial Black" pitchFamily="34" charset="-120"/>
               </a:rPr>
-              <a:t>Three pillars of the result</a:t>
+              <a:t>Reachability verdict taxonomy</a:t>
             </a:r>
             <a:endParaRPr lang="en-US" sz="3200" dirty="0"/>
           </a:p>
@@ -6878,13 +8585,13 @@
       </p:sp>
       <p:sp>
         <p:nvSpPr>
-          <p:cNvPr id="5" name="Text 3"/>
-          <p:cNvSpPr txBox="1"/>
-          <p:nvPr/>
-        </p:nvSpPr>
-        <p:spPr>
-          <a:xfrm>
-            <a:off x="548640" y="1737360"/>
+          <p:cNvPr id="6" name="Text 4"/>
+          <p:cNvSpPr txBox="1"/>
+          <p:nvPr/>
+        </p:nvSpPr>
+        <p:spPr>
+          <a:xfrm>
+            <a:off x="548640" y="1965960"/>
             <a:ext cx="640080" cy="457200"/>
           </a:xfrm>
           <a:prstGeom prst="rect">
@@ -6917,28 +8624,28 @@
       </p:sp>
       <p:sp>
         <p:nvSpPr>
-          <p:cNvPr id="6" name="Text 4"/>
-          <p:cNvSpPr txBox="1"/>
-          <p:nvPr/>
-        </p:nvSpPr>
-        <p:spPr>
-          <a:xfrm>
-            <a:off x="1234440" y="1719072"/>
-            <a:ext cx="6080760" cy="841248"/>
-          </a:xfrm>
-          <a:prstGeom prst="rect">
-            <a:avLst/>
-          </a:prstGeom>
-          <a:noFill/>
-          <a:ln/>
-        </p:spPr>
-        <p:txBody>
-          <a:bodyPr wrap="square" lIns="0" tIns="0" rIns="0" bIns="0" rtlCol="0" anchor="ctr"/>
+          <p:cNvPr id="7" name="Text 5"/>
+          <p:cNvSpPr txBox="1"/>
+          <p:nvPr/>
+        </p:nvSpPr>
+        <p:spPr>
+          <a:xfrm>
+            <a:off x="1234440" y="1947672"/>
+            <a:ext cx="6080760" cy="868680"/>
+          </a:xfrm>
+          <a:prstGeom prst="rect">
+            <a:avLst/>
+          </a:prstGeom>
+          <a:noFill/>
+          <a:ln/>
+        </p:spPr>
+        <p:txBody>
+          <a:bodyPr wrap="square" lIns="0" tIns="0" rIns="0" bIns="0" rtlCol="0" anchor="t"/>
           <a:lstStyle/>
           <a:p>
             <a:pPr indent="0" marL="0">
               <a:lnSpc>
-                <a:spcPct val="105000"/>
+                <a:spcPct val="106000"/>
               </a:lnSpc>
               <a:buNone/>
             </a:pPr>
@@ -6951,11 +8658,11 @@
                 <a:ea typeface="Calibri" pitchFamily="34" charset="-122"/>
                 <a:cs typeface="Calibri" pitchFamily="34" charset="-120"/>
               </a:rPr>
-              <a:t>01 · Detection   </a:t>
+              <a:t>ABSENT   </a:t>
             </a:r>
             <a:pPr indent="0" marL="0">
               <a:lnSpc>
-                <a:spcPct val="105000"/>
+                <a:spcPct val="106000"/>
               </a:lnSpc>
               <a:buNone/>
             </a:pPr>
@@ -6968,7 +8675,7 @@
                 <a:ea typeface="Calibri" pitchFamily="34" charset="-122"/>
                 <a:cs typeface="Calibri" pitchFamily="34" charset="-120"/>
               </a:rPr>
-              <a:t>Reachability over recognition — fusion lifts controlled ROC-AUC 0.649 → 0.998.</a:t>
+              <a:t>No dangerous capability present in the document at all.</a:t>
             </a:r>
             <a:endParaRPr lang="en-US" sz="1500" dirty="0"/>
           </a:p>
@@ -6976,13 +8683,13 @@
       </p:sp>
       <p:sp>
         <p:nvSpPr>
-          <p:cNvPr id="7" name="Text 5"/>
-          <p:cNvSpPr txBox="1"/>
-          <p:nvPr/>
-        </p:nvSpPr>
-        <p:spPr>
-          <a:xfrm>
-            <a:off x="548640" y="2578608"/>
+          <p:cNvPr id="8" name="Text 6"/>
+          <p:cNvSpPr txBox="1"/>
+          <p:nvPr/>
+        </p:nvSpPr>
+        <p:spPr>
+          <a:xfrm>
+            <a:off x="548640" y="2834640"/>
             <a:ext cx="640080" cy="457200"/>
           </a:xfrm>
           <a:prstGeom prst="rect">
@@ -7015,28 +8722,28 @@
       </p:sp>
       <p:sp>
         <p:nvSpPr>
-          <p:cNvPr id="8" name="Text 6"/>
-          <p:cNvSpPr txBox="1"/>
-          <p:nvPr/>
-        </p:nvSpPr>
-        <p:spPr>
-          <a:xfrm>
-            <a:off x="1234440" y="2560320"/>
-            <a:ext cx="6080760" cy="841248"/>
-          </a:xfrm>
-          <a:prstGeom prst="rect">
-            <a:avLst/>
-          </a:prstGeom>
-          <a:noFill/>
-          <a:ln/>
-        </p:spPr>
-        <p:txBody>
-          <a:bodyPr wrap="square" lIns="0" tIns="0" rIns="0" bIns="0" rtlCol="0" anchor="ctr"/>
+          <p:cNvPr id="9" name="Text 7"/>
+          <p:cNvSpPr txBox="1"/>
+          <p:nvPr/>
+        </p:nvSpPr>
+        <p:spPr>
+          <a:xfrm>
+            <a:off x="1234440" y="2816352"/>
+            <a:ext cx="6080760" cy="868680"/>
+          </a:xfrm>
+          <a:prstGeom prst="rect">
+            <a:avLst/>
+          </a:prstGeom>
+          <a:noFill/>
+          <a:ln/>
+        </p:spPr>
+        <p:txBody>
+          <a:bodyPr wrap="square" lIns="0" tIns="0" rIns="0" bIns="0" rtlCol="0" anchor="t"/>
           <a:lstStyle/>
           <a:p>
             <a:pPr indent="0" marL="0">
               <a:lnSpc>
-                <a:spcPct val="105000"/>
+                <a:spcPct val="106000"/>
               </a:lnSpc>
               <a:buNone/>
             </a:pPr>
@@ -7049,11 +8756,11 @@
                 <a:ea typeface="Calibri" pitchFamily="34" charset="-122"/>
                 <a:cs typeface="Calibri" pitchFamily="34" charset="-120"/>
               </a:rPr>
-              <a:t>02 · Robustness   </a:t>
+              <a:t>PRESENT_DORMANT   </a:t>
             </a:r>
             <a:pPr indent="0" marL="0">
               <a:lnSpc>
-                <a:spcPct val="105000"/>
+                <a:spcPct val="106000"/>
               </a:lnSpc>
               <a:buNone/>
             </a:pPr>
@@ -7066,7 +8773,7 @@
                 <a:ea typeface="Calibri" pitchFamily="34" charset="-122"/>
                 <a:cs typeface="Calibri" pitchFamily="34" charset="-120"/>
               </a:rPr>
-              <a:t>Semantic stability — verdict invariant to lossless obfuscation (SSI 1.000 vs 0.216).</a:t>
+              <a:t>A dangerous capability exists but no trigger can reach it — inert.</a:t>
             </a:r>
             <a:endParaRPr lang="en-US" sz="1500" dirty="0"/>
           </a:p>
@@ -7074,13 +8781,13 @@
       </p:sp>
       <p:sp>
         <p:nvSpPr>
-          <p:cNvPr id="9" name="Text 7"/>
-          <p:cNvSpPr txBox="1"/>
-          <p:nvPr/>
-        </p:nvSpPr>
-        <p:spPr>
-          <a:xfrm>
-            <a:off x="548640" y="3419856"/>
+          <p:cNvPr id="10" name="Text 8"/>
+          <p:cNvSpPr txBox="1"/>
+          <p:nvPr/>
+        </p:nvSpPr>
+        <p:spPr>
+          <a:xfrm>
+            <a:off x="548640" y="3703320"/>
             <a:ext cx="640080" cy="457200"/>
           </a:xfrm>
           <a:prstGeom prst="rect">
@@ -7113,14 +8820,73 @@
       </p:sp>
       <p:sp>
         <p:nvSpPr>
-          <p:cNvPr id="10" name="Text 8"/>
-          <p:cNvSpPr txBox="1"/>
-          <p:nvPr/>
-        </p:nvSpPr>
-        <p:spPr>
-          <a:xfrm>
-            <a:off x="1234440" y="3401568"/>
-            <a:ext cx="6080760" cy="841248"/>
+          <p:cNvPr id="11" name="Text 9"/>
+          <p:cNvSpPr txBox="1"/>
+          <p:nvPr/>
+        </p:nvSpPr>
+        <p:spPr>
+          <a:xfrm>
+            <a:off x="1234440" y="3685032"/>
+            <a:ext cx="6080760" cy="868680"/>
+          </a:xfrm>
+          <a:prstGeom prst="rect">
+            <a:avLst/>
+          </a:prstGeom>
+          <a:noFill/>
+          <a:ln/>
+        </p:spPr>
+        <p:txBody>
+          <a:bodyPr wrap="square" lIns="0" tIns="0" rIns="0" bIns="0" rtlCol="0" anchor="t"/>
+          <a:lstStyle/>
+          <a:p>
+            <a:pPr indent="0" marL="0">
+              <a:lnSpc>
+                <a:spcPct val="106000"/>
+              </a:lnSpc>
+              <a:buNone/>
+            </a:pPr>
+            <a:r>
+              <a:rPr lang="en-US" sz="1500" b="1" dirty="0">
+                <a:solidFill>
+                  <a:srgbClr val="1B1E22"/>
+                </a:solidFill>
+                <a:latin typeface="Calibri" pitchFamily="34" charset="0"/>
+                <a:ea typeface="Calibri" pitchFamily="34" charset="-122"/>
+                <a:cs typeface="Calibri" pitchFamily="34" charset="-120"/>
+              </a:rPr>
+              <a:t>ACTIVE_ONINTERACT   </a:t>
+            </a:r>
+            <a:pPr indent="0" marL="0">
+              <a:lnSpc>
+                <a:spcPct val="106000"/>
+              </a:lnSpc>
+              <a:buNone/>
+            </a:pPr>
+            <a:r>
+              <a:rPr lang="en-US" sz="1500" dirty="0">
+                <a:solidFill>
+                  <a:srgbClr val="3A3F46"/>
+                </a:solidFill>
+                <a:latin typeface="Calibri" pitchFamily="34" charset="0"/>
+                <a:ea typeface="Calibri" pitchFamily="34" charset="-122"/>
+                <a:cs typeface="Calibri" pitchFamily="34" charset="-120"/>
+              </a:rPr>
+              <a:t>Reachable only on user interaction (e.g. a clickable link) — a capability, not an auto-threat.</a:t>
+            </a:r>
+            <a:endParaRPr lang="en-US" sz="1500" dirty="0"/>
+          </a:p>
+        </p:txBody>
+      </p:sp>
+      <p:sp>
+        <p:nvSpPr>
+          <p:cNvPr id="12" name="Text 10"/>
+          <p:cNvSpPr txBox="1"/>
+          <p:nvPr/>
+        </p:nvSpPr>
+        <p:spPr>
+          <a:xfrm>
+            <a:off x="548640" y="4572000"/>
+            <a:ext cx="640080" cy="457200"/>
           </a:xfrm>
           <a:prstGeom prst="rect">
             <a:avLst/>
@@ -7133,8 +8899,47 @@
           <a:lstStyle/>
           <a:p>
             <a:pPr indent="0" marL="0">
+              <a:buNone/>
+            </a:pPr>
+            <a:r>
+              <a:rPr lang="en-US" sz="1900" dirty="0">
+                <a:solidFill>
+                  <a:srgbClr val="2F8F82"/>
+                </a:solidFill>
+                <a:latin typeface="Arial Black" pitchFamily="34" charset="0"/>
+                <a:ea typeface="Arial Black" pitchFamily="34" charset="-122"/>
+                <a:cs typeface="Arial Black" pitchFamily="34" charset="-120"/>
+              </a:rPr>
+              <a:t>04</a:t>
+            </a:r>
+            <a:endParaRPr lang="en-US" sz="1900" dirty="0"/>
+          </a:p>
+        </p:txBody>
+      </p:sp>
+      <p:sp>
+        <p:nvSpPr>
+          <p:cNvPr id="13" name="Text 11"/>
+          <p:cNvSpPr txBox="1"/>
+          <p:nvPr/>
+        </p:nvSpPr>
+        <p:spPr>
+          <a:xfrm>
+            <a:off x="1234440" y="4553712"/>
+            <a:ext cx="6080760" cy="868680"/>
+          </a:xfrm>
+          <a:prstGeom prst="rect">
+            <a:avLst/>
+          </a:prstGeom>
+          <a:noFill/>
+          <a:ln/>
+        </p:spPr>
+        <p:txBody>
+          <a:bodyPr wrap="square" lIns="0" tIns="0" rIns="0" bIns="0" rtlCol="0" anchor="t"/>
+          <a:lstStyle/>
+          <a:p>
+            <a:pPr indent="0" marL="0">
               <a:lnSpc>
-                <a:spcPct val="105000"/>
+                <a:spcPct val="106000"/>
               </a:lnSpc>
               <a:buNone/>
             </a:pPr>
@@ -7147,11 +8952,11 @@
                 <a:ea typeface="Calibri" pitchFamily="34" charset="-122"/>
                 <a:cs typeface="Calibri" pitchFamily="34" charset="-120"/>
               </a:rPr>
-              <a:t>03 · Assurance   </a:t>
+              <a:t>ACTIVE_ONOPEN   </a:t>
             </a:r>
             <a:pPr indent="0" marL="0">
               <a:lnSpc>
-                <a:spcPct val="105000"/>
+                <a:spcPct val="106000"/>
               </a:lnSpc>
               <a:buNone/>
             </a:pPr>
@@ -7164,7 +8969,7 @@
                 <a:ea typeface="Calibri" pitchFamily="34" charset="-122"/>
                 <a:cs typeface="Calibri" pitchFamily="34" charset="-120"/>
               </a:rPr>
-              <a:t>Verifiable verdicts — 0/285 false positives, 1-hop witnesses, deterministic, training-free.</a:t>
+              <a:t>A dangerous action auto-fires on open — the threat class we are built to catch.</a:t>
             </a:r>
             <a:endParaRPr lang="en-US" sz="1500" dirty="0"/>
           </a:p>
@@ -7172,18 +8977,18 @@
       </p:sp>
       <p:sp>
         <p:nvSpPr>
-          <p:cNvPr id="11" name="Shape 9"/>
+          <p:cNvPr id="14" name="Shape 12"/>
           <p:cNvSpPr/>
           <p:nvPr/>
         </p:nvSpPr>
         <p:spPr>
           <a:xfrm>
-            <a:off x="8366760" y="1737360"/>
-            <a:ext cx="3291840" cy="2926080"/>
+            <a:off x="8366760" y="1965960"/>
+            <a:ext cx="3291840" cy="4206240"/>
           </a:xfrm>
           <a:prstGeom prst="roundRect">
             <a:avLst>
-              <a:gd name="adj" fmla="val 2188"/>
+              <a:gd name="adj" fmla="val 1944"/>
             </a:avLst>
           </a:prstGeom>
           <a:solidFill>
@@ -7206,13 +9011,13 @@
       </p:sp>
       <p:sp>
         <p:nvSpPr>
-          <p:cNvPr id="12" name="Text 10"/>
-          <p:cNvSpPr txBox="1"/>
-          <p:nvPr/>
-        </p:nvSpPr>
-        <p:spPr>
-          <a:xfrm>
-            <a:off x="8641080" y="1965960"/>
+          <p:cNvPr id="15" name="Text 13"/>
+          <p:cNvSpPr txBox="1"/>
+          <p:nvPr/>
+        </p:nvSpPr>
+        <p:spPr>
+          <a:xfrm>
+            <a:off x="8641080" y="2194560"/>
             <a:ext cx="2834640" cy="274320"/>
           </a:xfrm>
           <a:prstGeom prst="rect">
@@ -7237,7 +9042,7 @@
                 <a:ea typeface="Calibri" pitchFamily="34" charset="-122"/>
                 <a:cs typeface="Calibri" pitchFamily="34" charset="-120"/>
               </a:rPr>
-              <a:t>THE ARC</a:t>
+              <a:t>CAPABILITY ≠ INTENT</a:t>
             </a:r>
             <a:endParaRPr lang="en-US" sz="1100" dirty="0"/>
           </a:p>
@@ -7245,14 +9050,14 @@
       </p:sp>
       <p:sp>
         <p:nvSpPr>
-          <p:cNvPr id="13" name="Text 11"/>
-          <p:cNvSpPr txBox="1"/>
-          <p:nvPr/>
-        </p:nvSpPr>
-        <p:spPr>
-          <a:xfrm>
-            <a:off x="8641080" y="2331720"/>
-            <a:ext cx="2788920" cy="2103120"/>
+          <p:cNvPr id="16" name="Text 14"/>
+          <p:cNvSpPr txBox="1"/>
+          <p:nvPr/>
+        </p:nvSpPr>
+        <p:spPr>
+          <a:xfrm>
+            <a:off x="8641080" y="2560320"/>
+            <a:ext cx="2788920" cy="3383280"/>
           </a:xfrm>
           <a:prstGeom prst="rect">
             <a:avLst/>
@@ -7279,9 +9084,87 @@
                 <a:ea typeface="Calibri" pitchFamily="34" charset="-122"/>
                 <a:cs typeface="Calibri" pitchFamily="34" charset="-120"/>
               </a:rPr>
-              <a:t>Not one metric, but a complete argument: it works, it holds under attack, and you can verify it by hand.</a:t>
+              <a:t>The four states are what let PDFSentry separate a benign clickable link from a weaponised auto-run payload — and report exactly which it found.</a:t>
             </a:r>
             <a:endParaRPr lang="en-US" sz="1400" dirty="0"/>
+          </a:p>
+        </p:txBody>
+      </p:sp>
+      <p:sp>
+        <p:nvSpPr>
+          <p:cNvPr id="17" name="Text 15"/>
+          <p:cNvSpPr txBox="1"/>
+          <p:nvPr/>
+        </p:nvSpPr>
+        <p:spPr>
+          <a:xfrm>
+            <a:off x="502920" y="6528816"/>
+            <a:ext cx="6400800" cy="237744"/>
+          </a:xfrm>
+          <a:prstGeom prst="rect">
+            <a:avLst/>
+          </a:prstGeom>
+          <a:noFill/>
+          <a:ln/>
+        </p:spPr>
+        <p:txBody>
+          <a:bodyPr wrap="square" lIns="0" tIns="0" rIns="0" bIns="0" rtlCol="0" anchor="ctr"/>
+          <a:lstStyle/>
+          <a:p>
+            <a:pPr indent="0" marL="0">
+              <a:buNone/>
+            </a:pPr>
+            <a:r>
+              <a:rPr lang="en-US" sz="850" spc="150" kern="0" dirty="0">
+                <a:solidFill>
+                  <a:srgbClr val="9AA0A8"/>
+                </a:solidFill>
+                <a:latin typeface="Calibri" pitchFamily="34" charset="0"/>
+                <a:ea typeface="Calibri" pitchFamily="34" charset="-122"/>
+                <a:cs typeface="Calibri" pitchFamily="34" charset="-120"/>
+              </a:rPr>
+              <a:t>PDFSentry · Reachability over Recognition</a:t>
+            </a:r>
+            <a:endParaRPr lang="en-US" sz="850" dirty="0"/>
+          </a:p>
+        </p:txBody>
+      </p:sp>
+      <p:sp>
+        <p:nvSpPr>
+          <p:cNvPr id="18" name="Text 16"/>
+          <p:cNvSpPr txBox="1"/>
+          <p:nvPr/>
+        </p:nvSpPr>
+        <p:spPr>
+          <a:xfrm>
+            <a:off x="11323015" y="6510528"/>
+            <a:ext cx="457200" cy="256032"/>
+          </a:xfrm>
+          <a:prstGeom prst="rect">
+            <a:avLst/>
+          </a:prstGeom>
+          <a:noFill/>
+          <a:ln/>
+        </p:spPr>
+        <p:txBody>
+          <a:bodyPr wrap="square" lIns="0" tIns="0" rIns="0" bIns="0" rtlCol="0" anchor="ctr"/>
+          <a:lstStyle/>
+          <a:p>
+            <a:pPr algn="r" indent="0" marL="0">
+              <a:buNone/>
+            </a:pPr>
+            <a:r>
+              <a:rPr lang="en-US" sz="950" b="1" dirty="0">
+                <a:solidFill>
+                  <a:srgbClr val="6B7178"/>
+                </a:solidFill>
+                <a:latin typeface="Calibri" pitchFamily="34" charset="0"/>
+                <a:ea typeface="Calibri" pitchFamily="34" charset="-122"/>
+                <a:cs typeface="Calibri" pitchFamily="34" charset="-120"/>
+              </a:rPr>
+              <a:t>04</a:t>
+            </a:r>
+            <a:endParaRPr lang="en-US" sz="950" dirty="0"/>
           </a:p>
         </p:txBody>
       </p:sp>
@@ -7410,7 +9293,46 @@
         </p:nvSpPr>
         <p:spPr>
           <a:xfrm>
-            <a:off x="502920" y="822960"/>
+            <a:off x="512064" y="786384"/>
+            <a:ext cx="10058400" cy="256032"/>
+          </a:xfrm>
+          <a:prstGeom prst="rect">
+            <a:avLst/>
+          </a:prstGeom>
+          <a:noFill/>
+          <a:ln/>
+        </p:spPr>
+        <p:txBody>
+          <a:bodyPr wrap="square" lIns="0" tIns="0" rIns="0" bIns="0" rtlCol="0" anchor="ctr"/>
+          <a:lstStyle/>
+          <a:p>
+            <a:pPr indent="0" marL="0">
+              <a:buNone/>
+            </a:pPr>
+            <a:r>
+              <a:rPr lang="en-US" sz="1100" b="1" spc="400" kern="0" dirty="0">
+                <a:solidFill>
+                  <a:srgbClr val="2F8F82"/>
+                </a:solidFill>
+                <a:latin typeface="Calibri" pitchFamily="34" charset="0"/>
+                <a:ea typeface="Calibri" pitchFamily="34" charset="-122"/>
+                <a:cs typeface="Calibri" pitchFamily="34" charset="-120"/>
+              </a:rPr>
+              <a:t>RESULTS OVERVIEW</a:t>
+            </a:r>
+            <a:endParaRPr lang="en-US" sz="1100" dirty="0"/>
+          </a:p>
+        </p:txBody>
+      </p:sp>
+      <p:sp>
+        <p:nvSpPr>
+          <p:cNvPr id="5" name="Text 3"/>
+          <p:cNvSpPr txBox="1"/>
+          <p:nvPr/>
+        </p:nvSpPr>
+        <p:spPr>
+          <a:xfrm>
+            <a:off x="502920" y="1078992"/>
             <a:ext cx="11155680" cy="731520"/>
           </a:xfrm>
           <a:prstGeom prst="rect">
@@ -7427,7 +9349,7 @@
               <a:buNone/>
             </a:pPr>
             <a:r>
-              <a:rPr lang="en-US" sz="3000" dirty="0">
+              <a:rPr lang="en-US" sz="3200" dirty="0">
                 <a:solidFill>
                   <a:srgbClr val="1B1E22"/>
                 </a:solidFill>
@@ -7435,22 +9357,22 @@
                 <a:ea typeface="Arial Black" pitchFamily="34" charset="-122"/>
                 <a:cs typeface="Arial Black" pitchFamily="34" charset="-120"/>
               </a:rPr>
-              <a:t>Pillar 01 · Detection</a:t>
-            </a:r>
-            <a:endParaRPr lang="en-US" sz="3000" dirty="0"/>
-          </a:p>
-        </p:txBody>
-      </p:sp>
-      <p:sp>
-        <p:nvSpPr>
-          <p:cNvPr id="5" name="Text 3"/>
-          <p:cNvSpPr txBox="1"/>
-          <p:nvPr/>
-        </p:nvSpPr>
-        <p:spPr>
-          <a:xfrm>
-            <a:off x="548640" y="1536192"/>
-            <a:ext cx="10881360" cy="548640"/>
+              <a:t>Three pillars of the result</a:t>
+            </a:r>
+            <a:endParaRPr lang="en-US" sz="3200" dirty="0"/>
+          </a:p>
+        </p:txBody>
+      </p:sp>
+      <p:sp>
+        <p:nvSpPr>
+          <p:cNvPr id="6" name="Text 4"/>
+          <p:cNvSpPr txBox="1"/>
+          <p:nvPr/>
+        </p:nvSpPr>
+        <p:spPr>
+          <a:xfrm>
+            <a:off x="548640" y="1965960"/>
+            <a:ext cx="640080" cy="457200"/>
           </a:xfrm>
           <a:prstGeom prst="rect">
             <a:avLst/>
@@ -7463,68 +9385,10 @@
           <a:lstStyle/>
           <a:p>
             <a:pPr indent="0" marL="0">
-              <a:lnSpc>
-                <a:spcPct val="105000"/>
-              </a:lnSpc>
-              <a:buNone/>
-            </a:pPr>
-            <a:r>
-              <a:rPr lang="en-US" sz="1500" dirty="0">
-                <a:solidFill>
-                  <a:srgbClr val="3A3F46"/>
-                </a:solidFill>
-                <a:latin typeface="Calibri" pitchFamily="34" charset="0"/>
-                <a:ea typeface="Calibri" pitchFamily="34" charset="-122"/>
-                <a:cs typeface="Calibri" pitchFamily="34" charset="-120"/>
-              </a:rPr>
-              <a:t>On controlled structural evasions, EMBER alone is near-blind; adding reachability makes it near-perfect.</a:t>
-            </a:r>
-            <a:endParaRPr lang="en-US" sz="1500" dirty="0"/>
-          </a:p>
-        </p:txBody>
-      </p:sp>
-      <p:graphicFrame>
-        <p:nvGraphicFramePr>
-          <p:cNvPr id="6" name="Chart 0" descr=""/>
-          <p:cNvGraphicFramePr/>
-          <p:nvPr/>
-        </p:nvGraphicFramePr>
-        <p:xfrm>
-          <a:off x="502920" y="2286000"/>
-          <a:ext cx="7040880" cy="4114800"/>
-        </p:xfrm>
-        <a:graphic xmlns:a="http://schemas.openxmlformats.org/drawingml/2006/main">
-          <a:graphicData uri="http://schemas.openxmlformats.org/drawingml/2006/chart">
-            <c:chart xmlns:c="http://schemas.openxmlformats.org/drawingml/2006/chart" r:id="rId2"/>
-          </a:graphicData>
-        </a:graphic>
-      </p:graphicFrame>
-      <p:sp>
-        <p:nvSpPr>
-          <p:cNvPr id="7" name="Text 4"/>
-          <p:cNvSpPr txBox="1"/>
-          <p:nvPr/>
-        </p:nvSpPr>
-        <p:spPr>
-          <a:xfrm>
-            <a:off x="7909560" y="2423160"/>
-            <a:ext cx="3931920" cy="822960"/>
-          </a:xfrm>
-          <a:prstGeom prst="rect">
-            <a:avLst/>
-          </a:prstGeom>
-          <a:noFill/>
-          <a:ln/>
-        </p:spPr>
-        <p:txBody>
-          <a:bodyPr wrap="square" lIns="0" tIns="0" rIns="0" bIns="0" rtlCol="0" anchor="ctr"/>
-          <a:lstStyle/>
-          <a:p>
-            <a:pPr indent="0" marL="0">
-              <a:buNone/>
-            </a:pPr>
-            <a:r>
-              <a:rPr lang="en-US" sz="4200" dirty="0">
+              <a:buNone/>
+            </a:pPr>
+            <a:r>
+              <a:rPr lang="en-US" sz="1900" dirty="0">
                 <a:solidFill>
                   <a:srgbClr val="2F8F82"/>
                 </a:solidFill>
@@ -7532,22 +9396,81 @@
                 <a:ea typeface="Arial Black" pitchFamily="34" charset="-122"/>
                 <a:cs typeface="Arial Black" pitchFamily="34" charset="-120"/>
               </a:rPr>
-              <a:t>+0.349</a:t>
-            </a:r>
-            <a:endParaRPr lang="en-US" sz="4200" dirty="0"/>
-          </a:p>
-        </p:txBody>
-      </p:sp>
-      <p:sp>
-        <p:nvSpPr>
-          <p:cNvPr id="8" name="Text 5"/>
-          <p:cNvSpPr txBox="1"/>
-          <p:nvPr/>
-        </p:nvSpPr>
-        <p:spPr>
-          <a:xfrm>
-            <a:off x="7909560" y="3209544"/>
-            <a:ext cx="3931920" cy="640080"/>
+              <a:t>01</a:t>
+            </a:r>
+            <a:endParaRPr lang="en-US" sz="1900" dirty="0"/>
+          </a:p>
+        </p:txBody>
+      </p:sp>
+      <p:sp>
+        <p:nvSpPr>
+          <p:cNvPr id="7" name="Text 5"/>
+          <p:cNvSpPr txBox="1"/>
+          <p:nvPr/>
+        </p:nvSpPr>
+        <p:spPr>
+          <a:xfrm>
+            <a:off x="1234440" y="1947672"/>
+            <a:ext cx="6080760" cy="868680"/>
+          </a:xfrm>
+          <a:prstGeom prst="rect">
+            <a:avLst/>
+          </a:prstGeom>
+          <a:noFill/>
+          <a:ln/>
+        </p:spPr>
+        <p:txBody>
+          <a:bodyPr wrap="square" lIns="0" tIns="0" rIns="0" bIns="0" rtlCol="0" anchor="t"/>
+          <a:lstStyle/>
+          <a:p>
+            <a:pPr indent="0" marL="0">
+              <a:lnSpc>
+                <a:spcPct val="106000"/>
+              </a:lnSpc>
+              <a:buNone/>
+            </a:pPr>
+            <a:r>
+              <a:rPr lang="en-US" sz="1500" b="1" dirty="0">
+                <a:solidFill>
+                  <a:srgbClr val="1B1E22"/>
+                </a:solidFill>
+                <a:latin typeface="Calibri" pitchFamily="34" charset="0"/>
+                <a:ea typeface="Calibri" pitchFamily="34" charset="-122"/>
+                <a:cs typeface="Calibri" pitchFamily="34" charset="-120"/>
+              </a:rPr>
+              <a:t>01 · Detection   </a:t>
+            </a:r>
+            <a:pPr indent="0" marL="0">
+              <a:lnSpc>
+                <a:spcPct val="106000"/>
+              </a:lnSpc>
+              <a:buNone/>
+            </a:pPr>
+            <a:r>
+              <a:rPr lang="en-US" sz="1500" dirty="0">
+                <a:solidFill>
+                  <a:srgbClr val="3A3F46"/>
+                </a:solidFill>
+                <a:latin typeface="Calibri" pitchFamily="34" charset="0"/>
+                <a:ea typeface="Calibri" pitchFamily="34" charset="-122"/>
+                <a:cs typeface="Calibri" pitchFamily="34" charset="-120"/>
+              </a:rPr>
+              <a:t>Reachability over recognition — fusion lifts controlled ROC-AUC 0.649 → 0.998.</a:t>
+            </a:r>
+            <a:endParaRPr lang="en-US" sz="1500" dirty="0"/>
+          </a:p>
+        </p:txBody>
+      </p:sp>
+      <p:sp>
+        <p:nvSpPr>
+          <p:cNvPr id="8" name="Text 6"/>
+          <p:cNvSpPr txBox="1"/>
+          <p:nvPr/>
+        </p:nvSpPr>
+        <p:spPr>
+          <a:xfrm>
+            <a:off x="548640" y="2834640"/>
+            <a:ext cx="640080" cy="457200"/>
           </a:xfrm>
           <a:prstGeom prst="rect">
             <a:avLst/>
@@ -7560,75 +9483,92 @@
           <a:lstStyle/>
           <a:p>
             <a:pPr indent="0" marL="0">
-              <a:lnSpc>
-                <a:spcPct val="105000"/>
-              </a:lnSpc>
-              <a:buNone/>
-            </a:pPr>
-            <a:r>
-              <a:rPr lang="en-US" sz="1250" dirty="0">
-                <a:solidFill>
-                  <a:srgbClr val="6B7178"/>
-                </a:solidFill>
-                <a:latin typeface="Calibri" pitchFamily="34" charset="0"/>
-                <a:ea typeface="Calibri" pitchFamily="34" charset="-122"/>
-                <a:cs typeface="Calibri" pitchFamily="34" charset="-120"/>
-              </a:rPr>
-              <a:t>ROC-AUC from the structural signal</a:t>
-            </a:r>
-            <a:endParaRPr lang="en-US" sz="1250" dirty="0"/>
-          </a:p>
-        </p:txBody>
-      </p:sp>
-      <p:sp>
-        <p:nvSpPr>
-          <p:cNvPr id="9" name="Text 6"/>
-          <p:cNvSpPr txBox="1"/>
-          <p:nvPr/>
-        </p:nvSpPr>
-        <p:spPr>
-          <a:xfrm>
-            <a:off x="7909560" y="3886200"/>
-            <a:ext cx="3931920" cy="822960"/>
-          </a:xfrm>
-          <a:prstGeom prst="rect">
-            <a:avLst/>
-          </a:prstGeom>
-          <a:noFill/>
-          <a:ln/>
-        </p:spPr>
-        <p:txBody>
-          <a:bodyPr wrap="square" lIns="0" tIns="0" rIns="0" bIns="0" rtlCol="0" anchor="ctr"/>
-          <a:lstStyle/>
-          <a:p>
-            <a:pPr indent="0" marL="0">
-              <a:buNone/>
-            </a:pPr>
-            <a:r>
-              <a:rPr lang="en-US" sz="4200" dirty="0">
-                <a:solidFill>
-                  <a:srgbClr val="1B1E22"/>
+              <a:buNone/>
+            </a:pPr>
+            <a:r>
+              <a:rPr lang="en-US" sz="1900" dirty="0">
+                <a:solidFill>
+                  <a:srgbClr val="2F8F82"/>
                 </a:solidFill>
                 <a:latin typeface="Arial Black" pitchFamily="34" charset="0"/>
                 <a:ea typeface="Arial Black" pitchFamily="34" charset="-122"/>
                 <a:cs typeface="Arial Black" pitchFamily="34" charset="-120"/>
               </a:rPr>
-              <a:t>100%</a:t>
-            </a:r>
-            <a:endParaRPr lang="en-US" sz="4200" dirty="0"/>
-          </a:p>
-        </p:txBody>
-      </p:sp>
-      <p:sp>
-        <p:nvSpPr>
-          <p:cNvPr id="10" name="Text 7"/>
-          <p:cNvSpPr txBox="1"/>
-          <p:nvPr/>
-        </p:nvSpPr>
-        <p:spPr>
-          <a:xfrm>
-            <a:off x="7909560" y="4672584"/>
-            <a:ext cx="3931920" cy="640080"/>
+              <a:t>02</a:t>
+            </a:r>
+            <a:endParaRPr lang="en-US" sz="1900" dirty="0"/>
+          </a:p>
+        </p:txBody>
+      </p:sp>
+      <p:sp>
+        <p:nvSpPr>
+          <p:cNvPr id="9" name="Text 7"/>
+          <p:cNvSpPr txBox="1"/>
+          <p:nvPr/>
+        </p:nvSpPr>
+        <p:spPr>
+          <a:xfrm>
+            <a:off x="1234440" y="2816352"/>
+            <a:ext cx="6080760" cy="868680"/>
+          </a:xfrm>
+          <a:prstGeom prst="rect">
+            <a:avLst/>
+          </a:prstGeom>
+          <a:noFill/>
+          <a:ln/>
+        </p:spPr>
+        <p:txBody>
+          <a:bodyPr wrap="square" lIns="0" tIns="0" rIns="0" bIns="0" rtlCol="0" anchor="t"/>
+          <a:lstStyle/>
+          <a:p>
+            <a:pPr indent="0" marL="0">
+              <a:lnSpc>
+                <a:spcPct val="106000"/>
+              </a:lnSpc>
+              <a:buNone/>
+            </a:pPr>
+            <a:r>
+              <a:rPr lang="en-US" sz="1500" b="1" dirty="0">
+                <a:solidFill>
+                  <a:srgbClr val="1B1E22"/>
+                </a:solidFill>
+                <a:latin typeface="Calibri" pitchFamily="34" charset="0"/>
+                <a:ea typeface="Calibri" pitchFamily="34" charset="-122"/>
+                <a:cs typeface="Calibri" pitchFamily="34" charset="-120"/>
+              </a:rPr>
+              <a:t>02 · Robustness   </a:t>
+            </a:r>
+            <a:pPr indent="0" marL="0">
+              <a:lnSpc>
+                <a:spcPct val="106000"/>
+              </a:lnSpc>
+              <a:buNone/>
+            </a:pPr>
+            <a:r>
+              <a:rPr lang="en-US" sz="1500" dirty="0">
+                <a:solidFill>
+                  <a:srgbClr val="3A3F46"/>
+                </a:solidFill>
+                <a:latin typeface="Calibri" pitchFamily="34" charset="0"/>
+                <a:ea typeface="Calibri" pitchFamily="34" charset="-122"/>
+                <a:cs typeface="Calibri" pitchFamily="34" charset="-120"/>
+              </a:rPr>
+              <a:t>Semantic stability — verdict invariant to lossless obfuscation (SSI 1.000 vs 0.216).</a:t>
+            </a:r>
+            <a:endParaRPr lang="en-US" sz="1500" dirty="0"/>
+          </a:p>
+        </p:txBody>
+      </p:sp>
+      <p:sp>
+        <p:nvSpPr>
+          <p:cNvPr id="10" name="Text 8"/>
+          <p:cNvSpPr txBox="1"/>
+          <p:nvPr/>
+        </p:nvSpPr>
+        <p:spPr>
+          <a:xfrm>
+            <a:off x="548640" y="3703320"/>
+            <a:ext cx="640080" cy="457200"/>
           </a:xfrm>
           <a:prstGeom prst="rect">
             <a:avLst/>
@@ -7641,75 +9581,126 @@
           <a:lstStyle/>
           <a:p>
             <a:pPr indent="0" marL="0">
-              <a:lnSpc>
-                <a:spcPct val="105000"/>
-              </a:lnSpc>
-              <a:buNone/>
-            </a:pPr>
-            <a:r>
-              <a:rPr lang="en-US" sz="1250" dirty="0">
-                <a:solidFill>
-                  <a:srgbClr val="6B7178"/>
-                </a:solidFill>
-                <a:latin typeface="Calibri" pitchFamily="34" charset="0"/>
-                <a:ea typeface="Calibri" pitchFamily="34" charset="-122"/>
-                <a:cs typeface="Calibri" pitchFamily="34" charset="-120"/>
-              </a:rPr>
-              <a:t>reachability recall on reachable threats</a:t>
-            </a:r>
-            <a:endParaRPr lang="en-US" sz="1250" dirty="0"/>
-          </a:p>
-        </p:txBody>
-      </p:sp>
-      <p:sp>
-        <p:nvSpPr>
-          <p:cNvPr id="11" name="Text 8"/>
-          <p:cNvSpPr txBox="1"/>
-          <p:nvPr/>
-        </p:nvSpPr>
-        <p:spPr>
-          <a:xfrm>
-            <a:off x="7909560" y="5349240"/>
-            <a:ext cx="3931920" cy="822960"/>
-          </a:xfrm>
-          <a:prstGeom prst="rect">
-            <a:avLst/>
-          </a:prstGeom>
-          <a:noFill/>
-          <a:ln/>
-        </p:spPr>
-        <p:txBody>
-          <a:bodyPr wrap="square" lIns="0" tIns="0" rIns="0" bIns="0" rtlCol="0" anchor="ctr"/>
-          <a:lstStyle/>
-          <a:p>
-            <a:pPr indent="0" marL="0">
-              <a:buNone/>
-            </a:pPr>
-            <a:r>
-              <a:rPr lang="en-US" sz="4200" dirty="0">
-                <a:solidFill>
-                  <a:srgbClr val="1B1E22"/>
+              <a:buNone/>
+            </a:pPr>
+            <a:r>
+              <a:rPr lang="en-US" sz="1900" dirty="0">
+                <a:solidFill>
+                  <a:srgbClr val="2F8F82"/>
                 </a:solidFill>
                 <a:latin typeface="Arial Black" pitchFamily="34" charset="0"/>
                 <a:ea typeface="Arial Black" pitchFamily="34" charset="-122"/>
                 <a:cs typeface="Arial Black" pitchFamily="34" charset="-120"/>
               </a:rPr>
-              <a:t>0</a:t>
-            </a:r>
-            <a:endParaRPr lang="en-US" sz="4200" dirty="0"/>
-          </a:p>
-        </p:txBody>
-      </p:sp>
-      <p:sp>
-        <p:nvSpPr>
-          <p:cNvPr id="12" name="Text 9"/>
-          <p:cNvSpPr txBox="1"/>
-          <p:nvPr/>
-        </p:nvSpPr>
-        <p:spPr>
-          <a:xfrm>
-            <a:off x="7909560" y="6135624"/>
-            <a:ext cx="3931920" cy="640080"/>
+              <a:t>03</a:t>
+            </a:r>
+            <a:endParaRPr lang="en-US" sz="1900" dirty="0"/>
+          </a:p>
+        </p:txBody>
+      </p:sp>
+      <p:sp>
+        <p:nvSpPr>
+          <p:cNvPr id="11" name="Text 9"/>
+          <p:cNvSpPr txBox="1"/>
+          <p:nvPr/>
+        </p:nvSpPr>
+        <p:spPr>
+          <a:xfrm>
+            <a:off x="1234440" y="3685032"/>
+            <a:ext cx="6080760" cy="868680"/>
+          </a:xfrm>
+          <a:prstGeom prst="rect">
+            <a:avLst/>
+          </a:prstGeom>
+          <a:noFill/>
+          <a:ln/>
+        </p:spPr>
+        <p:txBody>
+          <a:bodyPr wrap="square" lIns="0" tIns="0" rIns="0" bIns="0" rtlCol="0" anchor="t"/>
+          <a:lstStyle/>
+          <a:p>
+            <a:pPr indent="0" marL="0">
+              <a:lnSpc>
+                <a:spcPct val="106000"/>
+              </a:lnSpc>
+              <a:buNone/>
+            </a:pPr>
+            <a:r>
+              <a:rPr lang="en-US" sz="1500" b="1" dirty="0">
+                <a:solidFill>
+                  <a:srgbClr val="1B1E22"/>
+                </a:solidFill>
+                <a:latin typeface="Calibri" pitchFamily="34" charset="0"/>
+                <a:ea typeface="Calibri" pitchFamily="34" charset="-122"/>
+                <a:cs typeface="Calibri" pitchFamily="34" charset="-120"/>
+              </a:rPr>
+              <a:t>03 · Assurance   </a:t>
+            </a:r>
+            <a:pPr indent="0" marL="0">
+              <a:lnSpc>
+                <a:spcPct val="106000"/>
+              </a:lnSpc>
+              <a:buNone/>
+            </a:pPr>
+            <a:r>
+              <a:rPr lang="en-US" sz="1500" dirty="0">
+                <a:solidFill>
+                  <a:srgbClr val="3A3F46"/>
+                </a:solidFill>
+                <a:latin typeface="Calibri" pitchFamily="34" charset="0"/>
+                <a:ea typeface="Calibri" pitchFamily="34" charset="-122"/>
+                <a:cs typeface="Calibri" pitchFamily="34" charset="-120"/>
+              </a:rPr>
+              <a:t>Verifiable verdicts — 0/285 false positives, 1-hop witnesses, deterministic, training-free.</a:t>
+            </a:r>
+            <a:endParaRPr lang="en-US" sz="1500" dirty="0"/>
+          </a:p>
+        </p:txBody>
+      </p:sp>
+      <p:sp>
+        <p:nvSpPr>
+          <p:cNvPr id="12" name="Shape 10"/>
+          <p:cNvSpPr/>
+          <p:nvPr/>
+        </p:nvSpPr>
+        <p:spPr>
+          <a:xfrm>
+            <a:off x="8366760" y="1965960"/>
+            <a:ext cx="3291840" cy="3017520"/>
+          </a:xfrm>
+          <a:prstGeom prst="roundRect">
+            <a:avLst>
+              <a:gd name="adj" fmla="val 2121"/>
+            </a:avLst>
+          </a:prstGeom>
+          <a:solidFill>
+            <a:srgbClr val="EEF0F2"/>
+          </a:solidFill>
+          <a:ln w="9525">
+            <a:solidFill>
+              <a:srgbClr val="CED2D8"/>
+            </a:solidFill>
+            <a:prstDash val="solid"/>
+          </a:ln>
+          <a:effectLst>
+            <a:outerShdw sx="100000" sy="100000" kx="0" ky="0" algn="bl" rotWithShape="0" blurRad="101600" dist="38100" dir="5400000">
+              <a:srgbClr val="9aa0a8">
+                <a:alpha val="30000"/>
+              </a:srgbClr>
+            </a:outerShdw>
+          </a:effectLst>
+        </p:spPr>
+      </p:sp>
+      <p:sp>
+        <p:nvSpPr>
+          <p:cNvPr id="13" name="Text 11"/>
+          <p:cNvSpPr txBox="1"/>
+          <p:nvPr/>
+        </p:nvSpPr>
+        <p:spPr>
+          <a:xfrm>
+            <a:off x="8641080" y="2194560"/>
+            <a:ext cx="2834640" cy="274320"/>
           </a:xfrm>
           <a:prstGeom prst="rect">
             <a:avLst/>
@@ -7722,13 +9713,130 @@
           <a:lstStyle/>
           <a:p>
             <a:pPr indent="0" marL="0">
+              <a:buNone/>
+            </a:pPr>
+            <a:r>
+              <a:rPr lang="en-US" sz="1100" b="1" spc="300" kern="0" dirty="0">
+                <a:solidFill>
+                  <a:srgbClr val="6B7178"/>
+                </a:solidFill>
+                <a:latin typeface="Calibri" pitchFamily="34" charset="0"/>
+                <a:ea typeface="Calibri" pitchFamily="34" charset="-122"/>
+                <a:cs typeface="Calibri" pitchFamily="34" charset="-120"/>
+              </a:rPr>
+              <a:t>THE ARC</a:t>
+            </a:r>
+            <a:endParaRPr lang="en-US" sz="1100" dirty="0"/>
+          </a:p>
+        </p:txBody>
+      </p:sp>
+      <p:sp>
+        <p:nvSpPr>
+          <p:cNvPr id="14" name="Text 12"/>
+          <p:cNvSpPr txBox="1"/>
+          <p:nvPr/>
+        </p:nvSpPr>
+        <p:spPr>
+          <a:xfrm>
+            <a:off x="8641080" y="2560320"/>
+            <a:ext cx="2788920" cy="2194560"/>
+          </a:xfrm>
+          <a:prstGeom prst="rect">
+            <a:avLst/>
+          </a:prstGeom>
+          <a:noFill/>
+          <a:ln/>
+        </p:spPr>
+        <p:txBody>
+          <a:bodyPr wrap="square" lIns="0" tIns="0" rIns="0" bIns="0" rtlCol="0" anchor="t"/>
+          <a:lstStyle/>
+          <a:p>
+            <a:pPr indent="0" marL="0">
               <a:lnSpc>
-                <a:spcPct val="105000"/>
+                <a:spcPct val="118000"/>
               </a:lnSpc>
               <a:buNone/>
             </a:pPr>
             <a:r>
-              <a:rPr lang="en-US" sz="1250" dirty="0">
+              <a:rPr lang="en-US" sz="1400" dirty="0">
+                <a:solidFill>
+                  <a:srgbClr val="3A3F46"/>
+                </a:solidFill>
+                <a:latin typeface="Calibri" pitchFamily="34" charset="0"/>
+                <a:ea typeface="Calibri" pitchFamily="34" charset="-122"/>
+                <a:cs typeface="Calibri" pitchFamily="34" charset="-120"/>
+              </a:rPr>
+              <a:t>Not one metric, but a complete argument: it works, it holds under attack, and you can verify it by hand.</a:t>
+            </a:r>
+            <a:endParaRPr lang="en-US" sz="1400" dirty="0"/>
+          </a:p>
+        </p:txBody>
+      </p:sp>
+      <p:sp>
+        <p:nvSpPr>
+          <p:cNvPr id="15" name="Text 13"/>
+          <p:cNvSpPr txBox="1"/>
+          <p:nvPr/>
+        </p:nvSpPr>
+        <p:spPr>
+          <a:xfrm>
+            <a:off x="502920" y="6528816"/>
+            <a:ext cx="6400800" cy="237744"/>
+          </a:xfrm>
+          <a:prstGeom prst="rect">
+            <a:avLst/>
+          </a:prstGeom>
+          <a:noFill/>
+          <a:ln/>
+        </p:spPr>
+        <p:txBody>
+          <a:bodyPr wrap="square" lIns="0" tIns="0" rIns="0" bIns="0" rtlCol="0" anchor="ctr"/>
+          <a:lstStyle/>
+          <a:p>
+            <a:pPr indent="0" marL="0">
+              <a:buNone/>
+            </a:pPr>
+            <a:r>
+              <a:rPr lang="en-US" sz="850" spc="150" kern="0" dirty="0">
+                <a:solidFill>
+                  <a:srgbClr val="9AA0A8"/>
+                </a:solidFill>
+                <a:latin typeface="Calibri" pitchFamily="34" charset="0"/>
+                <a:ea typeface="Calibri" pitchFamily="34" charset="-122"/>
+                <a:cs typeface="Calibri" pitchFamily="34" charset="-120"/>
+              </a:rPr>
+              <a:t>PDFSentry · Reachability over Recognition</a:t>
+            </a:r>
+            <a:endParaRPr lang="en-US" sz="850" dirty="0"/>
+          </a:p>
+        </p:txBody>
+      </p:sp>
+      <p:sp>
+        <p:nvSpPr>
+          <p:cNvPr id="16" name="Text 14"/>
+          <p:cNvSpPr txBox="1"/>
+          <p:nvPr/>
+        </p:nvSpPr>
+        <p:spPr>
+          <a:xfrm>
+            <a:off x="11323015" y="6510528"/>
+            <a:ext cx="457200" cy="256032"/>
+          </a:xfrm>
+          <a:prstGeom prst="rect">
+            <a:avLst/>
+          </a:prstGeom>
+          <a:noFill/>
+          <a:ln/>
+        </p:spPr>
+        <p:txBody>
+          <a:bodyPr wrap="square" lIns="0" tIns="0" rIns="0" bIns="0" rtlCol="0" anchor="ctr"/>
+          <a:lstStyle/>
+          <a:p>
+            <a:pPr algn="r" indent="0" marL="0">
+              <a:buNone/>
+            </a:pPr>
+            <a:r>
+              <a:rPr lang="en-US" sz="950" b="1" dirty="0">
                 <a:solidFill>
                   <a:srgbClr val="6B7178"/>
                 </a:solidFill>
@@ -7736,9 +9844,9 @@
                 <a:ea typeface="Calibri" pitchFamily="34" charset="-122"/>
                 <a:cs typeface="Calibri" pitchFamily="34" charset="-120"/>
               </a:rPr>
-              <a:t>false positives on 285 benign</a:t>
-            </a:r>
-            <a:endParaRPr lang="en-US" sz="1250" dirty="0"/>
+              <a:t>05</a:t>
+            </a:r>
+            <a:endParaRPr lang="en-US" sz="950" dirty="0"/>
           </a:p>
         </p:txBody>
       </p:sp>
@@ -7867,7 +9975,46 @@
         </p:nvSpPr>
         <p:spPr>
           <a:xfrm>
-            <a:off x="502920" y="822960"/>
+            <a:off x="512064" y="786384"/>
+            <a:ext cx="10058400" cy="256032"/>
+          </a:xfrm>
+          <a:prstGeom prst="rect">
+            <a:avLst/>
+          </a:prstGeom>
+          <a:noFill/>
+          <a:ln/>
+        </p:spPr>
+        <p:txBody>
+          <a:bodyPr wrap="square" lIns="0" tIns="0" rIns="0" bIns="0" rtlCol="0" anchor="ctr"/>
+          <a:lstStyle/>
+          <a:p>
+            <a:pPr indent="0" marL="0">
+              <a:buNone/>
+            </a:pPr>
+            <a:r>
+              <a:rPr lang="en-US" sz="1100" b="1" spc="400" kern="0" dirty="0">
+                <a:solidFill>
+                  <a:srgbClr val="2F8F82"/>
+                </a:solidFill>
+                <a:latin typeface="Calibri" pitchFamily="34" charset="0"/>
+                <a:ea typeface="Calibri" pitchFamily="34" charset="-122"/>
+                <a:cs typeface="Calibri" pitchFamily="34" charset="-120"/>
+              </a:rPr>
+              <a:t>DETECTION</a:t>
+            </a:r>
+            <a:endParaRPr lang="en-US" sz="1100" dirty="0"/>
+          </a:p>
+        </p:txBody>
+      </p:sp>
+      <p:sp>
+        <p:nvSpPr>
+          <p:cNvPr id="5" name="Text 3"/>
+          <p:cNvSpPr txBox="1"/>
+          <p:nvPr/>
+        </p:nvSpPr>
+        <p:spPr>
+          <a:xfrm>
+            <a:off x="502920" y="1078992"/>
             <a:ext cx="11155680" cy="731520"/>
           </a:xfrm>
           <a:prstGeom prst="rect">
@@ -7892,7 +10039,7 @@
                 <a:ea typeface="Arial Black" pitchFamily="34" charset="-122"/>
                 <a:cs typeface="Arial Black" pitchFamily="34" charset="-120"/>
               </a:rPr>
-              <a:t>Pillar 02 · Robustness</a:t>
+              <a:t>Pillar 01 · Detection</a:t>
             </a:r>
             <a:endParaRPr lang="en-US" sz="3000" dirty="0"/>
           </a:p>
@@ -7900,13 +10047,13 @@
       </p:sp>
       <p:sp>
         <p:nvSpPr>
-          <p:cNvPr id="5" name="Text 3"/>
-          <p:cNvSpPr txBox="1"/>
-          <p:nvPr/>
-        </p:nvSpPr>
-        <p:spPr>
-          <a:xfrm>
-            <a:off x="548640" y="1536192"/>
+          <p:cNvPr id="6" name="Text 4"/>
+          <p:cNvSpPr txBox="1"/>
+          <p:nvPr/>
+        </p:nvSpPr>
+        <p:spPr>
+          <a:xfrm>
+            <a:off x="548640" y="1783080"/>
             <a:ext cx="10881360" cy="548640"/>
           </a:xfrm>
           <a:prstGeom prst="rect">
@@ -7926,7 +10073,7 @@
               <a:buNone/>
             </a:pPr>
             <a:r>
-              <a:rPr lang="en-US" sz="1500" dirty="0">
+              <a:rPr lang="en-US" sz="1550" dirty="0">
                 <a:solidFill>
                   <a:srgbClr val="3A3F46"/>
                 </a:solidFill>
@@ -7934,21 +10081,21 @@
                 <a:ea typeface="Calibri" pitchFamily="34" charset="-122"/>
                 <a:cs typeface="Calibri" pitchFamily="34" charset="-120"/>
               </a:rPr>
-              <a:t>Same malicious behaviour, eight lossless re-saves. EMBER’s score swings across the scale; reachability never moves.</a:t>
-            </a:r>
-            <a:endParaRPr lang="en-US" sz="1500" dirty="0"/>
+              <a:t>On controlled structural evasions, EMBER alone is near-blind; adding reachability makes it near-perfect.</a:t>
+            </a:r>
+            <a:endParaRPr lang="en-US" sz="1550" dirty="0"/>
           </a:p>
         </p:txBody>
       </p:sp>
       <p:graphicFrame>
         <p:nvGraphicFramePr>
-          <p:cNvPr id="6" name="Chart 0" descr=""/>
+          <p:cNvPr id="7" name="Chart 0" descr=""/>
           <p:cNvGraphicFramePr/>
           <p:nvPr/>
         </p:nvGraphicFramePr>
         <p:xfrm>
-          <a:off x="502920" y="2286000"/>
-          <a:ext cx="7040880" cy="4114800"/>
+          <a:off x="502920" y="2514600"/>
+          <a:ext cx="7040880" cy="3977640"/>
         </p:xfrm>
         <a:graphic xmlns:a="http://schemas.openxmlformats.org/drawingml/2006/main">
           <a:graphicData uri="http://schemas.openxmlformats.org/drawingml/2006/chart">
@@ -7958,13 +10105,13 @@
       </p:graphicFrame>
       <p:sp>
         <p:nvSpPr>
-          <p:cNvPr id="7" name="Text 4"/>
-          <p:cNvSpPr txBox="1"/>
-          <p:nvPr/>
-        </p:nvSpPr>
-        <p:spPr>
-          <a:xfrm>
-            <a:off x="7909560" y="2423160"/>
+          <p:cNvPr id="8" name="Text 5"/>
+          <p:cNvSpPr txBox="1"/>
+          <p:nvPr/>
+        </p:nvSpPr>
+        <p:spPr>
+          <a:xfrm>
+            <a:off x="7909560" y="2651760"/>
             <a:ext cx="3931920" cy="822960"/>
           </a:xfrm>
           <a:prstGeom prst="rect">
@@ -7983,13 +10130,13 @@
             <a:r>
               <a:rPr lang="en-US" sz="4200" dirty="0">
                 <a:solidFill>
-                  <a:srgbClr val="B4473F"/>
+                  <a:srgbClr val="2F8F82"/>
                 </a:solidFill>
                 <a:latin typeface="Arial Black" pitchFamily="34" charset="0"/>
                 <a:ea typeface="Arial Black" pitchFamily="34" charset="-122"/>
                 <a:cs typeface="Arial Black" pitchFamily="34" charset="-120"/>
               </a:rPr>
-              <a:t>78.4%</a:t>
+              <a:t>+0.349</a:t>
             </a:r>
             <a:endParaRPr lang="en-US" sz="4200" dirty="0"/>
           </a:p>
@@ -7997,23 +10144,23 @@
       </p:sp>
       <p:sp>
         <p:nvSpPr>
-          <p:cNvPr id="8" name="Text 5"/>
-          <p:cNvSpPr txBox="1"/>
-          <p:nvPr/>
-        </p:nvSpPr>
-        <p:spPr>
-          <a:xfrm>
-            <a:off x="7909560" y="3209544"/>
-            <a:ext cx="3931920" cy="640080"/>
-          </a:xfrm>
-          <a:prstGeom prst="rect">
-            <a:avLst/>
-          </a:prstGeom>
-          <a:noFill/>
-          <a:ln/>
-        </p:spPr>
-        <p:txBody>
-          <a:bodyPr wrap="square" lIns="0" tIns="0" rIns="0" bIns="0" rtlCol="0" anchor="ctr"/>
+          <p:cNvPr id="9" name="Text 6"/>
+          <p:cNvSpPr txBox="1"/>
+          <p:nvPr/>
+        </p:nvSpPr>
+        <p:spPr>
+          <a:xfrm>
+            <a:off x="7909560" y="3438144"/>
+            <a:ext cx="3931920" cy="603504"/>
+          </a:xfrm>
+          <a:prstGeom prst="rect">
+            <a:avLst/>
+          </a:prstGeom>
+          <a:noFill/>
+          <a:ln/>
+        </p:spPr>
+        <p:txBody>
+          <a:bodyPr wrap="square" lIns="0" tIns="0" rIns="0" bIns="0" rtlCol="0" anchor="t"/>
           <a:lstStyle/>
           <a:p>
             <a:pPr indent="0" marL="0">
@@ -8031,7 +10178,7 @@
                 <a:ea typeface="Calibri" pitchFamily="34" charset="-122"/>
                 <a:cs typeface="Calibri" pitchFamily="34" charset="-120"/>
               </a:rPr>
-              <a:t>of docs get BOTH EMBER verdicts</a:t>
+              <a:t>ROC-AUC from the structural signal</a:t>
             </a:r>
             <a:endParaRPr lang="en-US" sz="1250" dirty="0"/>
           </a:p>
@@ -8039,13 +10186,13 @@
       </p:sp>
       <p:sp>
         <p:nvSpPr>
-          <p:cNvPr id="9" name="Text 6"/>
-          <p:cNvSpPr txBox="1"/>
-          <p:nvPr/>
-        </p:nvSpPr>
-        <p:spPr>
-          <a:xfrm>
-            <a:off x="7909560" y="3886200"/>
+          <p:cNvPr id="10" name="Text 7"/>
+          <p:cNvSpPr txBox="1"/>
+          <p:nvPr/>
+        </p:nvSpPr>
+        <p:spPr>
+          <a:xfrm>
+            <a:off x="7909560" y="4069080"/>
             <a:ext cx="3931920" cy="822960"/>
           </a:xfrm>
           <a:prstGeom prst="rect">
@@ -8064,13 +10211,13 @@
             <a:r>
               <a:rPr lang="en-US" sz="4200" dirty="0">
                 <a:solidFill>
-                  <a:srgbClr val="2F8F82"/>
+                  <a:srgbClr val="1B1E22"/>
                 </a:solidFill>
                 <a:latin typeface="Arial Black" pitchFamily="34" charset="0"/>
                 <a:ea typeface="Arial Black" pitchFamily="34" charset="-122"/>
                 <a:cs typeface="Arial Black" pitchFamily="34" charset="-120"/>
               </a:rPr>
-              <a:t>1.000</a:t>
+              <a:t>100%</a:t>
             </a:r>
             <a:endParaRPr lang="en-US" sz="4200" dirty="0"/>
           </a:p>
@@ -8078,23 +10225,23 @@
       </p:sp>
       <p:sp>
         <p:nvSpPr>
-          <p:cNvPr id="10" name="Text 7"/>
-          <p:cNvSpPr txBox="1"/>
-          <p:nvPr/>
-        </p:nvSpPr>
-        <p:spPr>
-          <a:xfrm>
-            <a:off x="7909560" y="4672584"/>
-            <a:ext cx="3931920" cy="640080"/>
-          </a:xfrm>
-          <a:prstGeom prst="rect">
-            <a:avLst/>
-          </a:prstGeom>
-          <a:noFill/>
-          <a:ln/>
-        </p:spPr>
-        <p:txBody>
-          <a:bodyPr wrap="square" lIns="0" tIns="0" rIns="0" bIns="0" rtlCol="0" anchor="ctr"/>
+          <p:cNvPr id="11" name="Text 8"/>
+          <p:cNvSpPr txBox="1"/>
+          <p:nvPr/>
+        </p:nvSpPr>
+        <p:spPr>
+          <a:xfrm>
+            <a:off x="7909560" y="4855464"/>
+            <a:ext cx="3931920" cy="603504"/>
+          </a:xfrm>
+          <a:prstGeom prst="rect">
+            <a:avLst/>
+          </a:prstGeom>
+          <a:noFill/>
+          <a:ln/>
+        </p:spPr>
+        <p:txBody>
+          <a:bodyPr wrap="square" lIns="0" tIns="0" rIns="0" bIns="0" rtlCol="0" anchor="t"/>
           <a:lstStyle/>
           <a:p>
             <a:pPr indent="0" marL="0">
@@ -8112,7 +10259,7 @@
                 <a:ea typeface="Calibri" pitchFamily="34" charset="-122"/>
                 <a:cs typeface="Calibri" pitchFamily="34" charset="-120"/>
               </a:rPr>
-              <a:t>reachability stability index</a:t>
+              <a:t>reachability recall on reachable threats</a:t>
             </a:r>
             <a:endParaRPr lang="en-US" sz="1250" dirty="0"/>
           </a:p>
@@ -8120,13 +10267,13 @@
       </p:sp>
       <p:sp>
         <p:nvSpPr>
-          <p:cNvPr id="11" name="Text 8"/>
-          <p:cNvSpPr txBox="1"/>
-          <p:nvPr/>
-        </p:nvSpPr>
-        <p:spPr>
-          <a:xfrm>
-            <a:off x="7909560" y="5349240"/>
+          <p:cNvPr id="12" name="Text 9"/>
+          <p:cNvSpPr txBox="1"/>
+          <p:nvPr/>
+        </p:nvSpPr>
+        <p:spPr>
+          <a:xfrm>
+            <a:off x="7909560" y="5486400"/>
             <a:ext cx="3931920" cy="822960"/>
           </a:xfrm>
           <a:prstGeom prst="rect">
@@ -8145,13 +10292,13 @@
             <a:r>
               <a:rPr lang="en-US" sz="4200" dirty="0">
                 <a:solidFill>
-                  <a:srgbClr val="C08A2E"/>
+                  <a:srgbClr val="1B1E22"/>
                 </a:solidFill>
                 <a:latin typeface="Arial Black" pitchFamily="34" charset="0"/>
                 <a:ea typeface="Arial Black" pitchFamily="34" charset="-122"/>
                 <a:cs typeface="Arial Black" pitchFamily="34" charset="-120"/>
               </a:rPr>
-              <a:t>0.216</a:t>
+              <a:t>0</a:t>
             </a:r>
             <a:endParaRPr lang="en-US" sz="4200" dirty="0"/>
           </a:p>
@@ -8159,23 +10306,23 @@
       </p:sp>
       <p:sp>
         <p:nvSpPr>
-          <p:cNvPr id="12" name="Text 9"/>
-          <p:cNvSpPr txBox="1"/>
-          <p:nvPr/>
-        </p:nvSpPr>
-        <p:spPr>
-          <a:xfrm>
-            <a:off x="7909560" y="6135624"/>
-            <a:ext cx="3931920" cy="640080"/>
-          </a:xfrm>
-          <a:prstGeom prst="rect">
-            <a:avLst/>
-          </a:prstGeom>
-          <a:noFill/>
-          <a:ln/>
-        </p:spPr>
-        <p:txBody>
-          <a:bodyPr wrap="square" lIns="0" tIns="0" rIns="0" bIns="0" rtlCol="0" anchor="ctr"/>
+          <p:cNvPr id="13" name="Text 10"/>
+          <p:cNvSpPr txBox="1"/>
+          <p:nvPr/>
+        </p:nvSpPr>
+        <p:spPr>
+          <a:xfrm>
+            <a:off x="7909560" y="6272784"/>
+            <a:ext cx="3931920" cy="603504"/>
+          </a:xfrm>
+          <a:prstGeom prst="rect">
+            <a:avLst/>
+          </a:prstGeom>
+          <a:noFill/>
+          <a:ln/>
+        </p:spPr>
+        <p:txBody>
+          <a:bodyPr wrap="square" lIns="0" tIns="0" rIns="0" bIns="0" rtlCol="0" anchor="t"/>
           <a:lstStyle/>
           <a:p>
             <a:pPr indent="0" marL="0">
@@ -8193,9 +10340,87 @@
                 <a:ea typeface="Calibri" pitchFamily="34" charset="-122"/>
                 <a:cs typeface="Calibri" pitchFamily="34" charset="-120"/>
               </a:rPr>
-              <a:t>EMBER stability index</a:t>
+              <a:t>false positives on 285 benign</a:t>
             </a:r>
             <a:endParaRPr lang="en-US" sz="1250" dirty="0"/>
+          </a:p>
+        </p:txBody>
+      </p:sp>
+      <p:sp>
+        <p:nvSpPr>
+          <p:cNvPr id="14" name="Text 11"/>
+          <p:cNvSpPr txBox="1"/>
+          <p:nvPr/>
+        </p:nvSpPr>
+        <p:spPr>
+          <a:xfrm>
+            <a:off x="502920" y="6528816"/>
+            <a:ext cx="6400800" cy="237744"/>
+          </a:xfrm>
+          <a:prstGeom prst="rect">
+            <a:avLst/>
+          </a:prstGeom>
+          <a:noFill/>
+          <a:ln/>
+        </p:spPr>
+        <p:txBody>
+          <a:bodyPr wrap="square" lIns="0" tIns="0" rIns="0" bIns="0" rtlCol="0" anchor="ctr"/>
+          <a:lstStyle/>
+          <a:p>
+            <a:pPr indent="0" marL="0">
+              <a:buNone/>
+            </a:pPr>
+            <a:r>
+              <a:rPr lang="en-US" sz="850" spc="150" kern="0" dirty="0">
+                <a:solidFill>
+                  <a:srgbClr val="9AA0A8"/>
+                </a:solidFill>
+                <a:latin typeface="Calibri" pitchFamily="34" charset="0"/>
+                <a:ea typeface="Calibri" pitchFamily="34" charset="-122"/>
+                <a:cs typeface="Calibri" pitchFamily="34" charset="-120"/>
+              </a:rPr>
+              <a:t>PDFSentry · Reachability over Recognition</a:t>
+            </a:r>
+            <a:endParaRPr lang="en-US" sz="850" dirty="0"/>
+          </a:p>
+        </p:txBody>
+      </p:sp>
+      <p:sp>
+        <p:nvSpPr>
+          <p:cNvPr id="15" name="Text 12"/>
+          <p:cNvSpPr txBox="1"/>
+          <p:nvPr/>
+        </p:nvSpPr>
+        <p:spPr>
+          <a:xfrm>
+            <a:off x="11323015" y="6510528"/>
+            <a:ext cx="457200" cy="256032"/>
+          </a:xfrm>
+          <a:prstGeom prst="rect">
+            <a:avLst/>
+          </a:prstGeom>
+          <a:noFill/>
+          <a:ln/>
+        </p:spPr>
+        <p:txBody>
+          <a:bodyPr wrap="square" lIns="0" tIns="0" rIns="0" bIns="0" rtlCol="0" anchor="ctr"/>
+          <a:lstStyle/>
+          <a:p>
+            <a:pPr algn="r" indent="0" marL="0">
+              <a:buNone/>
+            </a:pPr>
+            <a:r>
+              <a:rPr lang="en-US" sz="950" b="1" dirty="0">
+                <a:solidFill>
+                  <a:srgbClr val="6B7178"/>
+                </a:solidFill>
+                <a:latin typeface="Calibri" pitchFamily="34" charset="0"/>
+                <a:ea typeface="Calibri" pitchFamily="34" charset="-122"/>
+                <a:cs typeface="Calibri" pitchFamily="34" charset="-120"/>
+              </a:rPr>
+              <a:t>06</a:t>
+            </a:r>
+            <a:endParaRPr lang="en-US" sz="950" dirty="0"/>
           </a:p>
         </p:txBody>
       </p:sp>
@@ -8324,7 +10549,46 @@
         </p:nvSpPr>
         <p:spPr>
           <a:xfrm>
-            <a:off x="502920" y="822960"/>
+            <a:off x="512064" y="786384"/>
+            <a:ext cx="10058400" cy="256032"/>
+          </a:xfrm>
+          <a:prstGeom prst="rect">
+            <a:avLst/>
+          </a:prstGeom>
+          <a:noFill/>
+          <a:ln/>
+        </p:spPr>
+        <p:txBody>
+          <a:bodyPr wrap="square" lIns="0" tIns="0" rIns="0" bIns="0" rtlCol="0" anchor="ctr"/>
+          <a:lstStyle/>
+          <a:p>
+            <a:pPr indent="0" marL="0">
+              <a:buNone/>
+            </a:pPr>
+            <a:r>
+              <a:rPr lang="en-US" sz="1100" b="1" spc="400" kern="0" dirty="0">
+                <a:solidFill>
+                  <a:srgbClr val="2F8F82"/>
+                </a:solidFill>
+                <a:latin typeface="Calibri" pitchFamily="34" charset="0"/>
+                <a:ea typeface="Calibri" pitchFamily="34" charset="-122"/>
+                <a:cs typeface="Calibri" pitchFamily="34" charset="-120"/>
+              </a:rPr>
+              <a:t>ROBUSTNESS</a:t>
+            </a:r>
+            <a:endParaRPr lang="en-US" sz="1100" dirty="0"/>
+          </a:p>
+        </p:txBody>
+      </p:sp>
+      <p:sp>
+        <p:nvSpPr>
+          <p:cNvPr id="5" name="Text 3"/>
+          <p:cNvSpPr txBox="1"/>
+          <p:nvPr/>
+        </p:nvSpPr>
+        <p:spPr>
+          <a:xfrm>
+            <a:off x="502920" y="1078992"/>
             <a:ext cx="11155680" cy="731520"/>
           </a:xfrm>
           <a:prstGeom prst="rect">
@@ -8341,7 +10605,7 @@
               <a:buNone/>
             </a:pPr>
             <a:r>
-              <a:rPr lang="en-US" sz="3200" dirty="0">
+              <a:rPr lang="en-US" sz="3000" dirty="0">
                 <a:solidFill>
                   <a:srgbClr val="1B1E22"/>
                 </a:solidFill>
@@ -8349,80 +10613,22 @@
                 <a:ea typeface="Arial Black" pitchFamily="34" charset="-122"/>
                 <a:cs typeface="Arial Black" pitchFamily="34" charset="-120"/>
               </a:rPr>
-              <a:t>Pillar 03 · Assurance</a:t>
-            </a:r>
-            <a:endParaRPr lang="en-US" sz="3200" dirty="0"/>
-          </a:p>
-        </p:txBody>
-      </p:sp>
-      <p:sp>
-        <p:nvSpPr>
-          <p:cNvPr id="5" name="Shape 3"/>
-          <p:cNvSpPr/>
-          <p:nvPr/>
-        </p:nvSpPr>
-        <p:spPr>
-          <a:xfrm>
-            <a:off x="457200" y="1874520"/>
-            <a:ext cx="7863840" cy="4584070"/>
-          </a:xfrm>
-          <a:prstGeom prst="roundRect">
-            <a:avLst>
-              <a:gd name="adj" fmla="val 997"/>
-            </a:avLst>
-          </a:prstGeom>
-          <a:solidFill>
-            <a:srgbClr val="0F141B"/>
-          </a:solidFill>
-          <a:ln w="12700">
-            <a:solidFill>
-              <a:srgbClr val="2B3542"/>
-            </a:solidFill>
-            <a:prstDash val="solid"/>
-          </a:ln>
-          <a:effectLst>
-            <a:outerShdw sx="100000" sy="100000" kx="0" ky="0" algn="bl" rotWithShape="0" blurRad="127000" dist="50800" dir="5400000">
-              <a:srgbClr val="7c8795">
-                <a:alpha val="40000"/>
-              </a:srgbClr>
-            </a:outerShdw>
-          </a:effectLst>
-        </p:spPr>
-      </p:sp>
-      <p:pic>
-        <p:nvPicPr>
-          <p:cNvPr id="6" name="Image 0" descr="/home/claude/PDFSentry/deck/assets/dash_assurance.jpg">    </p:cNvPr>
-          <p:cNvPicPr>
-            <a:picLocks noChangeAspect="1"/>
-          </p:cNvPicPr>
-          <p:nvPr/>
-        </p:nvPicPr>
-        <p:blipFill>
-          <a:blip r:embed="rId2"/>
-          <a:stretch>
-            <a:fillRect/>
-          </a:stretch>
-        </p:blipFill>
-        <p:spPr>
-          <a:xfrm>
-            <a:off x="548640" y="1965960"/>
-            <a:ext cx="7680960" cy="4401190"/>
-          </a:xfrm>
-          <a:prstGeom prst="rect">
-            <a:avLst/>
-          </a:prstGeom>
-        </p:spPr>
-      </p:pic>
-      <p:sp>
-        <p:nvSpPr>
-          <p:cNvPr id="7" name="Text 4"/>
-          <p:cNvSpPr txBox="1"/>
-          <p:nvPr/>
-        </p:nvSpPr>
-        <p:spPr>
-          <a:xfrm>
-            <a:off x="8549640" y="2103120"/>
-            <a:ext cx="3184855" cy="822960"/>
+              <a:t>Pillar 02 · Robustness</a:t>
+            </a:r>
+            <a:endParaRPr lang="en-US" sz="3000" dirty="0"/>
+          </a:p>
+        </p:txBody>
+      </p:sp>
+      <p:sp>
+        <p:nvSpPr>
+          <p:cNvPr id="6" name="Text 4"/>
+          <p:cNvSpPr txBox="1"/>
+          <p:nvPr/>
+        </p:nvSpPr>
+        <p:spPr>
+          <a:xfrm>
+            <a:off x="548640" y="1783080"/>
+            <a:ext cx="10881360" cy="548640"/>
           </a:xfrm>
           <a:prstGeom prst="rect">
             <a:avLst/>
@@ -8434,55 +10640,134 @@
           <a:bodyPr wrap="square" lIns="0" tIns="0" rIns="0" bIns="0" rtlCol="0" anchor="ctr"/>
           <a:lstStyle/>
           <a:p>
-            <a:pPr marL="342900" indent="-342900">
+            <a:pPr indent="0" marL="0">
               <a:lnSpc>
-                <a:spcPct val="110000"/>
+                <a:spcPct val="105000"/>
               </a:lnSpc>
-              <a:buSzPct val="100000"/>
-              <a:buChar char="•"/>
-            </a:pPr>
-            <a:r>
-              <a:rPr lang="en-US" sz="1350" b="1" dirty="0">
-                <a:solidFill>
-                  <a:srgbClr val="1B1E22"/>
-                </a:solidFill>
-                <a:latin typeface="Calibri" pitchFamily="34" charset="0"/>
-                <a:ea typeface="Calibri" pitchFamily="34" charset="-122"/>
-                <a:cs typeface="Calibri" pitchFamily="34" charset="-120"/>
-              </a:rPr>
-              <a:t>Certificate  </a:t>
-            </a:r>
+              <a:buNone/>
+            </a:pPr>
+            <a:r>
+              <a:rPr lang="en-US" sz="1550" dirty="0">
+                <a:solidFill>
+                  <a:srgbClr val="3A3F46"/>
+                </a:solidFill>
+                <a:latin typeface="Calibri" pitchFamily="34" charset="0"/>
+                <a:ea typeface="Calibri" pitchFamily="34" charset="-122"/>
+                <a:cs typeface="Calibri" pitchFamily="34" charset="-120"/>
+              </a:rPr>
+              <a:t>Same malicious behaviour, eight lossless re-saves. EMBER’s score swings across the scale; reachability never moves.</a:t>
+            </a:r>
+            <a:endParaRPr lang="en-US" sz="1550" dirty="0"/>
+          </a:p>
+        </p:txBody>
+      </p:sp>
+      <p:graphicFrame>
+        <p:nvGraphicFramePr>
+          <p:cNvPr id="7" name="Chart 0" descr=""/>
+          <p:cNvGraphicFramePr/>
+          <p:nvPr/>
+        </p:nvGraphicFramePr>
+        <p:xfrm>
+          <a:off x="502920" y="2514600"/>
+          <a:ext cx="7040880" cy="3977640"/>
+        </p:xfrm>
+        <a:graphic xmlns:a="http://schemas.openxmlformats.org/drawingml/2006/main">
+          <a:graphicData uri="http://schemas.openxmlformats.org/drawingml/2006/chart">
+            <c:chart xmlns:c="http://schemas.openxmlformats.org/drawingml/2006/chart" r:id="rId2"/>
+          </a:graphicData>
+        </a:graphic>
+      </p:graphicFrame>
+      <p:sp>
+        <p:nvSpPr>
+          <p:cNvPr id="8" name="Text 5"/>
+          <p:cNvSpPr txBox="1"/>
+          <p:nvPr/>
+        </p:nvSpPr>
+        <p:spPr>
+          <a:xfrm>
+            <a:off x="7909560" y="2651760"/>
+            <a:ext cx="3931920" cy="822960"/>
+          </a:xfrm>
+          <a:prstGeom prst="rect">
+            <a:avLst/>
+          </a:prstGeom>
+          <a:noFill/>
+          <a:ln/>
+        </p:spPr>
+        <p:txBody>
+          <a:bodyPr wrap="square" lIns="0" tIns="0" rIns="0" bIns="0" rtlCol="0" anchor="ctr"/>
+          <a:lstStyle/>
+          <a:p>
+            <a:pPr indent="0" marL="0">
+              <a:buNone/>
+            </a:pPr>
+            <a:r>
+              <a:rPr lang="en-US" sz="4200" dirty="0">
+                <a:solidFill>
+                  <a:srgbClr val="B4473F"/>
+                </a:solidFill>
+                <a:latin typeface="Arial Black" pitchFamily="34" charset="0"/>
+                <a:ea typeface="Arial Black" pitchFamily="34" charset="-122"/>
+                <a:cs typeface="Arial Black" pitchFamily="34" charset="-120"/>
+              </a:rPr>
+              <a:t>78.4%</a:t>
+            </a:r>
+            <a:endParaRPr lang="en-US" sz="4200" dirty="0"/>
+          </a:p>
+        </p:txBody>
+      </p:sp>
+      <p:sp>
+        <p:nvSpPr>
+          <p:cNvPr id="9" name="Text 6"/>
+          <p:cNvSpPr txBox="1"/>
+          <p:nvPr/>
+        </p:nvSpPr>
+        <p:spPr>
+          <a:xfrm>
+            <a:off x="7909560" y="3438144"/>
+            <a:ext cx="3931920" cy="603504"/>
+          </a:xfrm>
+          <a:prstGeom prst="rect">
+            <a:avLst/>
+          </a:prstGeom>
+          <a:noFill/>
+          <a:ln/>
+        </p:spPr>
+        <p:txBody>
+          <a:bodyPr wrap="square" lIns="0" tIns="0" rIns="0" bIns="0" rtlCol="0" anchor="t"/>
+          <a:lstStyle/>
+          <a:p>
             <a:pPr indent="0" marL="0">
               <a:lnSpc>
-                <a:spcPct val="110000"/>
+                <a:spcPct val="105000"/>
               </a:lnSpc>
               <a:buNone/>
             </a:pPr>
             <a:r>
-              <a:rPr lang="en-US" sz="1350" dirty="0">
-                <a:solidFill>
-                  <a:srgbClr val="3A3F46"/>
-                </a:solidFill>
-                <a:latin typeface="Calibri" pitchFamily="34" charset="0"/>
-                <a:ea typeface="Calibri" pitchFamily="34" charset="-122"/>
-                <a:cs typeface="Calibri" pitchFamily="34" charset="-120"/>
-              </a:rPr>
-              <a:t>Every alarm ships a minimal witness: catalog → trigger → dangerous node.</a:t>
-            </a:r>
-            <a:endParaRPr lang="en-US" sz="1350" dirty="0"/>
-          </a:p>
-        </p:txBody>
-      </p:sp>
-      <p:sp>
-        <p:nvSpPr>
-          <p:cNvPr id="8" name="Text 5"/>
-          <p:cNvSpPr txBox="1"/>
-          <p:nvPr/>
-        </p:nvSpPr>
-        <p:spPr>
-          <a:xfrm>
-            <a:off x="8549640" y="3017520"/>
-            <a:ext cx="3184855" cy="822960"/>
+              <a:rPr lang="en-US" sz="1250" dirty="0">
+                <a:solidFill>
+                  <a:srgbClr val="6B7178"/>
+                </a:solidFill>
+                <a:latin typeface="Calibri" pitchFamily="34" charset="0"/>
+                <a:ea typeface="Calibri" pitchFamily="34" charset="-122"/>
+                <a:cs typeface="Calibri" pitchFamily="34" charset="-120"/>
+              </a:rPr>
+              <a:t>of docs get BOTH EMBER verdicts</a:t>
+            </a:r>
+            <a:endParaRPr lang="en-US" sz="1250" dirty="0"/>
+          </a:p>
+        </p:txBody>
+      </p:sp>
+      <p:sp>
+        <p:nvSpPr>
+          <p:cNvPr id="10" name="Text 7"/>
+          <p:cNvSpPr txBox="1"/>
+          <p:nvPr/>
+        </p:nvSpPr>
+        <p:spPr>
+          <a:xfrm>
+            <a:off x="7909560" y="4069080"/>
+            <a:ext cx="3931920" cy="822960"/>
           </a:xfrm>
           <a:prstGeom prst="rect">
             <a:avLst/>
@@ -8494,55 +10779,157 @@
           <a:bodyPr wrap="square" lIns="0" tIns="0" rIns="0" bIns="0" rtlCol="0" anchor="ctr"/>
           <a:lstStyle/>
           <a:p>
-            <a:pPr marL="342900" indent="-342900">
+            <a:pPr indent="0" marL="0">
+              <a:buNone/>
+            </a:pPr>
+            <a:r>
+              <a:rPr lang="en-US" sz="4200" dirty="0">
+                <a:solidFill>
+                  <a:srgbClr val="2F8F82"/>
+                </a:solidFill>
+                <a:latin typeface="Arial Black" pitchFamily="34" charset="0"/>
+                <a:ea typeface="Arial Black" pitchFamily="34" charset="-122"/>
+                <a:cs typeface="Arial Black" pitchFamily="34" charset="-120"/>
+              </a:rPr>
+              <a:t>1.000</a:t>
+            </a:r>
+            <a:endParaRPr lang="en-US" sz="4200" dirty="0"/>
+          </a:p>
+        </p:txBody>
+      </p:sp>
+      <p:sp>
+        <p:nvSpPr>
+          <p:cNvPr id="11" name="Text 8"/>
+          <p:cNvSpPr txBox="1"/>
+          <p:nvPr/>
+        </p:nvSpPr>
+        <p:spPr>
+          <a:xfrm>
+            <a:off x="7909560" y="4855464"/>
+            <a:ext cx="3931920" cy="603504"/>
+          </a:xfrm>
+          <a:prstGeom prst="rect">
+            <a:avLst/>
+          </a:prstGeom>
+          <a:noFill/>
+          <a:ln/>
+        </p:spPr>
+        <p:txBody>
+          <a:bodyPr wrap="square" lIns="0" tIns="0" rIns="0" bIns="0" rtlCol="0" anchor="t"/>
+          <a:lstStyle/>
+          <a:p>
+            <a:pPr indent="0" marL="0">
               <a:lnSpc>
-                <a:spcPct val="110000"/>
+                <a:spcPct val="105000"/>
               </a:lnSpc>
-              <a:buSzPct val="100000"/>
-              <a:buChar char="•"/>
-            </a:pPr>
-            <a:r>
-              <a:rPr lang="en-US" sz="1350" b="1" dirty="0">
-                <a:solidFill>
-                  <a:srgbClr val="1B1E22"/>
-                </a:solidFill>
-                <a:latin typeface="Calibri" pitchFamily="34" charset="0"/>
-                <a:ea typeface="Calibri" pitchFamily="34" charset="-122"/>
-                <a:cs typeface="Calibri" pitchFamily="34" charset="-120"/>
-              </a:rPr>
-              <a:t>0 / 285  </a:t>
-            </a:r>
+              <a:buNone/>
+            </a:pPr>
+            <a:r>
+              <a:rPr lang="en-US" sz="1250" dirty="0">
+                <a:solidFill>
+                  <a:srgbClr val="6B7178"/>
+                </a:solidFill>
+                <a:latin typeface="Calibri" pitchFamily="34" charset="0"/>
+                <a:ea typeface="Calibri" pitchFamily="34" charset="-122"/>
+                <a:cs typeface="Calibri" pitchFamily="34" charset="-120"/>
+              </a:rPr>
+              <a:t>reachability stability index</a:t>
+            </a:r>
+            <a:endParaRPr lang="en-US" sz="1250" dirty="0"/>
+          </a:p>
+        </p:txBody>
+      </p:sp>
+      <p:sp>
+        <p:nvSpPr>
+          <p:cNvPr id="12" name="Text 9"/>
+          <p:cNvSpPr txBox="1"/>
+          <p:nvPr/>
+        </p:nvSpPr>
+        <p:spPr>
+          <a:xfrm>
+            <a:off x="7909560" y="5486400"/>
+            <a:ext cx="3931920" cy="822960"/>
+          </a:xfrm>
+          <a:prstGeom prst="rect">
+            <a:avLst/>
+          </a:prstGeom>
+          <a:noFill/>
+          <a:ln/>
+        </p:spPr>
+        <p:txBody>
+          <a:bodyPr wrap="square" lIns="0" tIns="0" rIns="0" bIns="0" rtlCol="0" anchor="ctr"/>
+          <a:lstStyle/>
+          <a:p>
+            <a:pPr indent="0" marL="0">
+              <a:buNone/>
+            </a:pPr>
+            <a:r>
+              <a:rPr lang="en-US" sz="4200" dirty="0">
+                <a:solidFill>
+                  <a:srgbClr val="C08A2E"/>
+                </a:solidFill>
+                <a:latin typeface="Arial Black" pitchFamily="34" charset="0"/>
+                <a:ea typeface="Arial Black" pitchFamily="34" charset="-122"/>
+                <a:cs typeface="Arial Black" pitchFamily="34" charset="-120"/>
+              </a:rPr>
+              <a:t>0.216</a:t>
+            </a:r>
+            <a:endParaRPr lang="en-US" sz="4200" dirty="0"/>
+          </a:p>
+        </p:txBody>
+      </p:sp>
+      <p:sp>
+        <p:nvSpPr>
+          <p:cNvPr id="13" name="Text 10"/>
+          <p:cNvSpPr txBox="1"/>
+          <p:nvPr/>
+        </p:nvSpPr>
+        <p:spPr>
+          <a:xfrm>
+            <a:off x="7909560" y="6272784"/>
+            <a:ext cx="3931920" cy="603504"/>
+          </a:xfrm>
+          <a:prstGeom prst="rect">
+            <a:avLst/>
+          </a:prstGeom>
+          <a:noFill/>
+          <a:ln/>
+        </p:spPr>
+        <p:txBody>
+          <a:bodyPr wrap="square" lIns="0" tIns="0" rIns="0" bIns="0" rtlCol="0" anchor="t"/>
+          <a:lstStyle/>
+          <a:p>
             <a:pPr indent="0" marL="0">
               <a:lnSpc>
-                <a:spcPct val="110000"/>
+                <a:spcPct val="105000"/>
               </a:lnSpc>
               <a:buNone/>
             </a:pPr>
             <a:r>
-              <a:rPr lang="en-US" sz="1350" dirty="0">
-                <a:solidFill>
-                  <a:srgbClr val="3A3F46"/>
-                </a:solidFill>
-                <a:latin typeface="Calibri" pitchFamily="34" charset="0"/>
-                <a:ea typeface="Calibri" pitchFamily="34" charset="-122"/>
-                <a:cs typeface="Calibri" pitchFamily="34" charset="-120"/>
-              </a:rPr>
-              <a:t>false positives on the benign corpus (auto-exec gate).</a:t>
-            </a:r>
-            <a:endParaRPr lang="en-US" sz="1350" dirty="0"/>
-          </a:p>
-        </p:txBody>
-      </p:sp>
-      <p:sp>
-        <p:nvSpPr>
-          <p:cNvPr id="9" name="Text 6"/>
-          <p:cNvSpPr txBox="1"/>
-          <p:nvPr/>
-        </p:nvSpPr>
-        <p:spPr>
-          <a:xfrm>
-            <a:off x="8549640" y="3931920"/>
-            <a:ext cx="3184855" cy="822960"/>
+              <a:rPr lang="en-US" sz="1250" dirty="0">
+                <a:solidFill>
+                  <a:srgbClr val="6B7178"/>
+                </a:solidFill>
+                <a:latin typeface="Calibri" pitchFamily="34" charset="0"/>
+                <a:ea typeface="Calibri" pitchFamily="34" charset="-122"/>
+                <a:cs typeface="Calibri" pitchFamily="34" charset="-120"/>
+              </a:rPr>
+              <a:t>EMBER stability index</a:t>
+            </a:r>
+            <a:endParaRPr lang="en-US" sz="1250" dirty="0"/>
+          </a:p>
+        </p:txBody>
+      </p:sp>
+      <p:sp>
+        <p:nvSpPr>
+          <p:cNvPr id="14" name="Text 11"/>
+          <p:cNvSpPr txBox="1"/>
+          <p:nvPr/>
+        </p:nvSpPr>
+        <p:spPr>
+          <a:xfrm>
+            <a:off x="502920" y="6528816"/>
+            <a:ext cx="6400800" cy="237744"/>
           </a:xfrm>
           <a:prstGeom prst="rect">
             <a:avLst/>
@@ -8554,55 +10941,34 @@
           <a:bodyPr wrap="square" lIns="0" tIns="0" rIns="0" bIns="0" rtlCol="0" anchor="ctr"/>
           <a:lstStyle/>
           <a:p>
-            <a:pPr marL="342900" indent="-342900">
-              <a:lnSpc>
-                <a:spcPct val="110000"/>
-              </a:lnSpc>
-              <a:buSzPct val="100000"/>
-              <a:buChar char="•"/>
-            </a:pPr>
-            <a:r>
-              <a:rPr lang="en-US" sz="1350" b="1" dirty="0">
-                <a:solidFill>
-                  <a:srgbClr val="1B1E22"/>
-                </a:solidFill>
-                <a:latin typeface="Calibri" pitchFamily="34" charset="0"/>
-                <a:ea typeface="Calibri" pitchFamily="34" charset="-122"/>
-                <a:cs typeface="Calibri" pitchFamily="34" charset="-120"/>
-              </a:rPr>
-              <a:t>Deterministic  </a:t>
-            </a:r>
-            <a:pPr indent="0" marL="0">
-              <a:lnSpc>
-                <a:spcPct val="110000"/>
-              </a:lnSpc>
-              <a:buNone/>
-            </a:pPr>
-            <a:r>
-              <a:rPr lang="en-US" sz="1350" dirty="0">
-                <a:solidFill>
-                  <a:srgbClr val="3A3F46"/>
-                </a:solidFill>
-                <a:latin typeface="Calibri" pitchFamily="34" charset="0"/>
-                <a:ea typeface="Calibri" pitchFamily="34" charset="-122"/>
-                <a:cs typeface="Calibri" pitchFamily="34" charset="-120"/>
-              </a:rPr>
-              <a:t>identical verdict + path over repeated runs; no training data.</a:t>
-            </a:r>
-            <a:endParaRPr lang="en-US" sz="1350" dirty="0"/>
-          </a:p>
-        </p:txBody>
-      </p:sp>
-      <p:sp>
-        <p:nvSpPr>
-          <p:cNvPr id="10" name="Text 7"/>
-          <p:cNvSpPr txBox="1"/>
-          <p:nvPr/>
-        </p:nvSpPr>
-        <p:spPr>
-          <a:xfrm>
-            <a:off x="8549640" y="4846320"/>
-            <a:ext cx="3184855" cy="822960"/>
+            <a:pPr indent="0" marL="0">
+              <a:buNone/>
+            </a:pPr>
+            <a:r>
+              <a:rPr lang="en-US" sz="850" spc="150" kern="0" dirty="0">
+                <a:solidFill>
+                  <a:srgbClr val="9AA0A8"/>
+                </a:solidFill>
+                <a:latin typeface="Calibri" pitchFamily="34" charset="0"/>
+                <a:ea typeface="Calibri" pitchFamily="34" charset="-122"/>
+                <a:cs typeface="Calibri" pitchFamily="34" charset="-120"/>
+              </a:rPr>
+              <a:t>PDFSentry · Reachability over Recognition</a:t>
+            </a:r>
+            <a:endParaRPr lang="en-US" sz="850" dirty="0"/>
+          </a:p>
+        </p:txBody>
+      </p:sp>
+      <p:sp>
+        <p:nvSpPr>
+          <p:cNvPr id="15" name="Text 12"/>
+          <p:cNvSpPr txBox="1"/>
+          <p:nvPr/>
+        </p:nvSpPr>
+        <p:spPr>
+          <a:xfrm>
+            <a:off x="11323015" y="6510528"/>
+            <a:ext cx="457200" cy="256032"/>
           </a:xfrm>
           <a:prstGeom prst="rect">
             <a:avLst/>
@@ -8614,42 +10980,21 @@
           <a:bodyPr wrap="square" lIns="0" tIns="0" rIns="0" bIns="0" rtlCol="0" anchor="ctr"/>
           <a:lstStyle/>
           <a:p>
-            <a:pPr marL="342900" indent="-342900">
-              <a:lnSpc>
-                <a:spcPct val="110000"/>
-              </a:lnSpc>
-              <a:buSzPct val="100000"/>
-              <a:buChar char="•"/>
-            </a:pPr>
-            <a:r>
-              <a:rPr lang="en-US" sz="1350" b="1" dirty="0">
-                <a:solidFill>
-                  <a:srgbClr val="1B1E22"/>
-                </a:solidFill>
-                <a:latin typeface="Calibri" pitchFamily="34" charset="0"/>
-                <a:ea typeface="Calibri" pitchFamily="34" charset="-122"/>
-                <a:cs typeface="Calibri" pitchFamily="34" charset="-120"/>
-              </a:rPr>
-              <a:t>Fast  </a:t>
-            </a:r>
-            <a:pPr indent="0" marL="0">
-              <a:lnSpc>
-                <a:spcPct val="110000"/>
-              </a:lnSpc>
-              <a:buNone/>
-            </a:pPr>
-            <a:r>
-              <a:rPr lang="en-US" sz="1350" dirty="0">
-                <a:solidFill>
-                  <a:srgbClr val="3A3F46"/>
-                </a:solidFill>
-                <a:latin typeface="Calibri" pitchFamily="34" charset="0"/>
-                <a:ea typeface="Calibri" pitchFamily="34" charset="-122"/>
-                <a:cs typeface="Calibri" pitchFamily="34" charset="-120"/>
-              </a:rPr>
-              <a:t>~1.2 ms median per document — gateway-deployable.</a:t>
-            </a:r>
-            <a:endParaRPr lang="en-US" sz="1350" dirty="0"/>
+            <a:pPr algn="r" indent="0" marL="0">
+              <a:buNone/>
+            </a:pPr>
+            <a:r>
+              <a:rPr lang="en-US" sz="950" b="1" dirty="0">
+                <a:solidFill>
+                  <a:srgbClr val="6B7178"/>
+                </a:solidFill>
+                <a:latin typeface="Calibri" pitchFamily="34" charset="0"/>
+                <a:ea typeface="Calibri" pitchFamily="34" charset="-122"/>
+                <a:cs typeface="Calibri" pitchFamily="34" charset="-120"/>
+              </a:rPr>
+              <a:t>07</a:t>
+            </a:r>
+            <a:endParaRPr lang="en-US" sz="950" dirty="0"/>
           </a:p>
         </p:txBody>
       </p:sp>
@@ -8778,7 +11123,46 @@
         </p:nvSpPr>
         <p:spPr>
           <a:xfrm>
-            <a:off x="502920" y="822960"/>
+            <a:off x="512064" y="786384"/>
+            <a:ext cx="10058400" cy="256032"/>
+          </a:xfrm>
+          <a:prstGeom prst="rect">
+            <a:avLst/>
+          </a:prstGeom>
+          <a:noFill/>
+          <a:ln/>
+        </p:spPr>
+        <p:txBody>
+          <a:bodyPr wrap="square" lIns="0" tIns="0" rIns="0" bIns="0" rtlCol="0" anchor="ctr"/>
+          <a:lstStyle/>
+          <a:p>
+            <a:pPr indent="0" marL="0">
+              <a:buNone/>
+            </a:pPr>
+            <a:r>
+              <a:rPr lang="en-US" sz="1100" b="1" spc="400" kern="0" dirty="0">
+                <a:solidFill>
+                  <a:srgbClr val="2F8F82"/>
+                </a:solidFill>
+                <a:latin typeface="Calibri" pitchFamily="34" charset="0"/>
+                <a:ea typeface="Calibri" pitchFamily="34" charset="-122"/>
+                <a:cs typeface="Calibri" pitchFamily="34" charset="-120"/>
+              </a:rPr>
+              <a:t>ASSURANCE</a:t>
+            </a:r>
+            <a:endParaRPr lang="en-US" sz="1100" dirty="0"/>
+          </a:p>
+        </p:txBody>
+      </p:sp>
+      <p:sp>
+        <p:nvSpPr>
+          <p:cNvPr id="5" name="Text 3"/>
+          <p:cNvSpPr txBox="1"/>
+          <p:nvPr/>
+        </p:nvSpPr>
+        <p:spPr>
+          <a:xfrm>
+            <a:off x="502920" y="1078992"/>
             <a:ext cx="11155680" cy="731520"/>
           </a:xfrm>
           <a:prstGeom prst="rect">
@@ -8803,7 +11187,7 @@
                 <a:ea typeface="Arial Black" pitchFamily="34" charset="-122"/>
                 <a:cs typeface="Arial Black" pitchFamily="34" charset="-120"/>
               </a:rPr>
-              <a:t>Malware characteristics</a:t>
+              <a:t>Pillar 03 · Assurance</a:t>
             </a:r>
             <a:endParaRPr lang="en-US" sz="3200" dirty="0"/>
           </a:p>
@@ -8811,56 +11195,72 @@
       </p:sp>
       <p:sp>
         <p:nvSpPr>
-          <p:cNvPr id="5" name="Text 3"/>
-          <p:cNvSpPr txBox="1"/>
-          <p:nvPr/>
-        </p:nvSpPr>
-        <p:spPr>
-          <a:xfrm>
-            <a:off x="548640" y="1536192"/>
-            <a:ext cx="10881360" cy="548640"/>
-          </a:xfrm>
-          <a:prstGeom prst="rect">
-            <a:avLst/>
-          </a:prstGeom>
-          <a:noFill/>
-          <a:ln/>
-        </p:spPr>
-        <p:txBody>
-          <a:bodyPr wrap="square" lIns="0" tIns="0" rIns="0" bIns="0" rtlCol="0" anchor="ctr"/>
-          <a:lstStyle/>
-          <a:p>
-            <a:pPr indent="0" marL="0">
-              <a:lnSpc>
-                <a:spcPct val="105000"/>
-              </a:lnSpc>
-              <a:buNone/>
-            </a:pPr>
-            <a:r>
-              <a:rPr lang="en-US" sz="1500" dirty="0">
-                <a:solidFill>
-                  <a:srgbClr val="3A3F46"/>
-                </a:solidFill>
-                <a:latin typeface="Calibri" pitchFamily="34" charset="0"/>
-                <a:ea typeface="Calibri" pitchFamily="34" charset="-122"/>
-                <a:cs typeface="Calibri" pitchFamily="34" charset="-120"/>
-              </a:rPr>
-              <a:t>What evasive PDFs do to survive: automate, conceal, and camouflage as ordinary compression.</a:t>
-            </a:r>
-            <a:endParaRPr lang="en-US" sz="1500" dirty="0"/>
-          </a:p>
-        </p:txBody>
-      </p:sp>
-      <p:sp>
-        <p:nvSpPr>
-          <p:cNvPr id="6" name="Text 4"/>
-          <p:cNvSpPr txBox="1"/>
-          <p:nvPr/>
-        </p:nvSpPr>
-        <p:spPr>
-          <a:xfrm>
-            <a:off x="566928" y="2194560"/>
-            <a:ext cx="10881360" cy="4297680"/>
+          <p:cNvPr id="6" name="Shape 4"/>
+          <p:cNvSpPr/>
+          <p:nvPr/>
+        </p:nvSpPr>
+        <p:spPr>
+          <a:xfrm>
+            <a:off x="457200" y="2103120"/>
+            <a:ext cx="7863840" cy="4584070"/>
+          </a:xfrm>
+          <a:prstGeom prst="roundRect">
+            <a:avLst>
+              <a:gd name="adj" fmla="val 997"/>
+            </a:avLst>
+          </a:prstGeom>
+          <a:solidFill>
+            <a:srgbClr val="0F141B"/>
+          </a:solidFill>
+          <a:ln w="12700">
+            <a:solidFill>
+              <a:srgbClr val="2B3542"/>
+            </a:solidFill>
+            <a:prstDash val="solid"/>
+          </a:ln>
+          <a:effectLst>
+            <a:outerShdw sx="100000" sy="100000" kx="0" ky="0" algn="bl" rotWithShape="0" blurRad="127000" dist="50800" dir="5400000">
+              <a:srgbClr val="7c8795">
+                <a:alpha val="40000"/>
+              </a:srgbClr>
+            </a:outerShdw>
+          </a:effectLst>
+        </p:spPr>
+      </p:sp>
+      <p:pic>
+        <p:nvPicPr>
+          <p:cNvPr id="7" name="Image 0" descr="/home/claude/PDFSentry/deck/assets/dash_assurance.jpg">    </p:cNvPr>
+          <p:cNvPicPr>
+            <a:picLocks noChangeAspect="1"/>
+          </p:cNvPicPr>
+          <p:nvPr/>
+        </p:nvPicPr>
+        <p:blipFill>
+          <a:blip r:embed="rId2"/>
+          <a:stretch>
+            <a:fillRect/>
+          </a:stretch>
+        </p:blipFill>
+        <p:spPr>
+          <a:xfrm>
+            <a:off x="548640" y="2194560"/>
+            <a:ext cx="7680960" cy="4401190"/>
+          </a:xfrm>
+          <a:prstGeom prst="rect">
+            <a:avLst/>
+          </a:prstGeom>
+        </p:spPr>
+      </p:pic>
+      <p:sp>
+        <p:nvSpPr>
+          <p:cNvPr id="8" name="Text 5"/>
+          <p:cNvSpPr txBox="1"/>
+          <p:nvPr/>
+        </p:nvSpPr>
+        <p:spPr>
+          <a:xfrm>
+            <a:off x="8549640" y="2331720"/>
+            <a:ext cx="3184855" cy="960120"/>
           </a:xfrm>
           <a:prstGeom prst="rect">
             <a:avLst/>
@@ -8880,7 +11280,7 @@
               <a:buChar char="•"/>
             </a:pPr>
             <a:r>
-              <a:rPr lang="en-US" sz="1500" b="1" dirty="0">
+              <a:rPr lang="en-US" sz="1350" b="1" dirty="0">
                 <a:solidFill>
                   <a:srgbClr val="1B1E22"/>
                 </a:solidFill>
@@ -8888,19 +11288,16 @@
                 <a:ea typeface="Calibri" pitchFamily="34" charset="-122"/>
                 <a:cs typeface="Calibri" pitchFamily="34" charset="-120"/>
               </a:rPr>
-              <a:t>Auto-execution  </a:t>
+              <a:t>Certificate  </a:t>
             </a:r>
             <a:pPr indent="0" marL="0">
               <a:lnSpc>
                 <a:spcPct val="112000"/>
               </a:lnSpc>
-              <a:spcAft>
-                <a:spcPts val="1000"/>
-              </a:spcAft>
-              <a:buNone/>
-            </a:pPr>
-            <a:r>
-              <a:rPr lang="en-US" sz="1500" dirty="0">
+              <a:buNone/>
+            </a:pPr>
+            <a:r>
+              <a:rPr lang="en-US" sz="1350" dirty="0">
                 <a:solidFill>
                   <a:srgbClr val="3A3F46"/>
                 </a:solidFill>
@@ -8908,10 +11305,32 @@
                 <a:ea typeface="Calibri" pitchFamily="34" charset="-122"/>
                 <a:cs typeface="Calibri" pitchFamily="34" charset="-120"/>
               </a:rPr>
-              <a:t>A dangerous action (JavaScript, Launch, EmbeddedFile) wired to fire on open via /OpenAction, /AA or /Names.</a:t>
-            </a:r>
-            <a:endParaRPr lang="en-US" sz="1500" dirty="0"/>
-          </a:p>
+              <a:t>Every alarm ships a minimal witness: catalog → trigger → dangerous node.</a:t>
+            </a:r>
+            <a:endParaRPr lang="en-US" sz="1350" dirty="0"/>
+          </a:p>
+        </p:txBody>
+      </p:sp>
+      <p:sp>
+        <p:nvSpPr>
+          <p:cNvPr id="9" name="Text 6"/>
+          <p:cNvSpPr txBox="1"/>
+          <p:nvPr/>
+        </p:nvSpPr>
+        <p:spPr>
+          <a:xfrm>
+            <a:off x="8549640" y="3291840"/>
+            <a:ext cx="3184855" cy="960120"/>
+          </a:xfrm>
+          <a:prstGeom prst="rect">
+            <a:avLst/>
+          </a:prstGeom>
+          <a:noFill/>
+          <a:ln/>
+        </p:spPr>
+        <p:txBody>
+          <a:bodyPr wrap="square" lIns="0" tIns="0" rIns="0" bIns="0" rtlCol="0" anchor="t"/>
+          <a:lstStyle/>
           <a:p>
             <a:pPr marL="342900" indent="-342900">
               <a:lnSpc>
@@ -8921,7 +11340,7 @@
               <a:buChar char="•"/>
             </a:pPr>
             <a:r>
-              <a:rPr lang="en-US" sz="1500" b="1" dirty="0">
+              <a:rPr lang="en-US" sz="1350" b="1" dirty="0">
                 <a:solidFill>
                   <a:srgbClr val="1B1E22"/>
                 </a:solidFill>
@@ -8929,19 +11348,16 @@
                 <a:ea typeface="Calibri" pitchFamily="34" charset="-122"/>
                 <a:cs typeface="Calibri" pitchFamily="34" charset="-120"/>
               </a:rPr>
-              <a:t>Concealment  </a:t>
+              <a:t>0 / 285  </a:t>
             </a:r>
             <a:pPr indent="0" marL="0">
               <a:lnSpc>
                 <a:spcPct val="112000"/>
               </a:lnSpc>
-              <a:spcAft>
-                <a:spcPts val="1000"/>
-              </a:spcAft>
-              <a:buNone/>
-            </a:pPr>
-            <a:r>
-              <a:rPr lang="en-US" sz="1500" dirty="0">
+              <a:buNone/>
+            </a:pPr>
+            <a:r>
+              <a:rPr lang="en-US" sz="1350" dirty="0">
                 <a:solidFill>
                   <a:srgbClr val="3A3F46"/>
                 </a:solidFill>
@@ -8949,10 +11365,32 @@
                 <a:ea typeface="Calibri" pitchFamily="34" charset="-122"/>
                 <a:cs typeface="Calibri" pitchFamily="34" charset="-120"/>
               </a:rPr>
-              <a:t>The payload hidden inside a compressed object stream — present in behaviour, invisible to a token count.</a:t>
-            </a:r>
-            <a:endParaRPr lang="en-US" sz="1500" dirty="0"/>
-          </a:p>
+              <a:t>false positives on the benign corpus (auto-exec gate).</a:t>
+            </a:r>
+            <a:endParaRPr lang="en-US" sz="1350" dirty="0"/>
+          </a:p>
+        </p:txBody>
+      </p:sp>
+      <p:sp>
+        <p:nvSpPr>
+          <p:cNvPr id="10" name="Text 7"/>
+          <p:cNvSpPr txBox="1"/>
+          <p:nvPr/>
+        </p:nvSpPr>
+        <p:spPr>
+          <a:xfrm>
+            <a:off x="8549640" y="4251960"/>
+            <a:ext cx="3184855" cy="960120"/>
+          </a:xfrm>
+          <a:prstGeom prst="rect">
+            <a:avLst/>
+          </a:prstGeom>
+          <a:noFill/>
+          <a:ln/>
+        </p:spPr>
+        <p:txBody>
+          <a:bodyPr wrap="square" lIns="0" tIns="0" rIns="0" bIns="0" rtlCol="0" anchor="t"/>
+          <a:lstStyle/>
           <a:p>
             <a:pPr marL="342900" indent="-342900">
               <a:lnSpc>
@@ -8962,7 +11400,7 @@
               <a:buChar char="•"/>
             </a:pPr>
             <a:r>
-              <a:rPr lang="en-US" sz="1500" b="1" dirty="0">
+              <a:rPr lang="en-US" sz="1350" b="1" dirty="0">
                 <a:solidFill>
                   <a:srgbClr val="1B1E22"/>
                 </a:solidFill>
@@ -8970,19 +11408,16 @@
                 <a:ea typeface="Calibri" pitchFamily="34" charset="-122"/>
                 <a:cs typeface="Calibri" pitchFamily="34" charset="-120"/>
               </a:rPr>
-              <a:t>Byte camouflage  </a:t>
+              <a:t>Deterministic  </a:t>
             </a:r>
             <a:pPr indent="0" marL="0">
               <a:lnSpc>
                 <a:spcPct val="112000"/>
               </a:lnSpc>
-              <a:spcAft>
-                <a:spcPts val="1000"/>
-              </a:spcAft>
-              <a:buNone/>
-            </a:pPr>
-            <a:r>
-              <a:rPr lang="en-US" sz="1500" dirty="0">
+              <a:buNone/>
+            </a:pPr>
+            <a:r>
+              <a:rPr lang="en-US" sz="1350" dirty="0">
                 <a:solidFill>
                   <a:srgbClr val="3A3F46"/>
                 </a:solidFill>
@@ -8990,10 +11425,32 @@
                 <a:ea typeface="Calibri" pitchFamily="34" charset="-122"/>
                 <a:cs typeface="Calibri" pitchFamily="34" charset="-120"/>
               </a:rPr>
-              <a:t>Elevated /FlateDecode and entropy make the file read as “just compressed” to a statistical model.</a:t>
-            </a:r>
-            <a:endParaRPr lang="en-US" sz="1500" dirty="0"/>
-          </a:p>
+              <a:t>identical verdict + path over repeated runs; no training data.</a:t>
+            </a:r>
+            <a:endParaRPr lang="en-US" sz="1350" dirty="0"/>
+          </a:p>
+        </p:txBody>
+      </p:sp>
+      <p:sp>
+        <p:nvSpPr>
+          <p:cNvPr id="11" name="Text 8"/>
+          <p:cNvSpPr txBox="1"/>
+          <p:nvPr/>
+        </p:nvSpPr>
+        <p:spPr>
+          <a:xfrm>
+            <a:off x="8549640" y="5212080"/>
+            <a:ext cx="3184855" cy="960120"/>
+          </a:xfrm>
+          <a:prstGeom prst="rect">
+            <a:avLst/>
+          </a:prstGeom>
+          <a:noFill/>
+          <a:ln/>
+        </p:spPr>
+        <p:txBody>
+          <a:bodyPr wrap="square" lIns="0" tIns="0" rIns="0" bIns="0" rtlCol="0" anchor="t"/>
+          <a:lstStyle/>
           <a:p>
             <a:pPr marL="342900" indent="-342900">
               <a:lnSpc>
@@ -9003,7 +11460,7 @@
               <a:buChar char="•"/>
             </a:pPr>
             <a:r>
-              <a:rPr lang="en-US" sz="1500" b="1" dirty="0">
+              <a:rPr lang="en-US" sz="1350" b="1" dirty="0">
                 <a:solidFill>
                   <a:srgbClr val="1B1E22"/>
                 </a:solidFill>
@@ -9011,19 +11468,16 @@
                 <a:ea typeface="Calibri" pitchFamily="34" charset="-122"/>
                 <a:cs typeface="Calibri" pitchFamily="34" charset="-120"/>
               </a:rPr>
-              <a:t>Indirection  </a:t>
+              <a:t>Fast  </a:t>
             </a:r>
             <a:pPr indent="0" marL="0">
               <a:lnSpc>
                 <a:spcPct val="112000"/>
               </a:lnSpc>
-              <a:spcAft>
-                <a:spcPts val="1000"/>
-              </a:spcAft>
-              <a:buNone/>
-            </a:pPr>
-            <a:r>
-              <a:rPr lang="en-US" sz="1500" dirty="0">
+              <a:buNone/>
+            </a:pPr>
+            <a:r>
+              <a:rPr lang="en-US" sz="1350" dirty="0">
                 <a:solidFill>
                   <a:srgbClr val="3A3F46"/>
                 </a:solidFill>
@@ -9031,38 +11485,90 @@
                 <a:ea typeface="Calibri" pitchFamily="34" charset="-122"/>
                 <a:cs typeface="Calibri" pitchFamily="34" charset="-120"/>
               </a:rPr>
-              <a:t>Action chains (GoTo → Next) reach the payload at depth, defeating shallow pattern checks.</a:t>
-            </a:r>
-            <a:endParaRPr lang="en-US" sz="1500" dirty="0"/>
-          </a:p>
-        </p:txBody>
-      </p:sp>
-      <p:pic>
-        <p:nvPicPr>
-          <p:cNvPr id="7" name="Image 0" descr="/home/claude/PDFSentry/deck/assets/orn_ring.png">    </p:cNvPr>
-          <p:cNvPicPr>
-            <a:picLocks noChangeAspect="1"/>
-          </p:cNvPicPr>
-          <p:nvPr/>
-        </p:nvPicPr>
-        <p:blipFill>
-          <a:blip r:embed="rId2">
-            <a:alphaModFix amt="45000"/>
-          </a:blip>
-          <a:stretch>
-            <a:fillRect/>
-          </a:stretch>
-        </p:blipFill>
-        <p:spPr>
-          <a:xfrm>
-            <a:off x="10561320" y="5257800"/>
-            <a:ext cx="1143000" cy="1143000"/>
-          </a:xfrm>
-          <a:prstGeom prst="rect">
-            <a:avLst/>
-          </a:prstGeom>
-        </p:spPr>
-      </p:pic>
+              <a:t>~1.2 ms median per document — gateway-deployable.</a:t>
+            </a:r>
+            <a:endParaRPr lang="en-US" sz="1350" dirty="0"/>
+          </a:p>
+        </p:txBody>
+      </p:sp>
+      <p:sp>
+        <p:nvSpPr>
+          <p:cNvPr id="12" name="Text 9"/>
+          <p:cNvSpPr txBox="1"/>
+          <p:nvPr/>
+        </p:nvSpPr>
+        <p:spPr>
+          <a:xfrm>
+            <a:off x="502920" y="6528816"/>
+            <a:ext cx="6400800" cy="237744"/>
+          </a:xfrm>
+          <a:prstGeom prst="rect">
+            <a:avLst/>
+          </a:prstGeom>
+          <a:noFill/>
+          <a:ln/>
+        </p:spPr>
+        <p:txBody>
+          <a:bodyPr wrap="square" lIns="0" tIns="0" rIns="0" bIns="0" rtlCol="0" anchor="ctr"/>
+          <a:lstStyle/>
+          <a:p>
+            <a:pPr indent="0" marL="0">
+              <a:buNone/>
+            </a:pPr>
+            <a:r>
+              <a:rPr lang="en-US" sz="850" spc="150" kern="0" dirty="0">
+                <a:solidFill>
+                  <a:srgbClr val="9AA0A8"/>
+                </a:solidFill>
+                <a:latin typeface="Calibri" pitchFamily="34" charset="0"/>
+                <a:ea typeface="Calibri" pitchFamily="34" charset="-122"/>
+                <a:cs typeface="Calibri" pitchFamily="34" charset="-120"/>
+              </a:rPr>
+              <a:t>PDFSentry · Reachability over Recognition</a:t>
+            </a:r>
+            <a:endParaRPr lang="en-US" sz="850" dirty="0"/>
+          </a:p>
+        </p:txBody>
+      </p:sp>
+      <p:sp>
+        <p:nvSpPr>
+          <p:cNvPr id="13" name="Text 10"/>
+          <p:cNvSpPr txBox="1"/>
+          <p:nvPr/>
+        </p:nvSpPr>
+        <p:spPr>
+          <a:xfrm>
+            <a:off x="11323015" y="6510528"/>
+            <a:ext cx="457200" cy="256032"/>
+          </a:xfrm>
+          <a:prstGeom prst="rect">
+            <a:avLst/>
+          </a:prstGeom>
+          <a:noFill/>
+          <a:ln/>
+        </p:spPr>
+        <p:txBody>
+          <a:bodyPr wrap="square" lIns="0" tIns="0" rIns="0" bIns="0" rtlCol="0" anchor="ctr"/>
+          <a:lstStyle/>
+          <a:p>
+            <a:pPr algn="r" indent="0" marL="0">
+              <a:buNone/>
+            </a:pPr>
+            <a:r>
+              <a:rPr lang="en-US" sz="950" b="1" dirty="0">
+                <a:solidFill>
+                  <a:srgbClr val="6B7178"/>
+                </a:solidFill>
+                <a:latin typeface="Calibri" pitchFamily="34" charset="0"/>
+                <a:ea typeface="Calibri" pitchFamily="34" charset="-122"/>
+                <a:cs typeface="Calibri" pitchFamily="34" charset="-120"/>
+              </a:rPr>
+              <a:t>08</a:t>
+            </a:r>
+            <a:endParaRPr lang="en-US" sz="950" dirty="0"/>
+          </a:p>
+        </p:txBody>
+      </p:sp>
     </p:spTree>
   </p:cSld>
   <p:clrMapOvr>
@@ -9188,7 +11694,46 @@
         </p:nvSpPr>
         <p:spPr>
           <a:xfrm>
-            <a:off x="502920" y="822960"/>
+            <a:off x="512064" y="786384"/>
+            <a:ext cx="10058400" cy="256032"/>
+          </a:xfrm>
+          <a:prstGeom prst="rect">
+            <a:avLst/>
+          </a:prstGeom>
+          <a:noFill/>
+          <a:ln/>
+        </p:spPr>
+        <p:txBody>
+          <a:bodyPr wrap="square" lIns="0" tIns="0" rIns="0" bIns="0" rtlCol="0" anchor="ctr"/>
+          <a:lstStyle/>
+          <a:p>
+            <a:pPr indent="0" marL="0">
+              <a:buNone/>
+            </a:pPr>
+            <a:r>
+              <a:rPr lang="en-US" sz="1100" b="1" spc="400" kern="0" dirty="0">
+                <a:solidFill>
+                  <a:srgbClr val="2F8F82"/>
+                </a:solidFill>
+                <a:latin typeface="Calibri" pitchFamily="34" charset="0"/>
+                <a:ea typeface="Calibri" pitchFamily="34" charset="-122"/>
+                <a:cs typeface="Calibri" pitchFamily="34" charset="-120"/>
+              </a:rPr>
+              <a:t>CHARACTERISTICS</a:t>
+            </a:r>
+            <a:endParaRPr lang="en-US" sz="1100" dirty="0"/>
+          </a:p>
+        </p:txBody>
+      </p:sp>
+      <p:sp>
+        <p:nvSpPr>
+          <p:cNvPr id="5" name="Text 3"/>
+          <p:cNvSpPr txBox="1"/>
+          <p:nvPr/>
+        </p:nvSpPr>
+        <p:spPr>
+          <a:xfrm>
+            <a:off x="502920" y="1078992"/>
             <a:ext cx="11155680" cy="731520"/>
           </a:xfrm>
           <a:prstGeom prst="rect">
@@ -9213,7 +11758,7 @@
                 <a:ea typeface="Arial Black" pitchFamily="34" charset="-122"/>
                 <a:cs typeface="Arial Black" pitchFamily="34" charset="-120"/>
               </a:rPr>
-              <a:t>Indicators of Compromise (IoCs)</a:t>
+              <a:t>Malware characteristics</a:t>
             </a:r>
             <a:endParaRPr lang="en-US" sz="3200" dirty="0"/>
           </a:p>
@@ -9221,13 +11766,13 @@
       </p:sp>
       <p:sp>
         <p:nvSpPr>
-          <p:cNvPr id="5" name="Text 3"/>
-          <p:cNvSpPr txBox="1"/>
-          <p:nvPr/>
-        </p:nvSpPr>
-        <p:spPr>
-          <a:xfrm>
-            <a:off x="548640" y="1536192"/>
+          <p:cNvPr id="6" name="Text 4"/>
+          <p:cNvSpPr txBox="1"/>
+          <p:nvPr/>
+        </p:nvSpPr>
+        <p:spPr>
+          <a:xfrm>
+            <a:off x="548640" y="1783080"/>
             <a:ext cx="10881360" cy="548640"/>
           </a:xfrm>
           <a:prstGeom prst="rect">
@@ -9247,7 +11792,7 @@
               <a:buNone/>
             </a:pPr>
             <a:r>
-              <a:rPr lang="en-US" sz="1500" dirty="0">
+              <a:rPr lang="en-US" sz="1550" dirty="0">
                 <a:solidFill>
                   <a:srgbClr val="3A3F46"/>
                 </a:solidFill>
@@ -9255,22 +11800,22 @@
                 <a:ea typeface="Calibri" pitchFamily="34" charset="-122"/>
                 <a:cs typeface="Calibri" pitchFamily="34" charset="-120"/>
               </a:rPr>
-              <a:t>Structural, checkable indicators — each maps to a reachability feature, not a fragile byte signature.</a:t>
-            </a:r>
-            <a:endParaRPr lang="en-US" sz="1500" dirty="0"/>
-          </a:p>
-        </p:txBody>
-      </p:sp>
-      <p:sp>
-        <p:nvSpPr>
-          <p:cNvPr id="6" name="Text 4"/>
-          <p:cNvSpPr txBox="1"/>
-          <p:nvPr/>
-        </p:nvSpPr>
-        <p:spPr>
-          <a:xfrm>
-            <a:off x="566928" y="2194560"/>
-            <a:ext cx="10881360" cy="4297680"/>
+              <a:t>What evasive PDFs do to survive: automate, conceal, and camouflage as ordinary compression.</a:t>
+            </a:r>
+            <a:endParaRPr lang="en-US" sz="1550" dirty="0"/>
+          </a:p>
+        </p:txBody>
+      </p:sp>
+      <p:sp>
+        <p:nvSpPr>
+          <p:cNvPr id="7" name="Text 5"/>
+          <p:cNvSpPr txBox="1"/>
+          <p:nvPr/>
+        </p:nvSpPr>
+        <p:spPr>
+          <a:xfrm>
+            <a:off x="566928" y="2423160"/>
+            <a:ext cx="10881360" cy="2788920"/>
           </a:xfrm>
           <a:prstGeom prst="rect">
             <a:avLst/>
@@ -9284,13 +11829,13 @@
           <a:p>
             <a:pPr marL="342900" indent="-342900">
               <a:lnSpc>
-                <a:spcPct val="112000"/>
+                <a:spcPct val="118000"/>
               </a:lnSpc>
               <a:buSzPct val="100000"/>
               <a:buChar char="•"/>
             </a:pPr>
             <a:r>
-              <a:rPr lang="en-US" sz="1500" b="1" dirty="0">
+              <a:rPr lang="en-US" sz="1600" b="1" dirty="0">
                 <a:solidFill>
                   <a:srgbClr val="1B1E22"/>
                 </a:solidFill>
@@ -9298,19 +11843,19 @@
                 <a:ea typeface="Calibri" pitchFamily="34" charset="-122"/>
                 <a:cs typeface="Calibri" pitchFamily="34" charset="-120"/>
               </a:rPr>
-              <a:t>Reachable auto-trigger  </a:t>
+              <a:t>Auto-execution  </a:t>
             </a:r>
             <a:pPr indent="0" marL="0">
               <a:lnSpc>
-                <a:spcPct val="112000"/>
+                <a:spcPct val="118000"/>
               </a:lnSpc>
               <a:spcAft>
-                <a:spcPts val="1000"/>
+                <a:spcPts val="1300"/>
               </a:spcAft>
               <a:buNone/>
             </a:pPr>
             <a:r>
-              <a:rPr lang="en-US" sz="1500" dirty="0">
+              <a:rPr lang="en-US" sz="1600" dirty="0">
                 <a:solidFill>
                   <a:srgbClr val="3A3F46"/>
                 </a:solidFill>
@@ -9318,20 +11863,20 @@
                 <a:ea typeface="Calibri" pitchFamily="34" charset="-122"/>
                 <a:cs typeface="Calibri" pitchFamily="34" charset="-120"/>
               </a:rPr>
-              <a:t>/OpenAction | /AA | /Names/JavaScript with a path to /JS, /Launch or /EmbeddedFile → ACTIVE_ONOPEN.</a:t>
-            </a:r>
-            <a:endParaRPr lang="en-US" sz="1500" dirty="0"/>
+              <a:t>A dangerous action (JavaScript, Launch, EmbeddedFile) wired to fire on open via /OpenAction, /AA or /Names.</a:t>
+            </a:r>
+            <a:endParaRPr lang="en-US" sz="1600" dirty="0"/>
           </a:p>
           <a:p>
             <a:pPr marL="342900" indent="-342900">
               <a:lnSpc>
-                <a:spcPct val="112000"/>
+                <a:spcPct val="118000"/>
               </a:lnSpc>
               <a:buSzPct val="100000"/>
               <a:buChar char="•"/>
             </a:pPr>
             <a:r>
-              <a:rPr lang="en-US" sz="1500" b="1" dirty="0">
+              <a:rPr lang="en-US" sz="1600" b="1" dirty="0">
                 <a:solidFill>
                   <a:srgbClr val="1B1E22"/>
                 </a:solidFill>
@@ -9339,19 +11884,19 @@
                 <a:ea typeface="Calibri" pitchFamily="34" charset="-122"/>
                 <a:cs typeface="Calibri" pitchFamily="34" charset="-120"/>
               </a:rPr>
-              <a:t>Hidden-gap signature  </a:t>
+              <a:t>Concealment  </a:t>
             </a:r>
             <a:pPr indent="0" marL="0">
               <a:lnSpc>
-                <a:spcPct val="112000"/>
+                <a:spcPct val="118000"/>
               </a:lnSpc>
               <a:spcAft>
-                <a:spcPts val="1000"/>
+                <a:spcPts val="1300"/>
               </a:spcAft>
               <a:buNone/>
             </a:pPr>
             <a:r>
-              <a:rPr lang="en-US" sz="1500" dirty="0">
+              <a:rPr lang="en-US" sz="1600" dirty="0">
                 <a:solidFill>
                   <a:srgbClr val="3A3F46"/>
                 </a:solidFill>
@@ -9359,20 +11904,20 @@
                 <a:ea typeface="Calibri" pitchFamily="34" charset="-122"/>
                 <a:cs typeface="Calibri" pitchFamily="34" charset="-120"/>
               </a:rPr>
-              <a:t>An ACTIVE capability whose naive token count is 0 — a contradiction only concealment produces.</a:t>
-            </a:r>
-            <a:endParaRPr lang="en-US" sz="1500" dirty="0"/>
+              <a:t>The payload hidden inside a compressed object stream — present in behaviour, invisible to a token count.</a:t>
+            </a:r>
+            <a:endParaRPr lang="en-US" sz="1600" dirty="0"/>
           </a:p>
           <a:p>
             <a:pPr marL="342900" indent="-342900">
               <a:lnSpc>
-                <a:spcPct val="112000"/>
+                <a:spcPct val="118000"/>
               </a:lnSpc>
               <a:buSzPct val="100000"/>
               <a:buChar char="•"/>
             </a:pPr>
             <a:r>
-              <a:rPr lang="en-US" sz="1500" b="1" dirty="0">
+              <a:rPr lang="en-US" sz="1600" b="1" dirty="0">
                 <a:solidFill>
                   <a:srgbClr val="1B1E22"/>
                 </a:solidFill>
@@ -9380,19 +11925,19 @@
                 <a:ea typeface="Calibri" pitchFamily="34" charset="-122"/>
                 <a:cs typeface="Calibri" pitchFamily="34" charset="-120"/>
               </a:rPr>
-              <a:t>Object-stream hiding  </a:t>
+              <a:t>Byte camouflage  </a:t>
             </a:r>
             <a:pPr indent="0" marL="0">
               <a:lnSpc>
-                <a:spcPct val="112000"/>
+                <a:spcPct val="118000"/>
               </a:lnSpc>
               <a:spcAft>
-                <a:spcPts val="1000"/>
+                <a:spcPts val="1300"/>
               </a:spcAft>
               <a:buNone/>
             </a:pPr>
             <a:r>
-              <a:rPr lang="en-US" sz="1500" dirty="0">
+              <a:rPr lang="en-US" sz="1600" dirty="0">
                 <a:solidFill>
                   <a:srgbClr val="3A3F46"/>
                 </a:solidFill>
@@ -9400,20 +11945,20 @@
                 <a:ea typeface="Calibri" pitchFamily="34" charset="-122"/>
                 <a:cs typeface="Calibri" pitchFamily="34" charset="-120"/>
               </a:rPr>
-              <a:t>JavaScript wrapped in an ObjStm; /FlateDecode count far above the benign median (≈ 12 vs 7).</a:t>
-            </a:r>
-            <a:endParaRPr lang="en-US" sz="1500" dirty="0"/>
+              <a:t>Elevated /FlateDecode and entropy make the file read as “just compressed” to a statistical model.</a:t>
+            </a:r>
+            <a:endParaRPr lang="en-US" sz="1600" dirty="0"/>
           </a:p>
           <a:p>
             <a:pPr marL="342900" indent="-342900">
               <a:lnSpc>
-                <a:spcPct val="112000"/>
+                <a:spcPct val="118000"/>
               </a:lnSpc>
               <a:buSzPct val="100000"/>
               <a:buChar char="•"/>
             </a:pPr>
             <a:r>
-              <a:rPr lang="en-US" sz="1500" b="1" dirty="0">
+              <a:rPr lang="en-US" sz="1600" b="1" dirty="0">
                 <a:solidFill>
                   <a:srgbClr val="1B1E22"/>
                 </a:solidFill>
@@ -9421,19 +11966,19 @@
                 <a:ea typeface="Calibri" pitchFamily="34" charset="-122"/>
                 <a:cs typeface="Calibri" pitchFamily="34" charset="-120"/>
               </a:rPr>
-              <a:t>Statistical tells  </a:t>
+              <a:t>Indirection  </a:t>
             </a:r>
             <a:pPr indent="0" marL="0">
               <a:lnSpc>
-                <a:spcPct val="112000"/>
+                <a:spcPct val="118000"/>
               </a:lnSpc>
               <a:spcAft>
-                <a:spcPts val="1000"/>
+                <a:spcPts val="1300"/>
               </a:spcAft>
               <a:buNone/>
             </a:pPr>
             <a:r>
-              <a:rPr lang="en-US" sz="1500" dirty="0">
+              <a:rPr lang="en-US" sz="1600" dirty="0">
                 <a:solidFill>
                   <a:srgbClr val="3A3F46"/>
                 </a:solidFill>
@@ -9441,79 +11986,435 @@
                 <a:ea typeface="Calibri" pitchFamily="34" charset="-122"/>
                 <a:cs typeface="Calibri" pitchFamily="34" charset="-120"/>
               </a:rPr>
-              <a:t>Byte entropy &gt; 7.9 and file size well above benign, with a JS token count of 0.</a:t>
-            </a:r>
-            <a:endParaRPr lang="en-US" sz="1500" dirty="0"/>
-          </a:p>
-          <a:p>
-            <a:pPr marL="342900" indent="-342900">
+              <a:t>Action chains (GoTo → Next) reach the payload at depth, defeating shallow pattern checks.</a:t>
+            </a:r>
+            <a:endParaRPr lang="en-US" sz="1600" dirty="0"/>
+          </a:p>
+        </p:txBody>
+      </p:sp>
+      <p:sp>
+        <p:nvSpPr>
+          <p:cNvPr id="8" name="Shape 6"/>
+          <p:cNvSpPr/>
+          <p:nvPr/>
+        </p:nvSpPr>
+        <p:spPr>
+          <a:xfrm>
+            <a:off x="548640" y="5074920"/>
+            <a:ext cx="3383280" cy="1097280"/>
+          </a:xfrm>
+          <a:prstGeom prst="roundRect">
+            <a:avLst>
+              <a:gd name="adj" fmla="val 5833"/>
+            </a:avLst>
+          </a:prstGeom>
+          <a:solidFill>
+            <a:srgbClr val="EEF0F2"/>
+          </a:solidFill>
+          <a:ln w="9525">
+            <a:solidFill>
+              <a:srgbClr val="CED2D8"/>
+            </a:solidFill>
+            <a:prstDash val="solid"/>
+          </a:ln>
+          <a:effectLst>
+            <a:outerShdw sx="100000" sy="100000" kx="0" ky="0" algn="bl" rotWithShape="0" blurRad="101600" dist="38100" dir="5400000">
+              <a:srgbClr val="9aa0a8">
+                <a:alpha val="30000"/>
+              </a:srgbClr>
+            </a:outerShdw>
+          </a:effectLst>
+        </p:spPr>
+      </p:sp>
+      <p:sp>
+        <p:nvSpPr>
+          <p:cNvPr id="9" name="Text 7"/>
+          <p:cNvSpPr txBox="1"/>
+          <p:nvPr/>
+        </p:nvSpPr>
+        <p:spPr>
+          <a:xfrm>
+            <a:off x="804672" y="5230368"/>
+            <a:ext cx="2871216" cy="548640"/>
+          </a:xfrm>
+          <a:prstGeom prst="rect">
+            <a:avLst/>
+          </a:prstGeom>
+          <a:noFill/>
+          <a:ln/>
+        </p:spPr>
+        <p:txBody>
+          <a:bodyPr wrap="square" lIns="0" tIns="0" rIns="0" bIns="0" rtlCol="0" anchor="ctr"/>
+          <a:lstStyle/>
+          <a:p>
+            <a:pPr indent="0" marL="0">
+              <a:buNone/>
+            </a:pPr>
+            <a:r>
+              <a:rPr lang="en-US" sz="2700" dirty="0">
+                <a:solidFill>
+                  <a:srgbClr val="1B1E22"/>
+                </a:solidFill>
+                <a:latin typeface="Arial Black" pitchFamily="34" charset="0"/>
+                <a:ea typeface="Arial Black" pitchFamily="34" charset="-122"/>
+                <a:cs typeface="Arial Black" pitchFamily="34" charset="-120"/>
+              </a:rPr>
+              <a:t>entropy &gt; 7.9</a:t>
+            </a:r>
+            <a:endParaRPr lang="en-US" sz="2700" dirty="0"/>
+          </a:p>
+        </p:txBody>
+      </p:sp>
+      <p:sp>
+        <p:nvSpPr>
+          <p:cNvPr id="10" name="Text 8"/>
+          <p:cNvSpPr txBox="1"/>
+          <p:nvPr/>
+        </p:nvSpPr>
+        <p:spPr>
+          <a:xfrm>
+            <a:off x="804672" y="5769864"/>
+            <a:ext cx="2871216" cy="365760"/>
+          </a:xfrm>
+          <a:prstGeom prst="rect">
+            <a:avLst/>
+          </a:prstGeom>
+          <a:noFill/>
+          <a:ln/>
+        </p:spPr>
+        <p:txBody>
+          <a:bodyPr wrap="square" lIns="0" tIns="0" rIns="0" bIns="0" rtlCol="0" anchor="ctr"/>
+          <a:lstStyle/>
+          <a:p>
+            <a:pPr indent="0" marL="0">
               <a:lnSpc>
-                <a:spcPct val="112000"/>
+                <a:spcPct val="100000"/>
               </a:lnSpc>
-              <a:buSzPct val="100000"/>
-              <a:buChar char="•"/>
-            </a:pPr>
-            <a:r>
-              <a:rPr lang="en-US" sz="1500" b="1" dirty="0">
+              <a:buNone/>
+            </a:pPr>
+            <a:r>
+              <a:rPr lang="en-US" sz="1050" dirty="0">
+                <a:solidFill>
+                  <a:srgbClr val="6B7178"/>
+                </a:solidFill>
+                <a:latin typeface="Calibri" pitchFamily="34" charset="0"/>
+                <a:ea typeface="Calibri" pitchFamily="34" charset="-122"/>
+                <a:cs typeface="Calibri" pitchFamily="34" charset="-120"/>
+              </a:rPr>
+              <a:t>byte camouflage</a:t>
+            </a:r>
+            <a:endParaRPr lang="en-US" sz="1050" dirty="0"/>
+          </a:p>
+        </p:txBody>
+      </p:sp>
+      <p:sp>
+        <p:nvSpPr>
+          <p:cNvPr id="11" name="Shape 9"/>
+          <p:cNvSpPr/>
+          <p:nvPr/>
+        </p:nvSpPr>
+        <p:spPr>
+          <a:xfrm>
+            <a:off x="4297680" y="5074920"/>
+            <a:ext cx="3383280" cy="1097280"/>
+          </a:xfrm>
+          <a:prstGeom prst="roundRect">
+            <a:avLst>
+              <a:gd name="adj" fmla="val 5833"/>
+            </a:avLst>
+          </a:prstGeom>
+          <a:solidFill>
+            <a:srgbClr val="EEF0F2"/>
+          </a:solidFill>
+          <a:ln w="9525">
+            <a:solidFill>
+              <a:srgbClr val="CED2D8"/>
+            </a:solidFill>
+            <a:prstDash val="solid"/>
+          </a:ln>
+          <a:effectLst>
+            <a:outerShdw sx="100000" sy="100000" kx="0" ky="0" algn="bl" rotWithShape="0" blurRad="101600" dist="38100" dir="5400000">
+              <a:srgbClr val="9aa0a8">
+                <a:alpha val="30000"/>
+              </a:srgbClr>
+            </a:outerShdw>
+          </a:effectLst>
+        </p:spPr>
+      </p:sp>
+      <p:sp>
+        <p:nvSpPr>
+          <p:cNvPr id="12" name="Text 10"/>
+          <p:cNvSpPr txBox="1"/>
+          <p:nvPr/>
+        </p:nvSpPr>
+        <p:spPr>
+          <a:xfrm>
+            <a:off x="4553712" y="5230368"/>
+            <a:ext cx="2871216" cy="548640"/>
+          </a:xfrm>
+          <a:prstGeom prst="rect">
+            <a:avLst/>
+          </a:prstGeom>
+          <a:noFill/>
+          <a:ln/>
+        </p:spPr>
+        <p:txBody>
+          <a:bodyPr wrap="square" lIns="0" tIns="0" rIns="0" bIns="0" rtlCol="0" anchor="ctr"/>
+          <a:lstStyle/>
+          <a:p>
+            <a:pPr indent="0" marL="0">
+              <a:buNone/>
+            </a:pPr>
+            <a:r>
+              <a:rPr lang="en-US" sz="2700" dirty="0">
+                <a:solidFill>
+                  <a:srgbClr val="B4473F"/>
+                </a:solidFill>
+                <a:latin typeface="Arial Black" pitchFamily="34" charset="0"/>
+                <a:ea typeface="Arial Black" pitchFamily="34" charset="-122"/>
+                <a:cs typeface="Arial Black" pitchFamily="34" charset="-120"/>
+              </a:rPr>
+              <a:t>naive = 0</a:t>
+            </a:r>
+            <a:endParaRPr lang="en-US" sz="2700" dirty="0"/>
+          </a:p>
+        </p:txBody>
+      </p:sp>
+      <p:sp>
+        <p:nvSpPr>
+          <p:cNvPr id="13" name="Text 11"/>
+          <p:cNvSpPr txBox="1"/>
+          <p:nvPr/>
+        </p:nvSpPr>
+        <p:spPr>
+          <a:xfrm>
+            <a:off x="4553712" y="5769864"/>
+            <a:ext cx="2871216" cy="365760"/>
+          </a:xfrm>
+          <a:prstGeom prst="rect">
+            <a:avLst/>
+          </a:prstGeom>
+          <a:noFill/>
+          <a:ln/>
+        </p:spPr>
+        <p:txBody>
+          <a:bodyPr wrap="square" lIns="0" tIns="0" rIns="0" bIns="0" rtlCol="0" anchor="ctr"/>
+          <a:lstStyle/>
+          <a:p>
+            <a:pPr indent="0" marL="0">
+              <a:lnSpc>
+                <a:spcPct val="100000"/>
+              </a:lnSpc>
+              <a:buNone/>
+            </a:pPr>
+            <a:r>
+              <a:rPr lang="en-US" sz="1050" dirty="0">
+                <a:solidFill>
+                  <a:srgbClr val="6B7178"/>
+                </a:solidFill>
+                <a:latin typeface="Calibri" pitchFamily="34" charset="0"/>
+                <a:ea typeface="Calibri" pitchFamily="34" charset="-122"/>
+                <a:cs typeface="Calibri" pitchFamily="34" charset="-120"/>
+              </a:rPr>
+              <a:t>hidden auto-run payload</a:t>
+            </a:r>
+            <a:endParaRPr lang="en-US" sz="1050" dirty="0"/>
+          </a:p>
+        </p:txBody>
+      </p:sp>
+      <p:sp>
+        <p:nvSpPr>
+          <p:cNvPr id="14" name="Shape 12"/>
+          <p:cNvSpPr/>
+          <p:nvPr/>
+        </p:nvSpPr>
+        <p:spPr>
+          <a:xfrm>
+            <a:off x="8046720" y="5074920"/>
+            <a:ext cx="3383280" cy="1097280"/>
+          </a:xfrm>
+          <a:prstGeom prst="roundRect">
+            <a:avLst>
+              <a:gd name="adj" fmla="val 5833"/>
+            </a:avLst>
+          </a:prstGeom>
+          <a:solidFill>
+            <a:srgbClr val="EEF0F2"/>
+          </a:solidFill>
+          <a:ln w="9525">
+            <a:solidFill>
+              <a:srgbClr val="CED2D8"/>
+            </a:solidFill>
+            <a:prstDash val="solid"/>
+          </a:ln>
+          <a:effectLst>
+            <a:outerShdw sx="100000" sy="100000" kx="0" ky="0" algn="bl" rotWithShape="0" blurRad="101600" dist="38100" dir="5400000">
+              <a:srgbClr val="9aa0a8">
+                <a:alpha val="30000"/>
+              </a:srgbClr>
+            </a:outerShdw>
+          </a:effectLst>
+        </p:spPr>
+      </p:sp>
+      <p:sp>
+        <p:nvSpPr>
+          <p:cNvPr id="15" name="Text 13"/>
+          <p:cNvSpPr txBox="1"/>
+          <p:nvPr/>
+        </p:nvSpPr>
+        <p:spPr>
+          <a:xfrm>
+            <a:off x="8302752" y="5230368"/>
+            <a:ext cx="2871216" cy="548640"/>
+          </a:xfrm>
+          <a:prstGeom prst="rect">
+            <a:avLst/>
+          </a:prstGeom>
+          <a:noFill/>
+          <a:ln/>
+        </p:spPr>
+        <p:txBody>
+          <a:bodyPr wrap="square" lIns="0" tIns="0" rIns="0" bIns="0" rtlCol="0" anchor="ctr"/>
+          <a:lstStyle/>
+          <a:p>
+            <a:pPr indent="0" marL="0">
+              <a:buNone/>
+            </a:pPr>
+            <a:r>
+              <a:rPr lang="en-US" sz="2700" dirty="0">
                 <a:solidFill>
                   <a:srgbClr val="1B1E22"/>
                 </a:solidFill>
-                <a:latin typeface="Calibri" pitchFamily="34" charset="0"/>
-                <a:ea typeface="Calibri" pitchFamily="34" charset="-122"/>
-                <a:cs typeface="Calibri" pitchFamily="34" charset="-120"/>
-              </a:rPr>
-              <a:t>Deep action chains  </a:t>
-            </a:r>
+                <a:latin typeface="Arial Black" pitchFamily="34" charset="0"/>
+                <a:ea typeface="Arial Black" pitchFamily="34" charset="-122"/>
+                <a:cs typeface="Arial Black" pitchFamily="34" charset="-120"/>
+              </a:rPr>
+              <a:t>depth</a:t>
+            </a:r>
+            <a:endParaRPr lang="en-US" sz="2700" dirty="0"/>
+          </a:p>
+        </p:txBody>
+      </p:sp>
+      <p:sp>
+        <p:nvSpPr>
+          <p:cNvPr id="16" name="Text 14"/>
+          <p:cNvSpPr txBox="1"/>
+          <p:nvPr/>
+        </p:nvSpPr>
+        <p:spPr>
+          <a:xfrm>
+            <a:off x="8302752" y="5769864"/>
+            <a:ext cx="2871216" cy="365760"/>
+          </a:xfrm>
+          <a:prstGeom prst="rect">
+            <a:avLst/>
+          </a:prstGeom>
+          <a:noFill/>
+          <a:ln/>
+        </p:spPr>
+        <p:txBody>
+          <a:bodyPr wrap="square" lIns="0" tIns="0" rIns="0" bIns="0" rtlCol="0" anchor="ctr"/>
+          <a:lstStyle/>
+          <a:p>
             <a:pPr indent="0" marL="0">
               <a:lnSpc>
-                <a:spcPct val="112000"/>
+                <a:spcPct val="100000"/>
               </a:lnSpc>
-              <a:spcAft>
-                <a:spcPts val="1000"/>
-              </a:spcAft>
-              <a:buNone/>
-            </a:pPr>
-            <a:r>
-              <a:rPr lang="en-US" sz="1500" dirty="0">
-                <a:solidFill>
-                  <a:srgbClr val="3A3F46"/>
-                </a:solidFill>
-                <a:latin typeface="Calibri" pitchFamily="34" charset="0"/>
-                <a:ea typeface="Calibri" pitchFamily="34" charset="-122"/>
-                <a:cs typeface="Calibri" pitchFamily="34" charset="-120"/>
-              </a:rPr>
-              <a:t>GoTo → Next sequences terminating at a dangerous node.</a:t>
-            </a:r>
-            <a:endParaRPr lang="en-US" sz="1500" dirty="0"/>
-          </a:p>
-        </p:txBody>
-      </p:sp>
-      <p:pic>
-        <p:nvPicPr>
-          <p:cNvPr id="7" name="Image 0" descr="/home/claude/PDFSentry/deck/assets/orn_ring.png">    </p:cNvPr>
-          <p:cNvPicPr>
-            <a:picLocks noChangeAspect="1"/>
-          </p:cNvPicPr>
-          <p:nvPr/>
-        </p:nvPicPr>
-        <p:blipFill>
-          <a:blip r:embed="rId2">
-            <a:alphaModFix amt="45000"/>
-          </a:blip>
-          <a:stretch>
-            <a:fillRect/>
-          </a:stretch>
-        </p:blipFill>
-        <p:spPr>
-          <a:xfrm>
-            <a:off x="10561320" y="5257800"/>
-            <a:ext cx="1143000" cy="1143000"/>
-          </a:xfrm>
-          <a:prstGeom prst="rect">
-            <a:avLst/>
-          </a:prstGeom>
-        </p:spPr>
-      </p:pic>
+              <a:buNone/>
+            </a:pPr>
+            <a:r>
+              <a:rPr lang="en-US" sz="1050" dirty="0">
+                <a:solidFill>
+                  <a:srgbClr val="6B7178"/>
+                </a:solidFill>
+                <a:latin typeface="Calibri" pitchFamily="34" charset="0"/>
+                <a:ea typeface="Calibri" pitchFamily="34" charset="-122"/>
+                <a:cs typeface="Calibri" pitchFamily="34" charset="-120"/>
+              </a:rPr>
+              <a:t>chained indirection</a:t>
+            </a:r>
+            <a:endParaRPr lang="en-US" sz="1050" dirty="0"/>
+          </a:p>
+        </p:txBody>
+      </p:sp>
+      <p:sp>
+        <p:nvSpPr>
+          <p:cNvPr id="17" name="Text 15"/>
+          <p:cNvSpPr txBox="1"/>
+          <p:nvPr/>
+        </p:nvSpPr>
+        <p:spPr>
+          <a:xfrm>
+            <a:off x="502920" y="6528816"/>
+            <a:ext cx="6400800" cy="237744"/>
+          </a:xfrm>
+          <a:prstGeom prst="rect">
+            <a:avLst/>
+          </a:prstGeom>
+          <a:noFill/>
+          <a:ln/>
+        </p:spPr>
+        <p:txBody>
+          <a:bodyPr wrap="square" lIns="0" tIns="0" rIns="0" bIns="0" rtlCol="0" anchor="ctr"/>
+          <a:lstStyle/>
+          <a:p>
+            <a:pPr indent="0" marL="0">
+              <a:buNone/>
+            </a:pPr>
+            <a:r>
+              <a:rPr lang="en-US" sz="850" spc="150" kern="0" dirty="0">
+                <a:solidFill>
+                  <a:srgbClr val="9AA0A8"/>
+                </a:solidFill>
+                <a:latin typeface="Calibri" pitchFamily="34" charset="0"/>
+                <a:ea typeface="Calibri" pitchFamily="34" charset="-122"/>
+                <a:cs typeface="Calibri" pitchFamily="34" charset="-120"/>
+              </a:rPr>
+              <a:t>PDFSentry · Reachability over Recognition</a:t>
+            </a:r>
+            <a:endParaRPr lang="en-US" sz="850" dirty="0"/>
+          </a:p>
+        </p:txBody>
+      </p:sp>
+      <p:sp>
+        <p:nvSpPr>
+          <p:cNvPr id="18" name="Text 16"/>
+          <p:cNvSpPr txBox="1"/>
+          <p:nvPr/>
+        </p:nvSpPr>
+        <p:spPr>
+          <a:xfrm>
+            <a:off x="11323015" y="6510528"/>
+            <a:ext cx="457200" cy="256032"/>
+          </a:xfrm>
+          <a:prstGeom prst="rect">
+            <a:avLst/>
+          </a:prstGeom>
+          <a:noFill/>
+          <a:ln/>
+        </p:spPr>
+        <p:txBody>
+          <a:bodyPr wrap="square" lIns="0" tIns="0" rIns="0" bIns="0" rtlCol="0" anchor="ctr"/>
+          <a:lstStyle/>
+          <a:p>
+            <a:pPr algn="r" indent="0" marL="0">
+              <a:buNone/>
+            </a:pPr>
+            <a:r>
+              <a:rPr lang="en-US" sz="950" b="1" dirty="0">
+                <a:solidFill>
+                  <a:srgbClr val="6B7178"/>
+                </a:solidFill>
+                <a:latin typeface="Calibri" pitchFamily="34" charset="0"/>
+                <a:ea typeface="Calibri" pitchFamily="34" charset="-122"/>
+                <a:cs typeface="Calibri" pitchFamily="34" charset="-120"/>
+              </a:rPr>
+              <a:t>09</a:t>
+            </a:r>
+            <a:endParaRPr lang="en-US" sz="950" dirty="0"/>
+          </a:p>
+        </p:txBody>
+      </p:sp>
     </p:spTree>
   </p:cSld>
   <p:clrMapOvr>
